--- a/tutorials/week_4/4.binary_search.pptx
+++ b/tutorials/week_4/4.binary_search.pptx
@@ -2759,53 +2759,6 @@
       </p:grpSpPr>
       <p:sp>
         <p:nvSpPr>
-          <p:cNvPr id="2" name="New shape"/>
-          <p:cNvSpPr/>
-          <p:nvPr/>
-        </p:nvSpPr>
-        <p:spPr>
-          <a:xfrm>
-            <a:off x="0" y="-1"/>
-            <a:ext cx="12192000" cy="6857999"/>
-          </a:xfrm>
-          <a:prstGeom prst="rect">
-            <a:avLst/>
-          </a:prstGeom>
-          <a:solidFill>
-            <a:srgbClr val="FFFFFF"/>
-          </a:solidFill>
-          <a:ln w="0">
-            <a:noFill/>
-          </a:ln>
-        </p:spPr>
-        <p:style>
-          <a:lnRef idx="2">
-            <a:schemeClr val="accent1">
-              <a:shade val="50000"/>
-            </a:schemeClr>
-          </a:lnRef>
-          <a:fillRef idx="1">
-            <a:schemeClr val="accent1"/>
-          </a:fillRef>
-          <a:effectRef idx="0">
-            <a:schemeClr val="accent1"/>
-          </a:effectRef>
-          <a:fontRef idx="minor">
-            <a:schemeClr val="lt1"/>
-          </a:fontRef>
-        </p:style>
-        <p:txBody>
-          <a:bodyPr rtlCol="0" anchor="ctr"/>
-          <a:lstStyle>
-            <a:defPPr/>
-          </a:lstStyle>
-          <a:p>
-            <a:endParaRPr lang="en-US"/>
-          </a:p>
-        </p:txBody>
-      </p:sp>
-      <p:sp>
-        <p:nvSpPr>
           <p:cNvPr id="3" name="New shape"/>
           <p:cNvSpPr/>
           <p:nvPr/>
@@ -2883,53 +2836,6 @@
       </p:grpSpPr>
       <p:sp>
         <p:nvSpPr>
-          <p:cNvPr id="2" name="New shape"/>
-          <p:cNvSpPr/>
-          <p:nvPr/>
-        </p:nvSpPr>
-        <p:spPr>
-          <a:xfrm>
-            <a:off x="0" y="-1"/>
-            <a:ext cx="12192000" cy="6857999"/>
-          </a:xfrm>
-          <a:prstGeom prst="rect">
-            <a:avLst/>
-          </a:prstGeom>
-          <a:solidFill>
-            <a:srgbClr val="FFFFFF"/>
-          </a:solidFill>
-          <a:ln w="0">
-            <a:noFill/>
-          </a:ln>
-        </p:spPr>
-        <p:style>
-          <a:lnRef idx="2">
-            <a:schemeClr val="accent1">
-              <a:shade val="50000"/>
-            </a:schemeClr>
-          </a:lnRef>
-          <a:fillRef idx="1">
-            <a:schemeClr val="accent1"/>
-          </a:fillRef>
-          <a:effectRef idx="0">
-            <a:schemeClr val="accent1"/>
-          </a:effectRef>
-          <a:fontRef idx="minor">
-            <a:schemeClr val="lt1"/>
-          </a:fontRef>
-        </p:style>
-        <p:txBody>
-          <a:bodyPr rtlCol="0" anchor="ctr"/>
-          <a:lstStyle>
-            <a:defPPr/>
-          </a:lstStyle>
-          <a:p>
-            <a:endParaRPr lang="en-US"/>
-          </a:p>
-        </p:txBody>
-      </p:sp>
-      <p:sp>
-        <p:nvSpPr>
           <p:cNvPr id="3" name="New shape"/>
           <p:cNvSpPr/>
           <p:nvPr/>
@@ -6019,58 +5925,6 @@
       </p:sp>
       <p:sp>
         <p:nvSpPr>
-          <p:cNvPr id="70" name="New shape"/>
-          <p:cNvSpPr/>
-          <p:nvPr/>
-        </p:nvSpPr>
-        <p:spPr>
-          <a:xfrm>
-            <a:off x="1085393" y="2235480"/>
-            <a:ext cx="8249421" cy="496714"/>
-          </a:xfrm>
-          <a:prstGeom prst="rect">
-            <a:avLst/>
-          </a:prstGeom>
-          <a:noFill/>
-        </p:spPr>
-        <p:style>
-          <a:lnRef idx="2">
-            <a:srgbClr val="000000">
-              <a:alpha val="0"/>
-            </a:srgbClr>
-          </a:lnRef>
-          <a:fillRef idx="1">
-            <a:schemeClr val="accent1"/>
-          </a:fillRef>
-          <a:effectRef idx="0">
-            <a:schemeClr val="accent1"/>
-          </a:effectRef>
-          <a:fontRef idx="minor">
-            <a:schemeClr val="lt1"/>
-          </a:fontRef>
-        </p:style>
-        <p:txBody>
-          <a:bodyPr wrap="none" lIns="0" tIns="0" rtlCol="0" anchor="ctr">
-            <a:spAutoFit/>
-          </a:bodyPr>
-          <a:lstStyle>
-            <a:defPPr/>
-          </a:lstStyle>
-          <a:p>
-            <a:r>
-              <a:rPr lang="en-US" sz="3204" b="1">
-                <a:solidFill>
-                  <a:srgbClr val="FFFFFF"/>
-                </a:solidFill>
-                <a:latin typeface="Calibri"/>
-              </a:rPr>
-              <a:t>67  8  910 11 14 15 17 19 22 23 25 28 30</a:t>
-            </a:r>
-          </a:p>
-        </p:txBody>
-      </p:sp>
-      <p:sp>
-        <p:nvSpPr>
           <p:cNvPr id="71" name="New shape"/>
           <p:cNvSpPr/>
           <p:nvPr/>
@@ -7098,7 +6952,7 @@
           </a:lstStyle>
           <a:p>
             <a:r>
-              <a:rPr lang="en-US" sz="2402">
+              <a:rPr lang="en-US" sz="2402" dirty="0">
                 <a:solidFill>
                   <a:srgbClr val="000000"/>
                 </a:solidFill>
@@ -7273,8 +7127,8 @@
         </p:nvSpPr>
         <p:spPr>
           <a:xfrm>
-            <a:off x="7182866" y="932589"/>
-            <a:ext cx="1735782" cy="372070"/>
+            <a:off x="7182866" y="910875"/>
+            <a:ext cx="1914883" cy="415498"/>
           </a:xfrm>
           <a:prstGeom prst="rect">
             <a:avLst/>
@@ -7306,13 +7160,13 @@
           </a:lstStyle>
           <a:p>
             <a:r>
-              <a:rPr lang="en-US" sz="2400" b="1">
+              <a:rPr lang="en-US" sz="2400" b="1" dirty="0">
                 <a:solidFill>
                   <a:srgbClr val="FFFFFF"/>
                 </a:solidFill>
                 <a:latin typeface="Calibri"/>
               </a:rPr>
-              <a:t>Target  Start</a:t>
+              <a:t>Target      Start</a:t>
             </a:r>
           </a:p>
         </p:txBody>
@@ -7325,8 +7179,8 @@
         </p:nvSpPr>
         <p:spPr>
           <a:xfrm>
-            <a:off x="9496933" y="932589"/>
-            <a:ext cx="1835646" cy="372070"/>
+            <a:off x="9496933" y="910875"/>
+            <a:ext cx="1892506" cy="415498"/>
           </a:xfrm>
           <a:prstGeom prst="rect">
             <a:avLst/>
@@ -7358,13 +7212,13 @@
           </a:lstStyle>
           <a:p>
             <a:r>
-              <a:rPr lang="en-US" sz="2400" b="1">
+              <a:rPr lang="en-US" sz="2400" b="1" dirty="0">
                 <a:solidFill>
                   <a:srgbClr val="FFFFFF"/>
                 </a:solidFill>
                 <a:latin typeface="Calibri"/>
               </a:rPr>
-              <a:t>End   Middle</a:t>
+              <a:t>End      Middle</a:t>
             </a:r>
           </a:p>
         </p:txBody>
@@ -7573,6 +7427,64 @@
                 <a:latin typeface="Calibri"/>
               </a:rPr>
               <a:t>7</a:t>
+            </a:r>
+          </a:p>
+        </p:txBody>
+      </p:sp>
+      <p:sp>
+        <p:nvSpPr>
+          <p:cNvPr id="100" name="New shape">
+            <a:extLst>
+              <a:ext uri="{FF2B5EF4-FFF2-40B4-BE49-F238E27FC236}">
+                <a16:creationId xmlns:a16="http://schemas.microsoft.com/office/drawing/2014/main" id="{257664BD-3C8C-EAFE-0AD0-CAB073B83C69}"/>
+              </a:ext>
+            </a:extLst>
+          </p:cNvPr>
+          <p:cNvSpPr/>
+          <p:nvPr/>
+        </p:nvSpPr>
+        <p:spPr>
+          <a:xfrm>
+            <a:off x="1085393" y="2214212"/>
+            <a:ext cx="10345140" cy="539250"/>
+          </a:xfrm>
+          <a:prstGeom prst="rect">
+            <a:avLst/>
+          </a:prstGeom>
+          <a:noFill/>
+        </p:spPr>
+        <p:style>
+          <a:lnRef idx="2">
+            <a:srgbClr val="000000">
+              <a:alpha val="0"/>
+            </a:srgbClr>
+          </a:lnRef>
+          <a:fillRef idx="1">
+            <a:schemeClr val="accent1"/>
+          </a:fillRef>
+          <a:effectRef idx="0">
+            <a:schemeClr val="accent1"/>
+          </a:effectRef>
+          <a:fontRef idx="minor">
+            <a:schemeClr val="lt1"/>
+          </a:fontRef>
+        </p:style>
+        <p:txBody>
+          <a:bodyPr wrap="none" lIns="0" tIns="0" rtlCol="0" anchor="ctr">
+            <a:spAutoFit/>
+          </a:bodyPr>
+          <a:lstStyle>
+            <a:defPPr/>
+          </a:lstStyle>
+          <a:p>
+            <a:r>
+              <a:rPr lang="en-US" sz="3204" b="1" dirty="0">
+                <a:solidFill>
+                  <a:srgbClr val="FFFFFF"/>
+                </a:solidFill>
+                <a:latin typeface="Calibri"/>
+              </a:rPr>
+              <a:t>6      7     8     9     10   11   14   15    17  19    22   23   25   28   30</a:t>
             </a:r>
           </a:p>
         </p:txBody>
@@ -7604,53 +7516,6 @@
       </p:grpSpPr>
       <p:sp>
         <p:nvSpPr>
-          <p:cNvPr id="2" name="New shape"/>
-          <p:cNvSpPr/>
-          <p:nvPr/>
-        </p:nvSpPr>
-        <p:spPr>
-          <a:xfrm>
-            <a:off x="0" y="-1"/>
-            <a:ext cx="12192000" cy="6857999"/>
-          </a:xfrm>
-          <a:prstGeom prst="rect">
-            <a:avLst/>
-          </a:prstGeom>
-          <a:solidFill>
-            <a:srgbClr val="FFFFFF"/>
-          </a:solidFill>
-          <a:ln w="0">
-            <a:noFill/>
-          </a:ln>
-        </p:spPr>
-        <p:style>
-          <a:lnRef idx="2">
-            <a:schemeClr val="accent1">
-              <a:shade val="50000"/>
-            </a:schemeClr>
-          </a:lnRef>
-          <a:fillRef idx="1">
-            <a:schemeClr val="accent1"/>
-          </a:fillRef>
-          <a:effectRef idx="0">
-            <a:schemeClr val="accent1"/>
-          </a:effectRef>
-          <a:fontRef idx="minor">
-            <a:schemeClr val="lt1"/>
-          </a:fontRef>
-        </p:style>
-        <p:txBody>
-          <a:bodyPr rtlCol="0" anchor="ctr"/>
-          <a:lstStyle>
-            <a:defPPr/>
-          </a:lstStyle>
-          <a:p>
-            <a:endParaRPr lang="en-US"/>
-          </a:p>
-        </p:txBody>
-      </p:sp>
-      <p:sp>
-        <p:nvSpPr>
           <p:cNvPr id="3" name="New shape"/>
           <p:cNvSpPr/>
           <p:nvPr/>
@@ -7969,8 +7834,8 @@
         </p:nvSpPr>
         <p:spPr>
           <a:xfrm>
-            <a:off x="1615694" y="3240554"/>
-            <a:ext cx="9488192" cy="372442"/>
+            <a:off x="1615694" y="3218866"/>
+            <a:ext cx="8537209" cy="415819"/>
           </a:xfrm>
           <a:prstGeom prst="rect">
             <a:avLst/>
@@ -8002,13 +7867,13 @@
           </a:lstStyle>
           <a:p>
             <a:r>
-              <a:rPr lang="en-US" sz="2402">
+              <a:rPr lang="en-US" sz="2402" dirty="0">
                 <a:solidFill>
                   <a:srgbClr val="000000"/>
                 </a:solidFill>
                 <a:latin typeface="Calibri"/>
               </a:rPr>
-              <a:t>In order to leverage this power however, our array must first be sorted, else </a:t>
+              <a:t>To leverage this power however, our array must first be sorted, else </a:t>
             </a:r>
           </a:p>
         </p:txBody>
@@ -8092,53 +7957,6 @@
       </p:grpSpPr>
       <p:sp>
         <p:nvSpPr>
-          <p:cNvPr id="2" name="New shape"/>
-          <p:cNvSpPr/>
-          <p:nvPr/>
-        </p:nvSpPr>
-        <p:spPr>
-          <a:xfrm>
-            <a:off x="0" y="-1"/>
-            <a:ext cx="12192000" cy="6857999"/>
-          </a:xfrm>
-          <a:prstGeom prst="rect">
-            <a:avLst/>
-          </a:prstGeom>
-          <a:solidFill>
-            <a:srgbClr val="FFFFFF"/>
-          </a:solidFill>
-          <a:ln w="0">
-            <a:noFill/>
-          </a:ln>
-        </p:spPr>
-        <p:style>
-          <a:lnRef idx="2">
-            <a:schemeClr val="accent1">
-              <a:shade val="50000"/>
-            </a:schemeClr>
-          </a:lnRef>
-          <a:fillRef idx="1">
-            <a:schemeClr val="accent1"/>
-          </a:fillRef>
-          <a:effectRef idx="0">
-            <a:schemeClr val="accent1"/>
-          </a:effectRef>
-          <a:fontRef idx="minor">
-            <a:schemeClr val="lt1"/>
-          </a:fontRef>
-        </p:style>
-        <p:txBody>
-          <a:bodyPr rtlCol="0" anchor="ctr"/>
-          <a:lstStyle>
-            <a:defPPr/>
-          </a:lstStyle>
-          <a:p>
-            <a:endParaRPr lang="en-US"/>
-          </a:p>
-        </p:txBody>
-      </p:sp>
-      <p:sp>
-        <p:nvSpPr>
           <p:cNvPr id="3" name="New shape"/>
           <p:cNvSpPr/>
           <p:nvPr/>
@@ -8991,53 +8809,6 @@
       </p:grpSpPr>
       <p:sp>
         <p:nvSpPr>
-          <p:cNvPr id="2" name="New shape"/>
-          <p:cNvSpPr/>
-          <p:nvPr/>
-        </p:nvSpPr>
-        <p:spPr>
-          <a:xfrm>
-            <a:off x="0" y="-1"/>
-            <a:ext cx="12192000" cy="6857999"/>
-          </a:xfrm>
-          <a:prstGeom prst="rect">
-            <a:avLst/>
-          </a:prstGeom>
-          <a:solidFill>
-            <a:srgbClr val="FFFFFF"/>
-          </a:solidFill>
-          <a:ln w="0">
-            <a:noFill/>
-          </a:ln>
-        </p:spPr>
-        <p:style>
-          <a:lnRef idx="2">
-            <a:schemeClr val="accent1">
-              <a:shade val="50000"/>
-            </a:schemeClr>
-          </a:lnRef>
-          <a:fillRef idx="1">
-            <a:schemeClr val="accent1"/>
-          </a:fillRef>
-          <a:effectRef idx="0">
-            <a:schemeClr val="accent1"/>
-          </a:effectRef>
-          <a:fontRef idx="minor">
-            <a:schemeClr val="lt1"/>
-          </a:fontRef>
-        </p:style>
-        <p:txBody>
-          <a:bodyPr rtlCol="0" anchor="ctr"/>
-          <a:lstStyle>
-            <a:defPPr/>
-          </a:lstStyle>
-          <a:p>
-            <a:endParaRPr lang="en-US"/>
-          </a:p>
-        </p:txBody>
-      </p:sp>
-      <p:sp>
-        <p:nvSpPr>
           <p:cNvPr id="3" name="New shape"/>
           <p:cNvSpPr/>
           <p:nvPr/>
@@ -11836,8 +11607,8 @@
         </p:nvSpPr>
         <p:spPr>
           <a:xfrm>
-            <a:off x="7182866" y="932589"/>
-            <a:ext cx="1735782" cy="372070"/>
+            <a:off x="7182866" y="910875"/>
+            <a:ext cx="1914883" cy="415498"/>
           </a:xfrm>
           <a:prstGeom prst="rect">
             <a:avLst/>
@@ -11869,13 +11640,13 @@
           </a:lstStyle>
           <a:p>
             <a:r>
-              <a:rPr lang="en-US" sz="2400" b="1">
+              <a:rPr lang="en-US" sz="2400" b="1" dirty="0">
                 <a:solidFill>
                   <a:srgbClr val="FFFFFF"/>
                 </a:solidFill>
                 <a:latin typeface="Calibri"/>
               </a:rPr>
-              <a:t>Target  Start</a:t>
+              <a:t>Target      Start</a:t>
             </a:r>
           </a:p>
         </p:txBody>
@@ -11888,8 +11659,8 @@
         </p:nvSpPr>
         <p:spPr>
           <a:xfrm>
-            <a:off x="9496933" y="932589"/>
-            <a:ext cx="1835646" cy="372070"/>
+            <a:off x="9496933" y="910875"/>
+            <a:ext cx="1892506" cy="415498"/>
           </a:xfrm>
           <a:prstGeom prst="rect">
             <a:avLst/>
@@ -11921,13 +11692,13 @@
           </a:lstStyle>
           <a:p>
             <a:r>
-              <a:rPr lang="en-US" sz="2400" b="1">
+              <a:rPr lang="en-US" sz="2400" b="1" dirty="0">
                 <a:solidFill>
                   <a:srgbClr val="FFFFFF"/>
                 </a:solidFill>
                 <a:latin typeface="Calibri"/>
               </a:rPr>
-              <a:t>End   Middle</a:t>
+              <a:t>End      Middle</a:t>
             </a:r>
           </a:p>
         </p:txBody>
@@ -11959,14 +11730,14 @@
       </p:grpSpPr>
       <p:sp>
         <p:nvSpPr>
-          <p:cNvPr id="2" name="New shape"/>
-          <p:cNvSpPr/>
-          <p:nvPr/>
-        </p:nvSpPr>
-        <p:spPr>
-          <a:xfrm>
-            <a:off x="0" y="-1"/>
-            <a:ext cx="12192000" cy="6857999"/>
+          <p:cNvPr id="18" name="New shape"/>
+          <p:cNvSpPr/>
+          <p:nvPr/>
+        </p:nvSpPr>
+        <p:spPr>
+          <a:xfrm>
+            <a:off x="838200" y="2734945"/>
+            <a:ext cx="701040" cy="370840"/>
           </a:xfrm>
           <a:prstGeom prst="rect">
             <a:avLst/>
@@ -12006,13 +11777,13 @@
       </p:sp>
       <p:sp>
         <p:nvSpPr>
-          <p:cNvPr id="18" name="New shape"/>
-          <p:cNvSpPr/>
-          <p:nvPr/>
-        </p:nvSpPr>
-        <p:spPr>
-          <a:xfrm>
-            <a:off x="838200" y="2734945"/>
+          <p:cNvPr id="19" name="New shape"/>
+          <p:cNvSpPr/>
+          <p:nvPr/>
+        </p:nvSpPr>
+        <p:spPr>
+          <a:xfrm>
+            <a:off x="1539240" y="2734945"/>
             <a:ext cx="701040" cy="370840"/>
           </a:xfrm>
           <a:prstGeom prst="rect">
@@ -12053,13 +11824,13 @@
       </p:sp>
       <p:sp>
         <p:nvSpPr>
-          <p:cNvPr id="19" name="New shape"/>
-          <p:cNvSpPr/>
-          <p:nvPr/>
-        </p:nvSpPr>
-        <p:spPr>
-          <a:xfrm>
-            <a:off x="1539240" y="2734945"/>
+          <p:cNvPr id="20" name="New shape"/>
+          <p:cNvSpPr/>
+          <p:nvPr/>
+        </p:nvSpPr>
+        <p:spPr>
+          <a:xfrm>
+            <a:off x="2240280" y="2734945"/>
             <a:ext cx="701040" cy="370840"/>
           </a:xfrm>
           <a:prstGeom prst="rect">
@@ -12100,13 +11871,13 @@
       </p:sp>
       <p:sp>
         <p:nvSpPr>
-          <p:cNvPr id="20" name="New shape"/>
-          <p:cNvSpPr/>
-          <p:nvPr/>
-        </p:nvSpPr>
-        <p:spPr>
-          <a:xfrm>
-            <a:off x="2240280" y="2734945"/>
+          <p:cNvPr id="21" name="New shape"/>
+          <p:cNvSpPr/>
+          <p:nvPr/>
+        </p:nvSpPr>
+        <p:spPr>
+          <a:xfrm>
+            <a:off x="2941320" y="2734945"/>
             <a:ext cx="701040" cy="370840"/>
           </a:xfrm>
           <a:prstGeom prst="rect">
@@ -12147,13 +11918,13 @@
       </p:sp>
       <p:sp>
         <p:nvSpPr>
-          <p:cNvPr id="21" name="New shape"/>
-          <p:cNvSpPr/>
-          <p:nvPr/>
-        </p:nvSpPr>
-        <p:spPr>
-          <a:xfrm>
-            <a:off x="2941320" y="2734945"/>
+          <p:cNvPr id="22" name="New shape"/>
+          <p:cNvSpPr/>
+          <p:nvPr/>
+        </p:nvSpPr>
+        <p:spPr>
+          <a:xfrm>
+            <a:off x="3642360" y="2734945"/>
             <a:ext cx="701040" cy="370840"/>
           </a:xfrm>
           <a:prstGeom prst="rect">
@@ -12194,13 +11965,13 @@
       </p:sp>
       <p:sp>
         <p:nvSpPr>
-          <p:cNvPr id="22" name="New shape"/>
-          <p:cNvSpPr/>
-          <p:nvPr/>
-        </p:nvSpPr>
-        <p:spPr>
-          <a:xfrm>
-            <a:off x="3642360" y="2734945"/>
+          <p:cNvPr id="23" name="New shape"/>
+          <p:cNvSpPr/>
+          <p:nvPr/>
+        </p:nvSpPr>
+        <p:spPr>
+          <a:xfrm>
+            <a:off x="4343400" y="2734945"/>
             <a:ext cx="701040" cy="370840"/>
           </a:xfrm>
           <a:prstGeom prst="rect">
@@ -12241,13 +12012,13 @@
       </p:sp>
       <p:sp>
         <p:nvSpPr>
-          <p:cNvPr id="23" name="New shape"/>
-          <p:cNvSpPr/>
-          <p:nvPr/>
-        </p:nvSpPr>
-        <p:spPr>
-          <a:xfrm>
-            <a:off x="4343400" y="2734945"/>
+          <p:cNvPr id="24" name="New shape"/>
+          <p:cNvSpPr/>
+          <p:nvPr/>
+        </p:nvSpPr>
+        <p:spPr>
+          <a:xfrm>
+            <a:off x="5044440" y="2734945"/>
             <a:ext cx="701040" cy="370840"/>
           </a:xfrm>
           <a:prstGeom prst="rect">
@@ -12288,13 +12059,13 @@
       </p:sp>
       <p:sp>
         <p:nvSpPr>
-          <p:cNvPr id="24" name="New shape"/>
-          <p:cNvSpPr/>
-          <p:nvPr/>
-        </p:nvSpPr>
-        <p:spPr>
-          <a:xfrm>
-            <a:off x="5044440" y="2734945"/>
+          <p:cNvPr id="25" name="New shape"/>
+          <p:cNvSpPr/>
+          <p:nvPr/>
+        </p:nvSpPr>
+        <p:spPr>
+          <a:xfrm>
+            <a:off x="5745480" y="2734945"/>
             <a:ext cx="701040" cy="370840"/>
           </a:xfrm>
           <a:prstGeom prst="rect">
@@ -12335,13 +12106,13 @@
       </p:sp>
       <p:sp>
         <p:nvSpPr>
-          <p:cNvPr id="25" name="New shape"/>
-          <p:cNvSpPr/>
-          <p:nvPr/>
-        </p:nvSpPr>
-        <p:spPr>
-          <a:xfrm>
-            <a:off x="5745480" y="2734945"/>
+          <p:cNvPr id="26" name="New shape"/>
+          <p:cNvSpPr/>
+          <p:nvPr/>
+        </p:nvSpPr>
+        <p:spPr>
+          <a:xfrm>
+            <a:off x="6446520" y="2734945"/>
             <a:ext cx="701040" cy="370840"/>
           </a:xfrm>
           <a:prstGeom prst="rect">
@@ -12382,13 +12153,13 @@
       </p:sp>
       <p:sp>
         <p:nvSpPr>
-          <p:cNvPr id="26" name="New shape"/>
-          <p:cNvSpPr/>
-          <p:nvPr/>
-        </p:nvSpPr>
-        <p:spPr>
-          <a:xfrm>
-            <a:off x="6446520" y="2734945"/>
+          <p:cNvPr id="27" name="New shape"/>
+          <p:cNvSpPr/>
+          <p:nvPr/>
+        </p:nvSpPr>
+        <p:spPr>
+          <a:xfrm>
+            <a:off x="7147561" y="2734945"/>
             <a:ext cx="701040" cy="370840"/>
           </a:xfrm>
           <a:prstGeom prst="rect">
@@ -12429,13 +12200,13 @@
       </p:sp>
       <p:sp>
         <p:nvSpPr>
-          <p:cNvPr id="27" name="New shape"/>
-          <p:cNvSpPr/>
-          <p:nvPr/>
-        </p:nvSpPr>
-        <p:spPr>
-          <a:xfrm>
-            <a:off x="7147561" y="2734945"/>
+          <p:cNvPr id="28" name="New shape"/>
+          <p:cNvSpPr/>
+          <p:nvPr/>
+        </p:nvSpPr>
+        <p:spPr>
+          <a:xfrm>
+            <a:off x="7848600" y="2734945"/>
             <a:ext cx="701040" cy="370840"/>
           </a:xfrm>
           <a:prstGeom prst="rect">
@@ -12476,13 +12247,13 @@
       </p:sp>
       <p:sp>
         <p:nvSpPr>
-          <p:cNvPr id="28" name="New shape"/>
-          <p:cNvSpPr/>
-          <p:nvPr/>
-        </p:nvSpPr>
-        <p:spPr>
-          <a:xfrm>
-            <a:off x="7848600" y="2734945"/>
+          <p:cNvPr id="29" name="New shape"/>
+          <p:cNvSpPr/>
+          <p:nvPr/>
+        </p:nvSpPr>
+        <p:spPr>
+          <a:xfrm>
+            <a:off x="8549641" y="2734945"/>
             <a:ext cx="701040" cy="370840"/>
           </a:xfrm>
           <a:prstGeom prst="rect">
@@ -12523,13 +12294,13 @@
       </p:sp>
       <p:sp>
         <p:nvSpPr>
-          <p:cNvPr id="29" name="New shape"/>
-          <p:cNvSpPr/>
-          <p:nvPr/>
-        </p:nvSpPr>
-        <p:spPr>
-          <a:xfrm>
-            <a:off x="8549641" y="2734945"/>
+          <p:cNvPr id="30" name="New shape"/>
+          <p:cNvSpPr/>
+          <p:nvPr/>
+        </p:nvSpPr>
+        <p:spPr>
+          <a:xfrm>
+            <a:off x="9250680" y="2734945"/>
             <a:ext cx="701040" cy="370840"/>
           </a:xfrm>
           <a:prstGeom prst="rect">
@@ -12570,13 +12341,13 @@
       </p:sp>
       <p:sp>
         <p:nvSpPr>
-          <p:cNvPr id="30" name="New shape"/>
-          <p:cNvSpPr/>
-          <p:nvPr/>
-        </p:nvSpPr>
-        <p:spPr>
-          <a:xfrm>
-            <a:off x="9250680" y="2734945"/>
+          <p:cNvPr id="31" name="New shape"/>
+          <p:cNvSpPr/>
+          <p:nvPr/>
+        </p:nvSpPr>
+        <p:spPr>
+          <a:xfrm>
+            <a:off x="9951720" y="2734945"/>
             <a:ext cx="701040" cy="370840"/>
           </a:xfrm>
           <a:prstGeom prst="rect">
@@ -12617,13 +12388,13 @@
       </p:sp>
       <p:sp>
         <p:nvSpPr>
-          <p:cNvPr id="31" name="New shape"/>
-          <p:cNvSpPr/>
-          <p:nvPr/>
-        </p:nvSpPr>
-        <p:spPr>
-          <a:xfrm>
-            <a:off x="9951720" y="2734945"/>
+          <p:cNvPr id="32" name="New shape"/>
+          <p:cNvSpPr/>
+          <p:nvPr/>
+        </p:nvSpPr>
+        <p:spPr>
+          <a:xfrm>
+            <a:off x="10652761" y="2734945"/>
             <a:ext cx="701040" cy="370840"/>
           </a:xfrm>
           <a:prstGeom prst="rect">
@@ -12664,53 +12435,6 @@
       </p:sp>
       <p:sp>
         <p:nvSpPr>
-          <p:cNvPr id="32" name="New shape"/>
-          <p:cNvSpPr/>
-          <p:nvPr/>
-        </p:nvSpPr>
-        <p:spPr>
-          <a:xfrm>
-            <a:off x="10652761" y="2734945"/>
-            <a:ext cx="701040" cy="370840"/>
-          </a:xfrm>
-          <a:prstGeom prst="rect">
-            <a:avLst/>
-          </a:prstGeom>
-          <a:solidFill>
-            <a:srgbClr val="FFFFFF"/>
-          </a:solidFill>
-          <a:ln w="0">
-            <a:noFill/>
-          </a:ln>
-        </p:spPr>
-        <p:style>
-          <a:lnRef idx="2">
-            <a:schemeClr val="accent1">
-              <a:shade val="50000"/>
-            </a:schemeClr>
-          </a:lnRef>
-          <a:fillRef idx="1">
-            <a:schemeClr val="accent1"/>
-          </a:fillRef>
-          <a:effectRef idx="0">
-            <a:schemeClr val="accent1"/>
-          </a:effectRef>
-          <a:fontRef idx="minor">
-            <a:schemeClr val="lt1"/>
-          </a:fontRef>
-        </p:style>
-        <p:txBody>
-          <a:bodyPr rtlCol="0" anchor="ctr"/>
-          <a:lstStyle>
-            <a:defPPr/>
-          </a:lstStyle>
-          <a:p>
-            <a:endParaRPr lang="en-US"/>
-          </a:p>
-        </p:txBody>
-      </p:sp>
-      <p:sp>
-        <p:nvSpPr>
           <p:cNvPr id="33" name="New shape"/>
           <p:cNvSpPr/>
           <p:nvPr/>
@@ -13492,734 +13216,6 @@
           </a:effectRef>
           <a:fontRef idx="minor">
             <a:schemeClr val="lt1"/>
-          </a:fontRef>
-        </p:style>
-        <p:txBody>
-          <a:bodyPr rtlCol="0" anchor="ctr"/>
-          <a:lstStyle>
-            <a:defPPr/>
-          </a:lstStyle>
-          <a:p>
-            <a:endParaRPr lang="en-US"/>
-          </a:p>
-        </p:txBody>
-      </p:sp>
-      <p:sp>
-        <p:nvSpPr>
-          <p:cNvPr id="53" name="New shape"/>
-          <p:cNvSpPr/>
-          <p:nvPr/>
-        </p:nvSpPr>
-        <p:spPr>
-          <a:xfrm>
-            <a:off x="7034276" y="861822"/>
-            <a:ext cx="1079881" cy="457200"/>
-          </a:xfrm>
-          <a:prstGeom prst="rect">
-            <a:avLst/>
-          </a:prstGeom>
-          <a:solidFill>
-            <a:srgbClr val="5B9BD4"/>
-          </a:solidFill>
-          <a:ln w="0">
-            <a:noFill/>
-          </a:ln>
-        </p:spPr>
-        <p:style>
-          <a:lnRef idx="2">
-            <a:schemeClr val="accent1">
-              <a:shade val="50000"/>
-            </a:schemeClr>
-          </a:lnRef>
-          <a:fillRef idx="1">
-            <a:schemeClr val="accent1"/>
-          </a:fillRef>
-          <a:effectRef idx="0">
-            <a:schemeClr val="accent1"/>
-          </a:effectRef>
-          <a:fontRef idx="minor">
-            <a:schemeClr val="lt1"/>
-          </a:fontRef>
-        </p:style>
-        <p:txBody>
-          <a:bodyPr rtlCol="0" anchor="ctr"/>
-          <a:lstStyle>
-            <a:defPPr/>
-          </a:lstStyle>
-          <a:p>
-            <a:endParaRPr lang="en-US"/>
-          </a:p>
-        </p:txBody>
-      </p:sp>
-      <p:sp>
-        <p:nvSpPr>
-          <p:cNvPr id="54" name="New shape"/>
-          <p:cNvSpPr/>
-          <p:nvPr/>
-        </p:nvSpPr>
-        <p:spPr>
-          <a:xfrm>
-            <a:off x="8114156" y="861822"/>
-            <a:ext cx="1079881" cy="457200"/>
-          </a:xfrm>
-          <a:prstGeom prst="rect">
-            <a:avLst/>
-          </a:prstGeom>
-          <a:solidFill>
-            <a:srgbClr val="5B9BD4"/>
-          </a:solidFill>
-          <a:ln w="0">
-            <a:noFill/>
-          </a:ln>
-        </p:spPr>
-        <p:style>
-          <a:lnRef idx="2">
-            <a:schemeClr val="accent1">
-              <a:shade val="50000"/>
-            </a:schemeClr>
-          </a:lnRef>
-          <a:fillRef idx="1">
-            <a:schemeClr val="accent1"/>
-          </a:fillRef>
-          <a:effectRef idx="0">
-            <a:schemeClr val="accent1"/>
-          </a:effectRef>
-          <a:fontRef idx="minor">
-            <a:schemeClr val="lt1"/>
-          </a:fontRef>
-        </p:style>
-        <p:txBody>
-          <a:bodyPr rtlCol="0" anchor="ctr"/>
-          <a:lstStyle>
-            <a:defPPr/>
-          </a:lstStyle>
-          <a:p>
-            <a:endParaRPr lang="en-US"/>
-          </a:p>
-        </p:txBody>
-      </p:sp>
-      <p:sp>
-        <p:nvSpPr>
-          <p:cNvPr id="55" name="New shape"/>
-          <p:cNvSpPr/>
-          <p:nvPr/>
-        </p:nvSpPr>
-        <p:spPr>
-          <a:xfrm>
-            <a:off x="9194037" y="861822"/>
-            <a:ext cx="1079881" cy="457200"/>
-          </a:xfrm>
-          <a:prstGeom prst="rect">
-            <a:avLst/>
-          </a:prstGeom>
-          <a:solidFill>
-            <a:srgbClr val="5B9BD4"/>
-          </a:solidFill>
-          <a:ln w="0">
-            <a:noFill/>
-          </a:ln>
-        </p:spPr>
-        <p:style>
-          <a:lnRef idx="2">
-            <a:schemeClr val="accent1">
-              <a:shade val="50000"/>
-            </a:schemeClr>
-          </a:lnRef>
-          <a:fillRef idx="1">
-            <a:schemeClr val="accent1"/>
-          </a:fillRef>
-          <a:effectRef idx="0">
-            <a:schemeClr val="accent1"/>
-          </a:effectRef>
-          <a:fontRef idx="minor">
-            <a:schemeClr val="lt1"/>
-          </a:fontRef>
-        </p:style>
-        <p:txBody>
-          <a:bodyPr rtlCol="0" anchor="ctr"/>
-          <a:lstStyle>
-            <a:defPPr/>
-          </a:lstStyle>
-          <a:p>
-            <a:endParaRPr lang="en-US"/>
-          </a:p>
-        </p:txBody>
-      </p:sp>
-      <p:sp>
-        <p:nvSpPr>
-          <p:cNvPr id="56" name="New shape"/>
-          <p:cNvSpPr/>
-          <p:nvPr/>
-        </p:nvSpPr>
-        <p:spPr>
-          <a:xfrm>
-            <a:off x="10273919" y="861822"/>
-            <a:ext cx="1079881" cy="457200"/>
-          </a:xfrm>
-          <a:prstGeom prst="rect">
-            <a:avLst/>
-          </a:prstGeom>
-          <a:solidFill>
-            <a:srgbClr val="5B9BD4"/>
-          </a:solidFill>
-          <a:ln w="0">
-            <a:noFill/>
-          </a:ln>
-        </p:spPr>
-        <p:style>
-          <a:lnRef idx="2">
-            <a:schemeClr val="accent1">
-              <a:shade val="50000"/>
-            </a:schemeClr>
-          </a:lnRef>
-          <a:fillRef idx="1">
-            <a:schemeClr val="accent1"/>
-          </a:fillRef>
-          <a:effectRef idx="0">
-            <a:schemeClr val="accent1"/>
-          </a:effectRef>
-          <a:fontRef idx="minor">
-            <a:schemeClr val="lt1"/>
-          </a:fontRef>
-        </p:style>
-        <p:txBody>
-          <a:bodyPr rtlCol="0" anchor="ctr"/>
-          <a:lstStyle>
-            <a:defPPr/>
-          </a:lstStyle>
-          <a:p>
-            <a:endParaRPr lang="en-US"/>
-          </a:p>
-        </p:txBody>
-      </p:sp>
-      <p:sp>
-        <p:nvSpPr>
-          <p:cNvPr id="57" name="New shape"/>
-          <p:cNvSpPr/>
-          <p:nvPr/>
-        </p:nvSpPr>
-        <p:spPr>
-          <a:xfrm>
-            <a:off x="7034276" y="1319022"/>
-            <a:ext cx="1079881" cy="457200"/>
-          </a:xfrm>
-          <a:prstGeom prst="rect">
-            <a:avLst/>
-          </a:prstGeom>
-          <a:solidFill>
-            <a:srgbClr val="D2DEEE"/>
-          </a:solidFill>
-          <a:ln w="0">
-            <a:noFill/>
-          </a:ln>
-        </p:spPr>
-        <p:style>
-          <a:lnRef idx="2">
-            <a:schemeClr val="accent1">
-              <a:shade val="50000"/>
-            </a:schemeClr>
-          </a:lnRef>
-          <a:fillRef idx="1">
-            <a:schemeClr val="accent1"/>
-          </a:fillRef>
-          <a:effectRef idx="0">
-            <a:schemeClr val="accent1"/>
-          </a:effectRef>
-          <a:fontRef idx="minor">
-            <a:schemeClr val="lt1"/>
-          </a:fontRef>
-        </p:style>
-        <p:txBody>
-          <a:bodyPr rtlCol="0" anchor="ctr"/>
-          <a:lstStyle>
-            <a:defPPr/>
-          </a:lstStyle>
-          <a:p>
-            <a:endParaRPr lang="en-US"/>
-          </a:p>
-        </p:txBody>
-      </p:sp>
-      <p:sp>
-        <p:nvSpPr>
-          <p:cNvPr id="58" name="New shape"/>
-          <p:cNvSpPr/>
-          <p:nvPr/>
-        </p:nvSpPr>
-        <p:spPr>
-          <a:xfrm>
-            <a:off x="8114156" y="1319022"/>
-            <a:ext cx="1079881" cy="457200"/>
-          </a:xfrm>
-          <a:prstGeom prst="rect">
-            <a:avLst/>
-          </a:prstGeom>
-          <a:solidFill>
-            <a:srgbClr val="D2DEEE"/>
-          </a:solidFill>
-          <a:ln w="0">
-            <a:noFill/>
-          </a:ln>
-        </p:spPr>
-        <p:style>
-          <a:lnRef idx="2">
-            <a:schemeClr val="accent1">
-              <a:shade val="50000"/>
-            </a:schemeClr>
-          </a:lnRef>
-          <a:fillRef idx="1">
-            <a:schemeClr val="accent1"/>
-          </a:fillRef>
-          <a:effectRef idx="0">
-            <a:schemeClr val="accent1"/>
-          </a:effectRef>
-          <a:fontRef idx="minor">
-            <a:schemeClr val="lt1"/>
-          </a:fontRef>
-        </p:style>
-        <p:txBody>
-          <a:bodyPr rtlCol="0" anchor="ctr"/>
-          <a:lstStyle>
-            <a:defPPr/>
-          </a:lstStyle>
-          <a:p>
-            <a:endParaRPr lang="en-US"/>
-          </a:p>
-        </p:txBody>
-      </p:sp>
-      <p:sp>
-        <p:nvSpPr>
-          <p:cNvPr id="59" name="New shape"/>
-          <p:cNvSpPr/>
-          <p:nvPr/>
-        </p:nvSpPr>
-        <p:spPr>
-          <a:xfrm>
-            <a:off x="9194037" y="1319022"/>
-            <a:ext cx="1079881" cy="457200"/>
-          </a:xfrm>
-          <a:prstGeom prst="rect">
-            <a:avLst/>
-          </a:prstGeom>
-          <a:solidFill>
-            <a:srgbClr val="D2DEEE"/>
-          </a:solidFill>
-          <a:ln w="0">
-            <a:noFill/>
-          </a:ln>
-        </p:spPr>
-        <p:style>
-          <a:lnRef idx="2">
-            <a:schemeClr val="accent1">
-              <a:shade val="50000"/>
-            </a:schemeClr>
-          </a:lnRef>
-          <a:fillRef idx="1">
-            <a:schemeClr val="accent1"/>
-          </a:fillRef>
-          <a:effectRef idx="0">
-            <a:schemeClr val="accent1"/>
-          </a:effectRef>
-          <a:fontRef idx="minor">
-            <a:schemeClr val="lt1"/>
-          </a:fontRef>
-        </p:style>
-        <p:txBody>
-          <a:bodyPr rtlCol="0" anchor="ctr"/>
-          <a:lstStyle>
-            <a:defPPr/>
-          </a:lstStyle>
-          <a:p>
-            <a:endParaRPr lang="en-US"/>
-          </a:p>
-        </p:txBody>
-      </p:sp>
-      <p:sp>
-        <p:nvSpPr>
-          <p:cNvPr id="60" name="New shape"/>
-          <p:cNvSpPr/>
-          <p:nvPr/>
-        </p:nvSpPr>
-        <p:spPr>
-          <a:xfrm>
-            <a:off x="10273919" y="1319022"/>
-            <a:ext cx="1079881" cy="457200"/>
-          </a:xfrm>
-          <a:prstGeom prst="rect">
-            <a:avLst/>
-          </a:prstGeom>
-          <a:solidFill>
-            <a:srgbClr val="D2DEEE"/>
-          </a:solidFill>
-          <a:ln w="0">
-            <a:noFill/>
-          </a:ln>
-        </p:spPr>
-        <p:style>
-          <a:lnRef idx="2">
-            <a:schemeClr val="accent1">
-              <a:shade val="50000"/>
-            </a:schemeClr>
-          </a:lnRef>
-          <a:fillRef idx="1">
-            <a:schemeClr val="accent1"/>
-          </a:fillRef>
-          <a:effectRef idx="0">
-            <a:schemeClr val="accent1"/>
-          </a:effectRef>
-          <a:fontRef idx="minor">
-            <a:schemeClr val="lt1"/>
-          </a:fontRef>
-        </p:style>
-        <p:txBody>
-          <a:bodyPr rtlCol="0" anchor="ctr"/>
-          <a:lstStyle>
-            <a:defPPr/>
-          </a:lstStyle>
-          <a:p>
-            <a:endParaRPr lang="en-US"/>
-          </a:p>
-        </p:txBody>
-      </p:sp>
-      <p:sp>
-        <p:nvSpPr>
-          <p:cNvPr id="61" name="New shape"/>
-          <p:cNvSpPr/>
-          <p:nvPr/>
-        </p:nvSpPr>
-        <p:spPr>
-          <a:xfrm>
-            <a:off x="8114157" y="855472"/>
-            <a:ext cx="0" cy="927100"/>
-          </a:xfrm>
-          <a:prstGeom prst="line">
-            <a:avLst/>
-          </a:prstGeom>
-          <a:ln w="12700">
-            <a:solidFill>
-              <a:srgbClr val="FFFFFF"/>
-            </a:solidFill>
-          </a:ln>
-        </p:spPr>
-        <p:style>
-          <a:lnRef idx="1">
-            <a:schemeClr val="accent1"/>
-          </a:lnRef>
-          <a:fillRef idx="0">
-            <a:schemeClr val="accent1"/>
-          </a:fillRef>
-          <a:effectRef idx="0">
-            <a:schemeClr val="accent1"/>
-          </a:effectRef>
-          <a:fontRef idx="minor">
-            <a:schemeClr val="tx1"/>
-          </a:fontRef>
-        </p:style>
-        <p:txBody>
-          <a:bodyPr rtlCol="0" anchor="ctr"/>
-          <a:lstStyle>
-            <a:defPPr/>
-          </a:lstStyle>
-          <a:p>
-            <a:endParaRPr lang="en-US"/>
-          </a:p>
-        </p:txBody>
-      </p:sp>
-      <p:sp>
-        <p:nvSpPr>
-          <p:cNvPr id="62" name="New shape"/>
-          <p:cNvSpPr/>
-          <p:nvPr/>
-        </p:nvSpPr>
-        <p:spPr>
-          <a:xfrm>
-            <a:off x="9194038" y="855472"/>
-            <a:ext cx="0" cy="927100"/>
-          </a:xfrm>
-          <a:prstGeom prst="line">
-            <a:avLst/>
-          </a:prstGeom>
-          <a:ln w="12700">
-            <a:solidFill>
-              <a:srgbClr val="FFFFFF"/>
-            </a:solidFill>
-          </a:ln>
-        </p:spPr>
-        <p:style>
-          <a:lnRef idx="1">
-            <a:schemeClr val="accent1"/>
-          </a:lnRef>
-          <a:fillRef idx="0">
-            <a:schemeClr val="accent1"/>
-          </a:fillRef>
-          <a:effectRef idx="0">
-            <a:schemeClr val="accent1"/>
-          </a:effectRef>
-          <a:fontRef idx="minor">
-            <a:schemeClr val="tx1"/>
-          </a:fontRef>
-        </p:style>
-        <p:txBody>
-          <a:bodyPr rtlCol="0" anchor="ctr"/>
-          <a:lstStyle>
-            <a:defPPr/>
-          </a:lstStyle>
-          <a:p>
-            <a:endParaRPr lang="en-US"/>
-          </a:p>
-        </p:txBody>
-      </p:sp>
-      <p:sp>
-        <p:nvSpPr>
-          <p:cNvPr id="63" name="New shape"/>
-          <p:cNvSpPr/>
-          <p:nvPr/>
-        </p:nvSpPr>
-        <p:spPr>
-          <a:xfrm>
-            <a:off x="10273919" y="855472"/>
-            <a:ext cx="0" cy="927100"/>
-          </a:xfrm>
-          <a:prstGeom prst="line">
-            <a:avLst/>
-          </a:prstGeom>
-          <a:ln w="12700">
-            <a:solidFill>
-              <a:srgbClr val="FFFFFF"/>
-            </a:solidFill>
-          </a:ln>
-        </p:spPr>
-        <p:style>
-          <a:lnRef idx="1">
-            <a:schemeClr val="accent1"/>
-          </a:lnRef>
-          <a:fillRef idx="0">
-            <a:schemeClr val="accent1"/>
-          </a:fillRef>
-          <a:effectRef idx="0">
-            <a:schemeClr val="accent1"/>
-          </a:effectRef>
-          <a:fontRef idx="minor">
-            <a:schemeClr val="tx1"/>
-          </a:fontRef>
-        </p:style>
-        <p:txBody>
-          <a:bodyPr rtlCol="0" anchor="ctr"/>
-          <a:lstStyle>
-            <a:defPPr/>
-          </a:lstStyle>
-          <a:p>
-            <a:endParaRPr lang="en-US"/>
-          </a:p>
-        </p:txBody>
-      </p:sp>
-      <p:sp>
-        <p:nvSpPr>
-          <p:cNvPr id="64" name="New shape"/>
-          <p:cNvSpPr/>
-          <p:nvPr/>
-        </p:nvSpPr>
-        <p:spPr>
-          <a:xfrm>
-            <a:off x="7027926" y="1319022"/>
-            <a:ext cx="4332224" cy="0"/>
-          </a:xfrm>
-          <a:prstGeom prst="line">
-            <a:avLst/>
-          </a:prstGeom>
-          <a:ln w="38100">
-            <a:solidFill>
-              <a:srgbClr val="FFFFFF"/>
-            </a:solidFill>
-          </a:ln>
-        </p:spPr>
-        <p:style>
-          <a:lnRef idx="1">
-            <a:schemeClr val="accent1"/>
-          </a:lnRef>
-          <a:fillRef idx="0">
-            <a:schemeClr val="accent1"/>
-          </a:fillRef>
-          <a:effectRef idx="0">
-            <a:schemeClr val="accent1"/>
-          </a:effectRef>
-          <a:fontRef idx="minor">
-            <a:schemeClr val="tx1"/>
-          </a:fontRef>
-        </p:style>
-        <p:txBody>
-          <a:bodyPr rtlCol="0" anchor="ctr"/>
-          <a:lstStyle>
-            <a:defPPr/>
-          </a:lstStyle>
-          <a:p>
-            <a:endParaRPr lang="en-US"/>
-          </a:p>
-        </p:txBody>
-      </p:sp>
-      <p:sp>
-        <p:nvSpPr>
-          <p:cNvPr id="65" name="New shape"/>
-          <p:cNvSpPr/>
-          <p:nvPr/>
-        </p:nvSpPr>
-        <p:spPr>
-          <a:xfrm>
-            <a:off x="7034276" y="855472"/>
-            <a:ext cx="0" cy="927100"/>
-          </a:xfrm>
-          <a:prstGeom prst="line">
-            <a:avLst/>
-          </a:prstGeom>
-          <a:ln w="12700">
-            <a:solidFill>
-              <a:srgbClr val="FFFFFF"/>
-            </a:solidFill>
-          </a:ln>
-        </p:spPr>
-        <p:style>
-          <a:lnRef idx="1">
-            <a:schemeClr val="accent1"/>
-          </a:lnRef>
-          <a:fillRef idx="0">
-            <a:schemeClr val="accent1"/>
-          </a:fillRef>
-          <a:effectRef idx="0">
-            <a:schemeClr val="accent1"/>
-          </a:effectRef>
-          <a:fontRef idx="minor">
-            <a:schemeClr val="tx1"/>
-          </a:fontRef>
-        </p:style>
-        <p:txBody>
-          <a:bodyPr rtlCol="0" anchor="ctr"/>
-          <a:lstStyle>
-            <a:defPPr/>
-          </a:lstStyle>
-          <a:p>
-            <a:endParaRPr lang="en-US"/>
-          </a:p>
-        </p:txBody>
-      </p:sp>
-      <p:sp>
-        <p:nvSpPr>
-          <p:cNvPr id="66" name="New shape"/>
-          <p:cNvSpPr/>
-          <p:nvPr/>
-        </p:nvSpPr>
-        <p:spPr>
-          <a:xfrm>
-            <a:off x="11353800" y="855472"/>
-            <a:ext cx="0" cy="927100"/>
-          </a:xfrm>
-          <a:prstGeom prst="line">
-            <a:avLst/>
-          </a:prstGeom>
-          <a:ln w="12700">
-            <a:solidFill>
-              <a:srgbClr val="FFFFFF"/>
-            </a:solidFill>
-          </a:ln>
-        </p:spPr>
-        <p:style>
-          <a:lnRef idx="1">
-            <a:schemeClr val="accent1"/>
-          </a:lnRef>
-          <a:fillRef idx="0">
-            <a:schemeClr val="accent1"/>
-          </a:fillRef>
-          <a:effectRef idx="0">
-            <a:schemeClr val="accent1"/>
-          </a:effectRef>
-          <a:fontRef idx="minor">
-            <a:schemeClr val="tx1"/>
-          </a:fontRef>
-        </p:style>
-        <p:txBody>
-          <a:bodyPr rtlCol="0" anchor="ctr"/>
-          <a:lstStyle>
-            <a:defPPr/>
-          </a:lstStyle>
-          <a:p>
-            <a:endParaRPr lang="en-US"/>
-          </a:p>
-        </p:txBody>
-      </p:sp>
-      <p:sp>
-        <p:nvSpPr>
-          <p:cNvPr id="67" name="New shape"/>
-          <p:cNvSpPr/>
-          <p:nvPr/>
-        </p:nvSpPr>
-        <p:spPr>
-          <a:xfrm>
-            <a:off x="7027926" y="861822"/>
-            <a:ext cx="4332224" cy="0"/>
-          </a:xfrm>
-          <a:prstGeom prst="line">
-            <a:avLst/>
-          </a:prstGeom>
-          <a:ln w="12700">
-            <a:solidFill>
-              <a:srgbClr val="FFFFFF"/>
-            </a:solidFill>
-          </a:ln>
-        </p:spPr>
-        <p:style>
-          <a:lnRef idx="1">
-            <a:schemeClr val="accent1"/>
-          </a:lnRef>
-          <a:fillRef idx="0">
-            <a:schemeClr val="accent1"/>
-          </a:fillRef>
-          <a:effectRef idx="0">
-            <a:schemeClr val="accent1"/>
-          </a:effectRef>
-          <a:fontRef idx="minor">
-            <a:schemeClr val="tx1"/>
-          </a:fontRef>
-        </p:style>
-        <p:txBody>
-          <a:bodyPr rtlCol="0" anchor="ctr"/>
-          <a:lstStyle>
-            <a:defPPr/>
-          </a:lstStyle>
-          <a:p>
-            <a:endParaRPr lang="en-US"/>
-          </a:p>
-        </p:txBody>
-      </p:sp>
-      <p:sp>
-        <p:nvSpPr>
-          <p:cNvPr id="68" name="New shape"/>
-          <p:cNvSpPr/>
-          <p:nvPr/>
-        </p:nvSpPr>
-        <p:spPr>
-          <a:xfrm>
-            <a:off x="7027926" y="1776222"/>
-            <a:ext cx="4332224" cy="0"/>
-          </a:xfrm>
-          <a:prstGeom prst="line">
-            <a:avLst/>
-          </a:prstGeom>
-          <a:ln w="12700">
-            <a:solidFill>
-              <a:srgbClr val="FFFFFF"/>
-            </a:solidFill>
-          </a:ln>
-        </p:spPr>
-        <p:style>
-          <a:lnRef idx="1">
-            <a:schemeClr val="accent1"/>
-          </a:lnRef>
-          <a:fillRef idx="0">
-            <a:schemeClr val="accent1"/>
-          </a:fillRef>
-          <a:effectRef idx="0">
-            <a:schemeClr val="accent1"/>
-          </a:effectRef>
-          <a:fontRef idx="minor">
-            <a:schemeClr val="tx1"/>
           </a:fontRef>
         </p:style>
         <p:txBody>
@@ -15482,110 +14478,6 @@
       </p:sp>
       <p:sp>
         <p:nvSpPr>
-          <p:cNvPr id="94" name="New shape"/>
-          <p:cNvSpPr/>
-          <p:nvPr/>
-        </p:nvSpPr>
-        <p:spPr>
-          <a:xfrm>
-            <a:off x="7182866" y="932589"/>
-            <a:ext cx="1735782" cy="372070"/>
-          </a:xfrm>
-          <a:prstGeom prst="rect">
-            <a:avLst/>
-          </a:prstGeom>
-          <a:noFill/>
-        </p:spPr>
-        <p:style>
-          <a:lnRef idx="2">
-            <a:srgbClr val="000000">
-              <a:alpha val="0"/>
-            </a:srgbClr>
-          </a:lnRef>
-          <a:fillRef idx="1">
-            <a:schemeClr val="accent1"/>
-          </a:fillRef>
-          <a:effectRef idx="0">
-            <a:schemeClr val="accent1"/>
-          </a:effectRef>
-          <a:fontRef idx="minor">
-            <a:schemeClr val="lt1"/>
-          </a:fontRef>
-        </p:style>
-        <p:txBody>
-          <a:bodyPr wrap="none" lIns="0" tIns="0" rtlCol="0" anchor="ctr">
-            <a:spAutoFit/>
-          </a:bodyPr>
-          <a:lstStyle>
-            <a:defPPr/>
-          </a:lstStyle>
-          <a:p>
-            <a:r>
-              <a:rPr lang="en-US" sz="2400" b="1">
-                <a:solidFill>
-                  <a:srgbClr val="FFFFFF"/>
-                </a:solidFill>
-                <a:latin typeface="Calibri"/>
-              </a:rPr>
-              <a:t>Target  Start</a:t>
-            </a:r>
-          </a:p>
-        </p:txBody>
-      </p:sp>
-      <p:sp>
-        <p:nvSpPr>
-          <p:cNvPr id="95" name="New shape"/>
-          <p:cNvSpPr/>
-          <p:nvPr/>
-        </p:nvSpPr>
-        <p:spPr>
-          <a:xfrm>
-            <a:off x="9496933" y="932589"/>
-            <a:ext cx="1835646" cy="372070"/>
-          </a:xfrm>
-          <a:prstGeom prst="rect">
-            <a:avLst/>
-          </a:prstGeom>
-          <a:noFill/>
-        </p:spPr>
-        <p:style>
-          <a:lnRef idx="2">
-            <a:srgbClr val="000000">
-              <a:alpha val="0"/>
-            </a:srgbClr>
-          </a:lnRef>
-          <a:fillRef idx="1">
-            <a:schemeClr val="accent1"/>
-          </a:fillRef>
-          <a:effectRef idx="0">
-            <a:schemeClr val="accent1"/>
-          </a:effectRef>
-          <a:fontRef idx="minor">
-            <a:schemeClr val="lt1"/>
-          </a:fontRef>
-        </p:style>
-        <p:txBody>
-          <a:bodyPr wrap="none" lIns="0" tIns="0" rtlCol="0" anchor="ctr">
-            <a:spAutoFit/>
-          </a:bodyPr>
-          <a:lstStyle>
-            <a:defPPr/>
-          </a:lstStyle>
-          <a:p>
-            <a:r>
-              <a:rPr lang="en-US" sz="2400" b="1">
-                <a:solidFill>
-                  <a:srgbClr val="FFFFFF"/>
-                </a:solidFill>
-                <a:latin typeface="Calibri"/>
-              </a:rPr>
-              <a:t>End   Middle</a:t>
-            </a:r>
-          </a:p>
-        </p:txBody>
-      </p:sp>
-      <p:sp>
-        <p:nvSpPr>
           <p:cNvPr id="96" name="New shape">
             <a:extLst>
               <a:ext uri="{FF2B5EF4-FFF2-40B4-BE49-F238E27FC236}">
@@ -17333,6 +16225,946 @@
                 <a:latin typeface="Calibri"/>
               </a:rPr>
               <a:t>11   23     8    14   30     9    6     17   22   28   25   15     7   10   19</a:t>
+            </a:r>
+          </a:p>
+        </p:txBody>
+      </p:sp>
+      <p:sp>
+        <p:nvSpPr>
+          <p:cNvPr id="130" name="New shape">
+            <a:extLst>
+              <a:ext uri="{FF2B5EF4-FFF2-40B4-BE49-F238E27FC236}">
+                <a16:creationId xmlns:a16="http://schemas.microsoft.com/office/drawing/2014/main" id="{161137F8-0FDD-B83D-C218-E70A28888456}"/>
+              </a:ext>
+            </a:extLst>
+          </p:cNvPr>
+          <p:cNvSpPr/>
+          <p:nvPr/>
+        </p:nvSpPr>
+        <p:spPr>
+          <a:xfrm>
+            <a:off x="7034276" y="861822"/>
+            <a:ext cx="1079881" cy="457200"/>
+          </a:xfrm>
+          <a:prstGeom prst="rect">
+            <a:avLst/>
+          </a:prstGeom>
+          <a:solidFill>
+            <a:srgbClr val="5B9BD4"/>
+          </a:solidFill>
+          <a:ln w="0">
+            <a:noFill/>
+          </a:ln>
+        </p:spPr>
+        <p:style>
+          <a:lnRef idx="2">
+            <a:schemeClr val="accent1">
+              <a:shade val="50000"/>
+            </a:schemeClr>
+          </a:lnRef>
+          <a:fillRef idx="1">
+            <a:schemeClr val="accent1"/>
+          </a:fillRef>
+          <a:effectRef idx="0">
+            <a:schemeClr val="accent1"/>
+          </a:effectRef>
+          <a:fontRef idx="minor">
+            <a:schemeClr val="lt1"/>
+          </a:fontRef>
+        </p:style>
+        <p:txBody>
+          <a:bodyPr rtlCol="0" anchor="ctr"/>
+          <a:lstStyle>
+            <a:defPPr/>
+          </a:lstStyle>
+          <a:p>
+            <a:endParaRPr lang="en-US"/>
+          </a:p>
+        </p:txBody>
+      </p:sp>
+      <p:sp>
+        <p:nvSpPr>
+          <p:cNvPr id="131" name="New shape">
+            <a:extLst>
+              <a:ext uri="{FF2B5EF4-FFF2-40B4-BE49-F238E27FC236}">
+                <a16:creationId xmlns:a16="http://schemas.microsoft.com/office/drawing/2014/main" id="{88F67FCC-4F04-0A56-5C06-33A08C36820C}"/>
+              </a:ext>
+            </a:extLst>
+          </p:cNvPr>
+          <p:cNvSpPr/>
+          <p:nvPr/>
+        </p:nvSpPr>
+        <p:spPr>
+          <a:xfrm>
+            <a:off x="8114156" y="861822"/>
+            <a:ext cx="1079881" cy="457200"/>
+          </a:xfrm>
+          <a:prstGeom prst="rect">
+            <a:avLst/>
+          </a:prstGeom>
+          <a:solidFill>
+            <a:srgbClr val="5B9BD4"/>
+          </a:solidFill>
+          <a:ln w="0">
+            <a:noFill/>
+          </a:ln>
+        </p:spPr>
+        <p:style>
+          <a:lnRef idx="2">
+            <a:schemeClr val="accent1">
+              <a:shade val="50000"/>
+            </a:schemeClr>
+          </a:lnRef>
+          <a:fillRef idx="1">
+            <a:schemeClr val="accent1"/>
+          </a:fillRef>
+          <a:effectRef idx="0">
+            <a:schemeClr val="accent1"/>
+          </a:effectRef>
+          <a:fontRef idx="minor">
+            <a:schemeClr val="lt1"/>
+          </a:fontRef>
+        </p:style>
+        <p:txBody>
+          <a:bodyPr rtlCol="0" anchor="ctr"/>
+          <a:lstStyle>
+            <a:defPPr/>
+          </a:lstStyle>
+          <a:p>
+            <a:endParaRPr lang="en-US"/>
+          </a:p>
+        </p:txBody>
+      </p:sp>
+      <p:sp>
+        <p:nvSpPr>
+          <p:cNvPr id="132" name="New shape">
+            <a:extLst>
+              <a:ext uri="{FF2B5EF4-FFF2-40B4-BE49-F238E27FC236}">
+                <a16:creationId xmlns:a16="http://schemas.microsoft.com/office/drawing/2014/main" id="{FC85A9E2-7234-518E-3387-086DA98DAE60}"/>
+              </a:ext>
+            </a:extLst>
+          </p:cNvPr>
+          <p:cNvSpPr/>
+          <p:nvPr/>
+        </p:nvSpPr>
+        <p:spPr>
+          <a:xfrm>
+            <a:off x="9194037" y="861822"/>
+            <a:ext cx="1079881" cy="457200"/>
+          </a:xfrm>
+          <a:prstGeom prst="rect">
+            <a:avLst/>
+          </a:prstGeom>
+          <a:solidFill>
+            <a:srgbClr val="5B9BD4"/>
+          </a:solidFill>
+          <a:ln w="0">
+            <a:noFill/>
+          </a:ln>
+        </p:spPr>
+        <p:style>
+          <a:lnRef idx="2">
+            <a:schemeClr val="accent1">
+              <a:shade val="50000"/>
+            </a:schemeClr>
+          </a:lnRef>
+          <a:fillRef idx="1">
+            <a:schemeClr val="accent1"/>
+          </a:fillRef>
+          <a:effectRef idx="0">
+            <a:schemeClr val="accent1"/>
+          </a:effectRef>
+          <a:fontRef idx="minor">
+            <a:schemeClr val="lt1"/>
+          </a:fontRef>
+        </p:style>
+        <p:txBody>
+          <a:bodyPr rtlCol="0" anchor="ctr"/>
+          <a:lstStyle>
+            <a:defPPr/>
+          </a:lstStyle>
+          <a:p>
+            <a:endParaRPr lang="en-US"/>
+          </a:p>
+        </p:txBody>
+      </p:sp>
+      <p:sp>
+        <p:nvSpPr>
+          <p:cNvPr id="133" name="New shape">
+            <a:extLst>
+              <a:ext uri="{FF2B5EF4-FFF2-40B4-BE49-F238E27FC236}">
+                <a16:creationId xmlns:a16="http://schemas.microsoft.com/office/drawing/2014/main" id="{835E9157-8B35-754D-E734-654E84DC58CA}"/>
+              </a:ext>
+            </a:extLst>
+          </p:cNvPr>
+          <p:cNvSpPr/>
+          <p:nvPr/>
+        </p:nvSpPr>
+        <p:spPr>
+          <a:xfrm>
+            <a:off x="10273919" y="861822"/>
+            <a:ext cx="1079881" cy="457200"/>
+          </a:xfrm>
+          <a:prstGeom prst="rect">
+            <a:avLst/>
+          </a:prstGeom>
+          <a:solidFill>
+            <a:srgbClr val="5B9BD4"/>
+          </a:solidFill>
+          <a:ln w="0">
+            <a:noFill/>
+          </a:ln>
+        </p:spPr>
+        <p:style>
+          <a:lnRef idx="2">
+            <a:schemeClr val="accent1">
+              <a:shade val="50000"/>
+            </a:schemeClr>
+          </a:lnRef>
+          <a:fillRef idx="1">
+            <a:schemeClr val="accent1"/>
+          </a:fillRef>
+          <a:effectRef idx="0">
+            <a:schemeClr val="accent1"/>
+          </a:effectRef>
+          <a:fontRef idx="minor">
+            <a:schemeClr val="lt1"/>
+          </a:fontRef>
+        </p:style>
+        <p:txBody>
+          <a:bodyPr rtlCol="0" anchor="ctr"/>
+          <a:lstStyle>
+            <a:defPPr/>
+          </a:lstStyle>
+          <a:p>
+            <a:endParaRPr lang="en-US"/>
+          </a:p>
+        </p:txBody>
+      </p:sp>
+      <p:sp>
+        <p:nvSpPr>
+          <p:cNvPr id="134" name="New shape">
+            <a:extLst>
+              <a:ext uri="{FF2B5EF4-FFF2-40B4-BE49-F238E27FC236}">
+                <a16:creationId xmlns:a16="http://schemas.microsoft.com/office/drawing/2014/main" id="{2420EB9D-45CB-F1C4-CF70-FDF9900AA032}"/>
+              </a:ext>
+            </a:extLst>
+          </p:cNvPr>
+          <p:cNvSpPr/>
+          <p:nvPr/>
+        </p:nvSpPr>
+        <p:spPr>
+          <a:xfrm>
+            <a:off x="7034276" y="1319022"/>
+            <a:ext cx="1079881" cy="457200"/>
+          </a:xfrm>
+          <a:prstGeom prst="rect">
+            <a:avLst/>
+          </a:prstGeom>
+          <a:solidFill>
+            <a:srgbClr val="D2DEEE"/>
+          </a:solidFill>
+          <a:ln w="0">
+            <a:noFill/>
+          </a:ln>
+        </p:spPr>
+        <p:style>
+          <a:lnRef idx="2">
+            <a:schemeClr val="accent1">
+              <a:shade val="50000"/>
+            </a:schemeClr>
+          </a:lnRef>
+          <a:fillRef idx="1">
+            <a:schemeClr val="accent1"/>
+          </a:fillRef>
+          <a:effectRef idx="0">
+            <a:schemeClr val="accent1"/>
+          </a:effectRef>
+          <a:fontRef idx="minor">
+            <a:schemeClr val="lt1"/>
+          </a:fontRef>
+        </p:style>
+        <p:txBody>
+          <a:bodyPr rtlCol="0" anchor="ctr"/>
+          <a:lstStyle>
+            <a:defPPr/>
+          </a:lstStyle>
+          <a:p>
+            <a:endParaRPr lang="en-US"/>
+          </a:p>
+        </p:txBody>
+      </p:sp>
+      <p:sp>
+        <p:nvSpPr>
+          <p:cNvPr id="135" name="New shape">
+            <a:extLst>
+              <a:ext uri="{FF2B5EF4-FFF2-40B4-BE49-F238E27FC236}">
+                <a16:creationId xmlns:a16="http://schemas.microsoft.com/office/drawing/2014/main" id="{69377840-54BA-C3C4-9331-1C02735D920E}"/>
+              </a:ext>
+            </a:extLst>
+          </p:cNvPr>
+          <p:cNvSpPr/>
+          <p:nvPr/>
+        </p:nvSpPr>
+        <p:spPr>
+          <a:xfrm>
+            <a:off x="8114156" y="1319022"/>
+            <a:ext cx="1079881" cy="457200"/>
+          </a:xfrm>
+          <a:prstGeom prst="rect">
+            <a:avLst/>
+          </a:prstGeom>
+          <a:solidFill>
+            <a:srgbClr val="D2DEEE"/>
+          </a:solidFill>
+          <a:ln w="0">
+            <a:noFill/>
+          </a:ln>
+        </p:spPr>
+        <p:style>
+          <a:lnRef idx="2">
+            <a:schemeClr val="accent1">
+              <a:shade val="50000"/>
+            </a:schemeClr>
+          </a:lnRef>
+          <a:fillRef idx="1">
+            <a:schemeClr val="accent1"/>
+          </a:fillRef>
+          <a:effectRef idx="0">
+            <a:schemeClr val="accent1"/>
+          </a:effectRef>
+          <a:fontRef idx="minor">
+            <a:schemeClr val="lt1"/>
+          </a:fontRef>
+        </p:style>
+        <p:txBody>
+          <a:bodyPr rtlCol="0" anchor="ctr"/>
+          <a:lstStyle>
+            <a:defPPr/>
+          </a:lstStyle>
+          <a:p>
+            <a:endParaRPr lang="en-US"/>
+          </a:p>
+        </p:txBody>
+      </p:sp>
+      <p:sp>
+        <p:nvSpPr>
+          <p:cNvPr id="136" name="New shape">
+            <a:extLst>
+              <a:ext uri="{FF2B5EF4-FFF2-40B4-BE49-F238E27FC236}">
+                <a16:creationId xmlns:a16="http://schemas.microsoft.com/office/drawing/2014/main" id="{415C9536-3821-071C-F0F3-5FFC25BE38FA}"/>
+              </a:ext>
+            </a:extLst>
+          </p:cNvPr>
+          <p:cNvSpPr/>
+          <p:nvPr/>
+        </p:nvSpPr>
+        <p:spPr>
+          <a:xfrm>
+            <a:off x="9194037" y="1319022"/>
+            <a:ext cx="1079881" cy="457200"/>
+          </a:xfrm>
+          <a:prstGeom prst="rect">
+            <a:avLst/>
+          </a:prstGeom>
+          <a:solidFill>
+            <a:srgbClr val="D2DEEE"/>
+          </a:solidFill>
+          <a:ln w="0">
+            <a:noFill/>
+          </a:ln>
+        </p:spPr>
+        <p:style>
+          <a:lnRef idx="2">
+            <a:schemeClr val="accent1">
+              <a:shade val="50000"/>
+            </a:schemeClr>
+          </a:lnRef>
+          <a:fillRef idx="1">
+            <a:schemeClr val="accent1"/>
+          </a:fillRef>
+          <a:effectRef idx="0">
+            <a:schemeClr val="accent1"/>
+          </a:effectRef>
+          <a:fontRef idx="minor">
+            <a:schemeClr val="lt1"/>
+          </a:fontRef>
+        </p:style>
+        <p:txBody>
+          <a:bodyPr rtlCol="0" anchor="ctr"/>
+          <a:lstStyle>
+            <a:defPPr/>
+          </a:lstStyle>
+          <a:p>
+            <a:endParaRPr lang="en-US"/>
+          </a:p>
+        </p:txBody>
+      </p:sp>
+      <p:sp>
+        <p:nvSpPr>
+          <p:cNvPr id="137" name="New shape">
+            <a:extLst>
+              <a:ext uri="{FF2B5EF4-FFF2-40B4-BE49-F238E27FC236}">
+                <a16:creationId xmlns:a16="http://schemas.microsoft.com/office/drawing/2014/main" id="{95C90B4E-E5CF-65CB-41B6-8594F8A03893}"/>
+              </a:ext>
+            </a:extLst>
+          </p:cNvPr>
+          <p:cNvSpPr/>
+          <p:nvPr/>
+        </p:nvSpPr>
+        <p:spPr>
+          <a:xfrm>
+            <a:off x="10273919" y="1319022"/>
+            <a:ext cx="1079881" cy="457200"/>
+          </a:xfrm>
+          <a:prstGeom prst="rect">
+            <a:avLst/>
+          </a:prstGeom>
+          <a:solidFill>
+            <a:srgbClr val="D2DEEE"/>
+          </a:solidFill>
+          <a:ln w="0">
+            <a:noFill/>
+          </a:ln>
+        </p:spPr>
+        <p:style>
+          <a:lnRef idx="2">
+            <a:schemeClr val="accent1">
+              <a:shade val="50000"/>
+            </a:schemeClr>
+          </a:lnRef>
+          <a:fillRef idx="1">
+            <a:schemeClr val="accent1"/>
+          </a:fillRef>
+          <a:effectRef idx="0">
+            <a:schemeClr val="accent1"/>
+          </a:effectRef>
+          <a:fontRef idx="minor">
+            <a:schemeClr val="lt1"/>
+          </a:fontRef>
+        </p:style>
+        <p:txBody>
+          <a:bodyPr rtlCol="0" anchor="ctr"/>
+          <a:lstStyle>
+            <a:defPPr/>
+          </a:lstStyle>
+          <a:p>
+            <a:endParaRPr lang="en-US"/>
+          </a:p>
+        </p:txBody>
+      </p:sp>
+      <p:sp>
+        <p:nvSpPr>
+          <p:cNvPr id="138" name="New shape">
+            <a:extLst>
+              <a:ext uri="{FF2B5EF4-FFF2-40B4-BE49-F238E27FC236}">
+                <a16:creationId xmlns:a16="http://schemas.microsoft.com/office/drawing/2014/main" id="{716F2073-C714-C711-BE8F-C82772B95D32}"/>
+              </a:ext>
+            </a:extLst>
+          </p:cNvPr>
+          <p:cNvSpPr/>
+          <p:nvPr/>
+        </p:nvSpPr>
+        <p:spPr>
+          <a:xfrm>
+            <a:off x="8114157" y="855472"/>
+            <a:ext cx="0" cy="927100"/>
+          </a:xfrm>
+          <a:prstGeom prst="line">
+            <a:avLst/>
+          </a:prstGeom>
+          <a:ln w="12700">
+            <a:solidFill>
+              <a:srgbClr val="FFFFFF"/>
+            </a:solidFill>
+          </a:ln>
+        </p:spPr>
+        <p:style>
+          <a:lnRef idx="1">
+            <a:schemeClr val="accent1"/>
+          </a:lnRef>
+          <a:fillRef idx="0">
+            <a:schemeClr val="accent1"/>
+          </a:fillRef>
+          <a:effectRef idx="0">
+            <a:schemeClr val="accent1"/>
+          </a:effectRef>
+          <a:fontRef idx="minor">
+            <a:schemeClr val="tx1"/>
+          </a:fontRef>
+        </p:style>
+        <p:txBody>
+          <a:bodyPr rtlCol="0" anchor="ctr"/>
+          <a:lstStyle>
+            <a:defPPr/>
+          </a:lstStyle>
+          <a:p>
+            <a:endParaRPr lang="en-US"/>
+          </a:p>
+        </p:txBody>
+      </p:sp>
+      <p:sp>
+        <p:nvSpPr>
+          <p:cNvPr id="139" name="New shape">
+            <a:extLst>
+              <a:ext uri="{FF2B5EF4-FFF2-40B4-BE49-F238E27FC236}">
+                <a16:creationId xmlns:a16="http://schemas.microsoft.com/office/drawing/2014/main" id="{7AC88562-E919-ADC8-E758-15910C05FA56}"/>
+              </a:ext>
+            </a:extLst>
+          </p:cNvPr>
+          <p:cNvSpPr/>
+          <p:nvPr/>
+        </p:nvSpPr>
+        <p:spPr>
+          <a:xfrm>
+            <a:off x="9194038" y="855472"/>
+            <a:ext cx="0" cy="927100"/>
+          </a:xfrm>
+          <a:prstGeom prst="line">
+            <a:avLst/>
+          </a:prstGeom>
+          <a:ln w="12700">
+            <a:solidFill>
+              <a:srgbClr val="FFFFFF"/>
+            </a:solidFill>
+          </a:ln>
+        </p:spPr>
+        <p:style>
+          <a:lnRef idx="1">
+            <a:schemeClr val="accent1"/>
+          </a:lnRef>
+          <a:fillRef idx="0">
+            <a:schemeClr val="accent1"/>
+          </a:fillRef>
+          <a:effectRef idx="0">
+            <a:schemeClr val="accent1"/>
+          </a:effectRef>
+          <a:fontRef idx="minor">
+            <a:schemeClr val="tx1"/>
+          </a:fontRef>
+        </p:style>
+        <p:txBody>
+          <a:bodyPr rtlCol="0" anchor="ctr"/>
+          <a:lstStyle>
+            <a:defPPr/>
+          </a:lstStyle>
+          <a:p>
+            <a:endParaRPr lang="en-US"/>
+          </a:p>
+        </p:txBody>
+      </p:sp>
+      <p:sp>
+        <p:nvSpPr>
+          <p:cNvPr id="140" name="New shape">
+            <a:extLst>
+              <a:ext uri="{FF2B5EF4-FFF2-40B4-BE49-F238E27FC236}">
+                <a16:creationId xmlns:a16="http://schemas.microsoft.com/office/drawing/2014/main" id="{A61D9DF6-7582-848C-B1B7-6A284814B2F7}"/>
+              </a:ext>
+            </a:extLst>
+          </p:cNvPr>
+          <p:cNvSpPr/>
+          <p:nvPr/>
+        </p:nvSpPr>
+        <p:spPr>
+          <a:xfrm>
+            <a:off x="10273919" y="855472"/>
+            <a:ext cx="0" cy="927100"/>
+          </a:xfrm>
+          <a:prstGeom prst="line">
+            <a:avLst/>
+          </a:prstGeom>
+          <a:ln w="12700">
+            <a:solidFill>
+              <a:srgbClr val="FFFFFF"/>
+            </a:solidFill>
+          </a:ln>
+        </p:spPr>
+        <p:style>
+          <a:lnRef idx="1">
+            <a:schemeClr val="accent1"/>
+          </a:lnRef>
+          <a:fillRef idx="0">
+            <a:schemeClr val="accent1"/>
+          </a:fillRef>
+          <a:effectRef idx="0">
+            <a:schemeClr val="accent1"/>
+          </a:effectRef>
+          <a:fontRef idx="minor">
+            <a:schemeClr val="tx1"/>
+          </a:fontRef>
+        </p:style>
+        <p:txBody>
+          <a:bodyPr rtlCol="0" anchor="ctr"/>
+          <a:lstStyle>
+            <a:defPPr/>
+          </a:lstStyle>
+          <a:p>
+            <a:endParaRPr lang="en-US"/>
+          </a:p>
+        </p:txBody>
+      </p:sp>
+      <p:sp>
+        <p:nvSpPr>
+          <p:cNvPr id="141" name="New shape">
+            <a:extLst>
+              <a:ext uri="{FF2B5EF4-FFF2-40B4-BE49-F238E27FC236}">
+                <a16:creationId xmlns:a16="http://schemas.microsoft.com/office/drawing/2014/main" id="{A313252F-7A88-A151-EF78-138554A4B6D0}"/>
+              </a:ext>
+            </a:extLst>
+          </p:cNvPr>
+          <p:cNvSpPr/>
+          <p:nvPr/>
+        </p:nvSpPr>
+        <p:spPr>
+          <a:xfrm>
+            <a:off x="7027926" y="1319022"/>
+            <a:ext cx="4332224" cy="0"/>
+          </a:xfrm>
+          <a:prstGeom prst="line">
+            <a:avLst/>
+          </a:prstGeom>
+          <a:ln w="38100">
+            <a:solidFill>
+              <a:srgbClr val="FFFFFF"/>
+            </a:solidFill>
+          </a:ln>
+        </p:spPr>
+        <p:style>
+          <a:lnRef idx="1">
+            <a:schemeClr val="accent1"/>
+          </a:lnRef>
+          <a:fillRef idx="0">
+            <a:schemeClr val="accent1"/>
+          </a:fillRef>
+          <a:effectRef idx="0">
+            <a:schemeClr val="accent1"/>
+          </a:effectRef>
+          <a:fontRef idx="minor">
+            <a:schemeClr val="tx1"/>
+          </a:fontRef>
+        </p:style>
+        <p:txBody>
+          <a:bodyPr rtlCol="0" anchor="ctr"/>
+          <a:lstStyle>
+            <a:defPPr/>
+          </a:lstStyle>
+          <a:p>
+            <a:endParaRPr lang="en-US"/>
+          </a:p>
+        </p:txBody>
+      </p:sp>
+      <p:sp>
+        <p:nvSpPr>
+          <p:cNvPr id="142" name="New shape">
+            <a:extLst>
+              <a:ext uri="{FF2B5EF4-FFF2-40B4-BE49-F238E27FC236}">
+                <a16:creationId xmlns:a16="http://schemas.microsoft.com/office/drawing/2014/main" id="{7F3AC40B-FCAF-58E6-FADA-245902D5FBF2}"/>
+              </a:ext>
+            </a:extLst>
+          </p:cNvPr>
+          <p:cNvSpPr/>
+          <p:nvPr/>
+        </p:nvSpPr>
+        <p:spPr>
+          <a:xfrm>
+            <a:off x="7034276" y="855472"/>
+            <a:ext cx="0" cy="927100"/>
+          </a:xfrm>
+          <a:prstGeom prst="line">
+            <a:avLst/>
+          </a:prstGeom>
+          <a:ln w="12700">
+            <a:solidFill>
+              <a:srgbClr val="FFFFFF"/>
+            </a:solidFill>
+          </a:ln>
+        </p:spPr>
+        <p:style>
+          <a:lnRef idx="1">
+            <a:schemeClr val="accent1"/>
+          </a:lnRef>
+          <a:fillRef idx="0">
+            <a:schemeClr val="accent1"/>
+          </a:fillRef>
+          <a:effectRef idx="0">
+            <a:schemeClr val="accent1"/>
+          </a:effectRef>
+          <a:fontRef idx="minor">
+            <a:schemeClr val="tx1"/>
+          </a:fontRef>
+        </p:style>
+        <p:txBody>
+          <a:bodyPr rtlCol="0" anchor="ctr"/>
+          <a:lstStyle>
+            <a:defPPr/>
+          </a:lstStyle>
+          <a:p>
+            <a:endParaRPr lang="en-US"/>
+          </a:p>
+        </p:txBody>
+      </p:sp>
+      <p:sp>
+        <p:nvSpPr>
+          <p:cNvPr id="143" name="New shape">
+            <a:extLst>
+              <a:ext uri="{FF2B5EF4-FFF2-40B4-BE49-F238E27FC236}">
+                <a16:creationId xmlns:a16="http://schemas.microsoft.com/office/drawing/2014/main" id="{AA78D32B-0F6A-D132-615D-DFB43B68B86D}"/>
+              </a:ext>
+            </a:extLst>
+          </p:cNvPr>
+          <p:cNvSpPr/>
+          <p:nvPr/>
+        </p:nvSpPr>
+        <p:spPr>
+          <a:xfrm>
+            <a:off x="11353800" y="855472"/>
+            <a:ext cx="0" cy="927100"/>
+          </a:xfrm>
+          <a:prstGeom prst="line">
+            <a:avLst/>
+          </a:prstGeom>
+          <a:ln w="12700">
+            <a:solidFill>
+              <a:srgbClr val="FFFFFF"/>
+            </a:solidFill>
+          </a:ln>
+        </p:spPr>
+        <p:style>
+          <a:lnRef idx="1">
+            <a:schemeClr val="accent1"/>
+          </a:lnRef>
+          <a:fillRef idx="0">
+            <a:schemeClr val="accent1"/>
+          </a:fillRef>
+          <a:effectRef idx="0">
+            <a:schemeClr val="accent1"/>
+          </a:effectRef>
+          <a:fontRef idx="minor">
+            <a:schemeClr val="tx1"/>
+          </a:fontRef>
+        </p:style>
+        <p:txBody>
+          <a:bodyPr rtlCol="0" anchor="ctr"/>
+          <a:lstStyle>
+            <a:defPPr/>
+          </a:lstStyle>
+          <a:p>
+            <a:endParaRPr lang="en-US"/>
+          </a:p>
+        </p:txBody>
+      </p:sp>
+      <p:sp>
+        <p:nvSpPr>
+          <p:cNvPr id="144" name="New shape">
+            <a:extLst>
+              <a:ext uri="{FF2B5EF4-FFF2-40B4-BE49-F238E27FC236}">
+                <a16:creationId xmlns:a16="http://schemas.microsoft.com/office/drawing/2014/main" id="{DD98E6B2-692D-0BD1-7E31-8441F475DCD8}"/>
+              </a:ext>
+            </a:extLst>
+          </p:cNvPr>
+          <p:cNvSpPr/>
+          <p:nvPr/>
+        </p:nvSpPr>
+        <p:spPr>
+          <a:xfrm>
+            <a:off x="7027926" y="861822"/>
+            <a:ext cx="4332224" cy="0"/>
+          </a:xfrm>
+          <a:prstGeom prst="line">
+            <a:avLst/>
+          </a:prstGeom>
+          <a:ln w="12700">
+            <a:solidFill>
+              <a:srgbClr val="FFFFFF"/>
+            </a:solidFill>
+          </a:ln>
+        </p:spPr>
+        <p:style>
+          <a:lnRef idx="1">
+            <a:schemeClr val="accent1"/>
+          </a:lnRef>
+          <a:fillRef idx="0">
+            <a:schemeClr val="accent1"/>
+          </a:fillRef>
+          <a:effectRef idx="0">
+            <a:schemeClr val="accent1"/>
+          </a:effectRef>
+          <a:fontRef idx="minor">
+            <a:schemeClr val="tx1"/>
+          </a:fontRef>
+        </p:style>
+        <p:txBody>
+          <a:bodyPr rtlCol="0" anchor="ctr"/>
+          <a:lstStyle>
+            <a:defPPr/>
+          </a:lstStyle>
+          <a:p>
+            <a:endParaRPr lang="en-US"/>
+          </a:p>
+        </p:txBody>
+      </p:sp>
+      <p:sp>
+        <p:nvSpPr>
+          <p:cNvPr id="145" name="New shape">
+            <a:extLst>
+              <a:ext uri="{FF2B5EF4-FFF2-40B4-BE49-F238E27FC236}">
+                <a16:creationId xmlns:a16="http://schemas.microsoft.com/office/drawing/2014/main" id="{A0244493-7867-C94D-731E-779CD66EC2E0}"/>
+              </a:ext>
+            </a:extLst>
+          </p:cNvPr>
+          <p:cNvSpPr/>
+          <p:nvPr/>
+        </p:nvSpPr>
+        <p:spPr>
+          <a:xfrm>
+            <a:off x="7027926" y="1776222"/>
+            <a:ext cx="4332224" cy="0"/>
+          </a:xfrm>
+          <a:prstGeom prst="line">
+            <a:avLst/>
+          </a:prstGeom>
+          <a:ln w="12700">
+            <a:solidFill>
+              <a:srgbClr val="FFFFFF"/>
+            </a:solidFill>
+          </a:ln>
+        </p:spPr>
+        <p:style>
+          <a:lnRef idx="1">
+            <a:schemeClr val="accent1"/>
+          </a:lnRef>
+          <a:fillRef idx="0">
+            <a:schemeClr val="accent1"/>
+          </a:fillRef>
+          <a:effectRef idx="0">
+            <a:schemeClr val="accent1"/>
+          </a:effectRef>
+          <a:fontRef idx="minor">
+            <a:schemeClr val="tx1"/>
+          </a:fontRef>
+        </p:style>
+        <p:txBody>
+          <a:bodyPr rtlCol="0" anchor="ctr"/>
+          <a:lstStyle>
+            <a:defPPr/>
+          </a:lstStyle>
+          <a:p>
+            <a:endParaRPr lang="en-US"/>
+          </a:p>
+        </p:txBody>
+      </p:sp>
+      <p:sp>
+        <p:nvSpPr>
+          <p:cNvPr id="146" name="New shape">
+            <a:extLst>
+              <a:ext uri="{FF2B5EF4-FFF2-40B4-BE49-F238E27FC236}">
+                <a16:creationId xmlns:a16="http://schemas.microsoft.com/office/drawing/2014/main" id="{820454D0-2CCD-AB5A-E6C9-1A52C0E09286}"/>
+              </a:ext>
+            </a:extLst>
+          </p:cNvPr>
+          <p:cNvSpPr/>
+          <p:nvPr/>
+        </p:nvSpPr>
+        <p:spPr>
+          <a:xfrm>
+            <a:off x="7182866" y="910875"/>
+            <a:ext cx="1914883" cy="415498"/>
+          </a:xfrm>
+          <a:prstGeom prst="rect">
+            <a:avLst/>
+          </a:prstGeom>
+          <a:noFill/>
+        </p:spPr>
+        <p:style>
+          <a:lnRef idx="2">
+            <a:srgbClr val="000000">
+              <a:alpha val="0"/>
+            </a:srgbClr>
+          </a:lnRef>
+          <a:fillRef idx="1">
+            <a:schemeClr val="accent1"/>
+          </a:fillRef>
+          <a:effectRef idx="0">
+            <a:schemeClr val="accent1"/>
+          </a:effectRef>
+          <a:fontRef idx="minor">
+            <a:schemeClr val="lt1"/>
+          </a:fontRef>
+        </p:style>
+        <p:txBody>
+          <a:bodyPr wrap="none" lIns="0" tIns="0" rtlCol="0" anchor="ctr">
+            <a:spAutoFit/>
+          </a:bodyPr>
+          <a:lstStyle>
+            <a:defPPr/>
+          </a:lstStyle>
+          <a:p>
+            <a:r>
+              <a:rPr lang="en-US" sz="2400" b="1" dirty="0">
+                <a:solidFill>
+                  <a:srgbClr val="FFFFFF"/>
+                </a:solidFill>
+                <a:latin typeface="Calibri"/>
+              </a:rPr>
+              <a:t>Target      Start</a:t>
+            </a:r>
+          </a:p>
+        </p:txBody>
+      </p:sp>
+      <p:sp>
+        <p:nvSpPr>
+          <p:cNvPr id="147" name="New shape">
+            <a:extLst>
+              <a:ext uri="{FF2B5EF4-FFF2-40B4-BE49-F238E27FC236}">
+                <a16:creationId xmlns:a16="http://schemas.microsoft.com/office/drawing/2014/main" id="{79613FCE-B05C-BF13-E181-B3D29D01A46E}"/>
+              </a:ext>
+            </a:extLst>
+          </p:cNvPr>
+          <p:cNvSpPr/>
+          <p:nvPr/>
+        </p:nvSpPr>
+        <p:spPr>
+          <a:xfrm>
+            <a:off x="9496933" y="910875"/>
+            <a:ext cx="1892506" cy="415498"/>
+          </a:xfrm>
+          <a:prstGeom prst="rect">
+            <a:avLst/>
+          </a:prstGeom>
+          <a:noFill/>
+        </p:spPr>
+        <p:style>
+          <a:lnRef idx="2">
+            <a:srgbClr val="000000">
+              <a:alpha val="0"/>
+            </a:srgbClr>
+          </a:lnRef>
+          <a:fillRef idx="1">
+            <a:schemeClr val="accent1"/>
+          </a:fillRef>
+          <a:effectRef idx="0">
+            <a:schemeClr val="accent1"/>
+          </a:effectRef>
+          <a:fontRef idx="minor">
+            <a:schemeClr val="lt1"/>
+          </a:fontRef>
+        </p:style>
+        <p:txBody>
+          <a:bodyPr wrap="none" lIns="0" tIns="0" rtlCol="0" anchor="ctr">
+            <a:spAutoFit/>
+          </a:bodyPr>
+          <a:lstStyle>
+            <a:defPPr/>
+          </a:lstStyle>
+          <a:p>
+            <a:r>
+              <a:rPr lang="en-US" sz="2400" b="1" dirty="0">
+                <a:solidFill>
+                  <a:srgbClr val="FFFFFF"/>
+                </a:solidFill>
+                <a:latin typeface="Calibri"/>
+              </a:rPr>
+              <a:t>End      Middle</a:t>
             </a:r>
           </a:p>
         </p:txBody>
@@ -17364,14 +17196,719 @@
       </p:grpSpPr>
       <p:sp>
         <p:nvSpPr>
-          <p:cNvPr id="2" name="New shape"/>
-          <p:cNvSpPr/>
-          <p:nvPr/>
-        </p:nvSpPr>
-        <p:spPr>
-          <a:xfrm>
-            <a:off x="0" y="-1"/>
-            <a:ext cx="12192000" cy="6857999"/>
+          <p:cNvPr id="3" name="New shape"/>
+          <p:cNvSpPr/>
+          <p:nvPr/>
+        </p:nvSpPr>
+        <p:spPr>
+          <a:xfrm>
+            <a:off x="838200" y="2155825"/>
+            <a:ext cx="701040" cy="579120"/>
+          </a:xfrm>
+          <a:prstGeom prst="rect">
+            <a:avLst/>
+          </a:prstGeom>
+          <a:solidFill>
+            <a:srgbClr val="FF0000"/>
+          </a:solidFill>
+          <a:ln w="0">
+            <a:noFill/>
+          </a:ln>
+        </p:spPr>
+        <p:style>
+          <a:lnRef idx="2">
+            <a:schemeClr val="accent1">
+              <a:shade val="50000"/>
+            </a:schemeClr>
+          </a:lnRef>
+          <a:fillRef idx="1">
+            <a:schemeClr val="accent1"/>
+          </a:fillRef>
+          <a:effectRef idx="0">
+            <a:schemeClr val="accent1"/>
+          </a:effectRef>
+          <a:fontRef idx="minor">
+            <a:schemeClr val="lt1"/>
+          </a:fontRef>
+        </p:style>
+        <p:txBody>
+          <a:bodyPr rtlCol="0" anchor="ctr"/>
+          <a:lstStyle>
+            <a:defPPr/>
+          </a:lstStyle>
+          <a:p>
+            <a:endParaRPr lang="en-US"/>
+          </a:p>
+        </p:txBody>
+      </p:sp>
+      <p:sp>
+        <p:nvSpPr>
+          <p:cNvPr id="4" name="New shape"/>
+          <p:cNvSpPr/>
+          <p:nvPr/>
+        </p:nvSpPr>
+        <p:spPr>
+          <a:xfrm>
+            <a:off x="1539240" y="2155825"/>
+            <a:ext cx="701040" cy="579120"/>
+          </a:xfrm>
+          <a:prstGeom prst="rect">
+            <a:avLst/>
+          </a:prstGeom>
+          <a:solidFill>
+            <a:srgbClr val="FF0000"/>
+          </a:solidFill>
+          <a:ln w="0">
+            <a:noFill/>
+          </a:ln>
+        </p:spPr>
+        <p:style>
+          <a:lnRef idx="2">
+            <a:schemeClr val="accent1">
+              <a:shade val="50000"/>
+            </a:schemeClr>
+          </a:lnRef>
+          <a:fillRef idx="1">
+            <a:schemeClr val="accent1"/>
+          </a:fillRef>
+          <a:effectRef idx="0">
+            <a:schemeClr val="accent1"/>
+          </a:effectRef>
+          <a:fontRef idx="minor">
+            <a:schemeClr val="lt1"/>
+          </a:fontRef>
+        </p:style>
+        <p:txBody>
+          <a:bodyPr rtlCol="0" anchor="ctr"/>
+          <a:lstStyle>
+            <a:defPPr/>
+          </a:lstStyle>
+          <a:p>
+            <a:endParaRPr lang="en-US"/>
+          </a:p>
+        </p:txBody>
+      </p:sp>
+      <p:sp>
+        <p:nvSpPr>
+          <p:cNvPr id="5" name="New shape"/>
+          <p:cNvSpPr/>
+          <p:nvPr/>
+        </p:nvSpPr>
+        <p:spPr>
+          <a:xfrm>
+            <a:off x="2240280" y="2155825"/>
+            <a:ext cx="701040" cy="579120"/>
+          </a:xfrm>
+          <a:prstGeom prst="rect">
+            <a:avLst/>
+          </a:prstGeom>
+          <a:solidFill>
+            <a:srgbClr val="FF0000"/>
+          </a:solidFill>
+          <a:ln w="0">
+            <a:noFill/>
+          </a:ln>
+        </p:spPr>
+        <p:style>
+          <a:lnRef idx="2">
+            <a:schemeClr val="accent1">
+              <a:shade val="50000"/>
+            </a:schemeClr>
+          </a:lnRef>
+          <a:fillRef idx="1">
+            <a:schemeClr val="accent1"/>
+          </a:fillRef>
+          <a:effectRef idx="0">
+            <a:schemeClr val="accent1"/>
+          </a:effectRef>
+          <a:fontRef idx="minor">
+            <a:schemeClr val="lt1"/>
+          </a:fontRef>
+        </p:style>
+        <p:txBody>
+          <a:bodyPr rtlCol="0" anchor="ctr"/>
+          <a:lstStyle>
+            <a:defPPr/>
+          </a:lstStyle>
+          <a:p>
+            <a:endParaRPr lang="en-US"/>
+          </a:p>
+        </p:txBody>
+      </p:sp>
+      <p:sp>
+        <p:nvSpPr>
+          <p:cNvPr id="6" name="New shape"/>
+          <p:cNvSpPr/>
+          <p:nvPr/>
+        </p:nvSpPr>
+        <p:spPr>
+          <a:xfrm>
+            <a:off x="2941320" y="2155825"/>
+            <a:ext cx="701040" cy="579120"/>
+          </a:xfrm>
+          <a:prstGeom prst="rect">
+            <a:avLst/>
+          </a:prstGeom>
+          <a:solidFill>
+            <a:srgbClr val="FF0000"/>
+          </a:solidFill>
+          <a:ln w="0">
+            <a:noFill/>
+          </a:ln>
+        </p:spPr>
+        <p:style>
+          <a:lnRef idx="2">
+            <a:schemeClr val="accent1">
+              <a:shade val="50000"/>
+            </a:schemeClr>
+          </a:lnRef>
+          <a:fillRef idx="1">
+            <a:schemeClr val="accent1"/>
+          </a:fillRef>
+          <a:effectRef idx="0">
+            <a:schemeClr val="accent1"/>
+          </a:effectRef>
+          <a:fontRef idx="minor">
+            <a:schemeClr val="lt1"/>
+          </a:fontRef>
+        </p:style>
+        <p:txBody>
+          <a:bodyPr rtlCol="0" anchor="ctr"/>
+          <a:lstStyle>
+            <a:defPPr/>
+          </a:lstStyle>
+          <a:p>
+            <a:endParaRPr lang="en-US"/>
+          </a:p>
+        </p:txBody>
+      </p:sp>
+      <p:sp>
+        <p:nvSpPr>
+          <p:cNvPr id="7" name="New shape"/>
+          <p:cNvSpPr/>
+          <p:nvPr/>
+        </p:nvSpPr>
+        <p:spPr>
+          <a:xfrm>
+            <a:off x="3642360" y="2155825"/>
+            <a:ext cx="701040" cy="579120"/>
+          </a:xfrm>
+          <a:prstGeom prst="rect">
+            <a:avLst/>
+          </a:prstGeom>
+          <a:solidFill>
+            <a:srgbClr val="FF0000"/>
+          </a:solidFill>
+          <a:ln w="0">
+            <a:noFill/>
+          </a:ln>
+        </p:spPr>
+        <p:style>
+          <a:lnRef idx="2">
+            <a:schemeClr val="accent1">
+              <a:shade val="50000"/>
+            </a:schemeClr>
+          </a:lnRef>
+          <a:fillRef idx="1">
+            <a:schemeClr val="accent1"/>
+          </a:fillRef>
+          <a:effectRef idx="0">
+            <a:schemeClr val="accent1"/>
+          </a:effectRef>
+          <a:fontRef idx="minor">
+            <a:schemeClr val="lt1"/>
+          </a:fontRef>
+        </p:style>
+        <p:txBody>
+          <a:bodyPr rtlCol="0" anchor="ctr"/>
+          <a:lstStyle>
+            <a:defPPr/>
+          </a:lstStyle>
+          <a:p>
+            <a:endParaRPr lang="en-US"/>
+          </a:p>
+        </p:txBody>
+      </p:sp>
+      <p:sp>
+        <p:nvSpPr>
+          <p:cNvPr id="8" name="New shape"/>
+          <p:cNvSpPr/>
+          <p:nvPr/>
+        </p:nvSpPr>
+        <p:spPr>
+          <a:xfrm>
+            <a:off x="4343400" y="2155825"/>
+            <a:ext cx="701040" cy="579120"/>
+          </a:xfrm>
+          <a:prstGeom prst="rect">
+            <a:avLst/>
+          </a:prstGeom>
+          <a:solidFill>
+            <a:srgbClr val="FF0000"/>
+          </a:solidFill>
+          <a:ln w="0">
+            <a:noFill/>
+          </a:ln>
+        </p:spPr>
+        <p:style>
+          <a:lnRef idx="2">
+            <a:schemeClr val="accent1">
+              <a:shade val="50000"/>
+            </a:schemeClr>
+          </a:lnRef>
+          <a:fillRef idx="1">
+            <a:schemeClr val="accent1"/>
+          </a:fillRef>
+          <a:effectRef idx="0">
+            <a:schemeClr val="accent1"/>
+          </a:effectRef>
+          <a:fontRef idx="minor">
+            <a:schemeClr val="lt1"/>
+          </a:fontRef>
+        </p:style>
+        <p:txBody>
+          <a:bodyPr rtlCol="0" anchor="ctr"/>
+          <a:lstStyle>
+            <a:defPPr/>
+          </a:lstStyle>
+          <a:p>
+            <a:endParaRPr lang="en-US"/>
+          </a:p>
+        </p:txBody>
+      </p:sp>
+      <p:sp>
+        <p:nvSpPr>
+          <p:cNvPr id="9" name="New shape"/>
+          <p:cNvSpPr/>
+          <p:nvPr/>
+        </p:nvSpPr>
+        <p:spPr>
+          <a:xfrm>
+            <a:off x="5044440" y="2155825"/>
+            <a:ext cx="701040" cy="579120"/>
+          </a:xfrm>
+          <a:prstGeom prst="rect">
+            <a:avLst/>
+          </a:prstGeom>
+          <a:solidFill>
+            <a:srgbClr val="FF0000"/>
+          </a:solidFill>
+          <a:ln w="0">
+            <a:noFill/>
+          </a:ln>
+        </p:spPr>
+        <p:style>
+          <a:lnRef idx="2">
+            <a:schemeClr val="accent1">
+              <a:shade val="50000"/>
+            </a:schemeClr>
+          </a:lnRef>
+          <a:fillRef idx="1">
+            <a:schemeClr val="accent1"/>
+          </a:fillRef>
+          <a:effectRef idx="0">
+            <a:schemeClr val="accent1"/>
+          </a:effectRef>
+          <a:fontRef idx="minor">
+            <a:schemeClr val="lt1"/>
+          </a:fontRef>
+        </p:style>
+        <p:txBody>
+          <a:bodyPr rtlCol="0" anchor="ctr"/>
+          <a:lstStyle>
+            <a:defPPr/>
+          </a:lstStyle>
+          <a:p>
+            <a:endParaRPr lang="en-US"/>
+          </a:p>
+        </p:txBody>
+      </p:sp>
+      <p:sp>
+        <p:nvSpPr>
+          <p:cNvPr id="10" name="New shape"/>
+          <p:cNvSpPr/>
+          <p:nvPr/>
+        </p:nvSpPr>
+        <p:spPr>
+          <a:xfrm>
+            <a:off x="5745480" y="2155825"/>
+            <a:ext cx="701040" cy="579120"/>
+          </a:xfrm>
+          <a:prstGeom prst="rect">
+            <a:avLst/>
+          </a:prstGeom>
+          <a:solidFill>
+            <a:srgbClr val="FF0000"/>
+          </a:solidFill>
+          <a:ln w="0">
+            <a:noFill/>
+          </a:ln>
+        </p:spPr>
+        <p:style>
+          <a:lnRef idx="2">
+            <a:schemeClr val="accent1">
+              <a:shade val="50000"/>
+            </a:schemeClr>
+          </a:lnRef>
+          <a:fillRef idx="1">
+            <a:schemeClr val="accent1"/>
+          </a:fillRef>
+          <a:effectRef idx="0">
+            <a:schemeClr val="accent1"/>
+          </a:effectRef>
+          <a:fontRef idx="minor">
+            <a:schemeClr val="lt1"/>
+          </a:fontRef>
+        </p:style>
+        <p:txBody>
+          <a:bodyPr rtlCol="0" anchor="ctr"/>
+          <a:lstStyle>
+            <a:defPPr/>
+          </a:lstStyle>
+          <a:p>
+            <a:endParaRPr lang="en-US"/>
+          </a:p>
+        </p:txBody>
+      </p:sp>
+      <p:sp>
+        <p:nvSpPr>
+          <p:cNvPr id="11" name="New shape"/>
+          <p:cNvSpPr/>
+          <p:nvPr/>
+        </p:nvSpPr>
+        <p:spPr>
+          <a:xfrm>
+            <a:off x="6446520" y="2155825"/>
+            <a:ext cx="701040" cy="579120"/>
+          </a:xfrm>
+          <a:prstGeom prst="rect">
+            <a:avLst/>
+          </a:prstGeom>
+          <a:solidFill>
+            <a:srgbClr val="FF0000"/>
+          </a:solidFill>
+          <a:ln w="0">
+            <a:noFill/>
+          </a:ln>
+        </p:spPr>
+        <p:style>
+          <a:lnRef idx="2">
+            <a:schemeClr val="accent1">
+              <a:shade val="50000"/>
+            </a:schemeClr>
+          </a:lnRef>
+          <a:fillRef idx="1">
+            <a:schemeClr val="accent1"/>
+          </a:fillRef>
+          <a:effectRef idx="0">
+            <a:schemeClr val="accent1"/>
+          </a:effectRef>
+          <a:fontRef idx="minor">
+            <a:schemeClr val="lt1"/>
+          </a:fontRef>
+        </p:style>
+        <p:txBody>
+          <a:bodyPr rtlCol="0" anchor="ctr"/>
+          <a:lstStyle>
+            <a:defPPr/>
+          </a:lstStyle>
+          <a:p>
+            <a:endParaRPr lang="en-US"/>
+          </a:p>
+        </p:txBody>
+      </p:sp>
+      <p:sp>
+        <p:nvSpPr>
+          <p:cNvPr id="12" name="New shape"/>
+          <p:cNvSpPr/>
+          <p:nvPr/>
+        </p:nvSpPr>
+        <p:spPr>
+          <a:xfrm>
+            <a:off x="7147561" y="2155825"/>
+            <a:ext cx="701040" cy="579120"/>
+          </a:xfrm>
+          <a:prstGeom prst="rect">
+            <a:avLst/>
+          </a:prstGeom>
+          <a:solidFill>
+            <a:srgbClr val="FF0000"/>
+          </a:solidFill>
+          <a:ln w="0">
+            <a:noFill/>
+          </a:ln>
+        </p:spPr>
+        <p:style>
+          <a:lnRef idx="2">
+            <a:schemeClr val="accent1">
+              <a:shade val="50000"/>
+            </a:schemeClr>
+          </a:lnRef>
+          <a:fillRef idx="1">
+            <a:schemeClr val="accent1"/>
+          </a:fillRef>
+          <a:effectRef idx="0">
+            <a:schemeClr val="accent1"/>
+          </a:effectRef>
+          <a:fontRef idx="minor">
+            <a:schemeClr val="lt1"/>
+          </a:fontRef>
+        </p:style>
+        <p:txBody>
+          <a:bodyPr rtlCol="0" anchor="ctr"/>
+          <a:lstStyle>
+            <a:defPPr/>
+          </a:lstStyle>
+          <a:p>
+            <a:endParaRPr lang="en-US"/>
+          </a:p>
+        </p:txBody>
+      </p:sp>
+      <p:sp>
+        <p:nvSpPr>
+          <p:cNvPr id="13" name="New shape"/>
+          <p:cNvSpPr/>
+          <p:nvPr/>
+        </p:nvSpPr>
+        <p:spPr>
+          <a:xfrm>
+            <a:off x="7848600" y="2155825"/>
+            <a:ext cx="701040" cy="579120"/>
+          </a:xfrm>
+          <a:prstGeom prst="rect">
+            <a:avLst/>
+          </a:prstGeom>
+          <a:solidFill>
+            <a:srgbClr val="FF0000"/>
+          </a:solidFill>
+          <a:ln w="0">
+            <a:noFill/>
+          </a:ln>
+        </p:spPr>
+        <p:style>
+          <a:lnRef idx="2">
+            <a:schemeClr val="accent1">
+              <a:shade val="50000"/>
+            </a:schemeClr>
+          </a:lnRef>
+          <a:fillRef idx="1">
+            <a:schemeClr val="accent1"/>
+          </a:fillRef>
+          <a:effectRef idx="0">
+            <a:schemeClr val="accent1"/>
+          </a:effectRef>
+          <a:fontRef idx="minor">
+            <a:schemeClr val="lt1"/>
+          </a:fontRef>
+        </p:style>
+        <p:txBody>
+          <a:bodyPr rtlCol="0" anchor="ctr"/>
+          <a:lstStyle>
+            <a:defPPr/>
+          </a:lstStyle>
+          <a:p>
+            <a:endParaRPr lang="en-US"/>
+          </a:p>
+        </p:txBody>
+      </p:sp>
+      <p:sp>
+        <p:nvSpPr>
+          <p:cNvPr id="14" name="New shape"/>
+          <p:cNvSpPr/>
+          <p:nvPr/>
+        </p:nvSpPr>
+        <p:spPr>
+          <a:xfrm>
+            <a:off x="8549641" y="2155825"/>
+            <a:ext cx="701040" cy="579120"/>
+          </a:xfrm>
+          <a:prstGeom prst="rect">
+            <a:avLst/>
+          </a:prstGeom>
+          <a:solidFill>
+            <a:srgbClr val="FF0000"/>
+          </a:solidFill>
+          <a:ln w="0">
+            <a:noFill/>
+          </a:ln>
+        </p:spPr>
+        <p:style>
+          <a:lnRef idx="2">
+            <a:schemeClr val="accent1">
+              <a:shade val="50000"/>
+            </a:schemeClr>
+          </a:lnRef>
+          <a:fillRef idx="1">
+            <a:schemeClr val="accent1"/>
+          </a:fillRef>
+          <a:effectRef idx="0">
+            <a:schemeClr val="accent1"/>
+          </a:effectRef>
+          <a:fontRef idx="minor">
+            <a:schemeClr val="lt1"/>
+          </a:fontRef>
+        </p:style>
+        <p:txBody>
+          <a:bodyPr rtlCol="0" anchor="ctr"/>
+          <a:lstStyle>
+            <a:defPPr/>
+          </a:lstStyle>
+          <a:p>
+            <a:endParaRPr lang="en-US"/>
+          </a:p>
+        </p:txBody>
+      </p:sp>
+      <p:sp>
+        <p:nvSpPr>
+          <p:cNvPr id="15" name="New shape"/>
+          <p:cNvSpPr/>
+          <p:nvPr/>
+        </p:nvSpPr>
+        <p:spPr>
+          <a:xfrm>
+            <a:off x="9250680" y="2155825"/>
+            <a:ext cx="701040" cy="579120"/>
+          </a:xfrm>
+          <a:prstGeom prst="rect">
+            <a:avLst/>
+          </a:prstGeom>
+          <a:solidFill>
+            <a:srgbClr val="FF0000"/>
+          </a:solidFill>
+          <a:ln w="0">
+            <a:noFill/>
+          </a:ln>
+        </p:spPr>
+        <p:style>
+          <a:lnRef idx="2">
+            <a:schemeClr val="accent1">
+              <a:shade val="50000"/>
+            </a:schemeClr>
+          </a:lnRef>
+          <a:fillRef idx="1">
+            <a:schemeClr val="accent1"/>
+          </a:fillRef>
+          <a:effectRef idx="0">
+            <a:schemeClr val="accent1"/>
+          </a:effectRef>
+          <a:fontRef idx="minor">
+            <a:schemeClr val="lt1"/>
+          </a:fontRef>
+        </p:style>
+        <p:txBody>
+          <a:bodyPr rtlCol="0" anchor="ctr"/>
+          <a:lstStyle>
+            <a:defPPr/>
+          </a:lstStyle>
+          <a:p>
+            <a:endParaRPr lang="en-US"/>
+          </a:p>
+        </p:txBody>
+      </p:sp>
+      <p:sp>
+        <p:nvSpPr>
+          <p:cNvPr id="16" name="New shape"/>
+          <p:cNvSpPr/>
+          <p:nvPr/>
+        </p:nvSpPr>
+        <p:spPr>
+          <a:xfrm>
+            <a:off x="9951720" y="2155825"/>
+            <a:ext cx="701040" cy="579120"/>
+          </a:xfrm>
+          <a:prstGeom prst="rect">
+            <a:avLst/>
+          </a:prstGeom>
+          <a:solidFill>
+            <a:srgbClr val="FF0000"/>
+          </a:solidFill>
+          <a:ln w="0">
+            <a:noFill/>
+          </a:ln>
+        </p:spPr>
+        <p:style>
+          <a:lnRef idx="2">
+            <a:schemeClr val="accent1">
+              <a:shade val="50000"/>
+            </a:schemeClr>
+          </a:lnRef>
+          <a:fillRef idx="1">
+            <a:schemeClr val="accent1"/>
+          </a:fillRef>
+          <a:effectRef idx="0">
+            <a:schemeClr val="accent1"/>
+          </a:effectRef>
+          <a:fontRef idx="minor">
+            <a:schemeClr val="lt1"/>
+          </a:fontRef>
+        </p:style>
+        <p:txBody>
+          <a:bodyPr rtlCol="0" anchor="ctr"/>
+          <a:lstStyle>
+            <a:defPPr/>
+          </a:lstStyle>
+          <a:p>
+            <a:endParaRPr lang="en-US"/>
+          </a:p>
+        </p:txBody>
+      </p:sp>
+      <p:sp>
+        <p:nvSpPr>
+          <p:cNvPr id="17" name="New shape"/>
+          <p:cNvSpPr/>
+          <p:nvPr/>
+        </p:nvSpPr>
+        <p:spPr>
+          <a:xfrm>
+            <a:off x="10652761" y="2155825"/>
+            <a:ext cx="701040" cy="579120"/>
+          </a:xfrm>
+          <a:prstGeom prst="rect">
+            <a:avLst/>
+          </a:prstGeom>
+          <a:solidFill>
+            <a:srgbClr val="FF0000"/>
+          </a:solidFill>
+          <a:ln w="0">
+            <a:noFill/>
+          </a:ln>
+        </p:spPr>
+        <p:style>
+          <a:lnRef idx="2">
+            <a:schemeClr val="accent1">
+              <a:shade val="50000"/>
+            </a:schemeClr>
+          </a:lnRef>
+          <a:fillRef idx="1">
+            <a:schemeClr val="accent1"/>
+          </a:fillRef>
+          <a:effectRef idx="0">
+            <a:schemeClr val="accent1"/>
+          </a:effectRef>
+          <a:fontRef idx="minor">
+            <a:schemeClr val="lt1"/>
+          </a:fontRef>
+        </p:style>
+        <p:txBody>
+          <a:bodyPr rtlCol="0" anchor="ctr"/>
+          <a:lstStyle>
+            <a:defPPr/>
+          </a:lstStyle>
+          <a:p>
+            <a:endParaRPr lang="en-US"/>
+          </a:p>
+        </p:txBody>
+      </p:sp>
+      <p:sp>
+        <p:nvSpPr>
+          <p:cNvPr id="18" name="New shape"/>
+          <p:cNvSpPr/>
+          <p:nvPr/>
+        </p:nvSpPr>
+        <p:spPr>
+          <a:xfrm>
+            <a:off x="838200" y="2734945"/>
+            <a:ext cx="701040" cy="370840"/>
           </a:xfrm>
           <a:prstGeom prst="rect">
             <a:avLst/>
@@ -17411,718 +17948,13 @@
       </p:sp>
       <p:sp>
         <p:nvSpPr>
-          <p:cNvPr id="3" name="New shape"/>
-          <p:cNvSpPr/>
-          <p:nvPr/>
-        </p:nvSpPr>
-        <p:spPr>
-          <a:xfrm>
-            <a:off x="838200" y="2155825"/>
-            <a:ext cx="701040" cy="579120"/>
-          </a:xfrm>
-          <a:prstGeom prst="rect">
-            <a:avLst/>
-          </a:prstGeom>
-          <a:solidFill>
-            <a:srgbClr val="FF0000"/>
-          </a:solidFill>
-          <a:ln w="0">
-            <a:noFill/>
-          </a:ln>
-        </p:spPr>
-        <p:style>
-          <a:lnRef idx="2">
-            <a:schemeClr val="accent1">
-              <a:shade val="50000"/>
-            </a:schemeClr>
-          </a:lnRef>
-          <a:fillRef idx="1">
-            <a:schemeClr val="accent1"/>
-          </a:fillRef>
-          <a:effectRef idx="0">
-            <a:schemeClr val="accent1"/>
-          </a:effectRef>
-          <a:fontRef idx="minor">
-            <a:schemeClr val="lt1"/>
-          </a:fontRef>
-        </p:style>
-        <p:txBody>
-          <a:bodyPr rtlCol="0" anchor="ctr"/>
-          <a:lstStyle>
-            <a:defPPr/>
-          </a:lstStyle>
-          <a:p>
-            <a:endParaRPr lang="en-US"/>
-          </a:p>
-        </p:txBody>
-      </p:sp>
-      <p:sp>
-        <p:nvSpPr>
-          <p:cNvPr id="4" name="New shape"/>
-          <p:cNvSpPr/>
-          <p:nvPr/>
-        </p:nvSpPr>
-        <p:spPr>
-          <a:xfrm>
-            <a:off x="1539240" y="2155825"/>
-            <a:ext cx="701040" cy="579120"/>
-          </a:xfrm>
-          <a:prstGeom prst="rect">
-            <a:avLst/>
-          </a:prstGeom>
-          <a:solidFill>
-            <a:srgbClr val="FF0000"/>
-          </a:solidFill>
-          <a:ln w="0">
-            <a:noFill/>
-          </a:ln>
-        </p:spPr>
-        <p:style>
-          <a:lnRef idx="2">
-            <a:schemeClr val="accent1">
-              <a:shade val="50000"/>
-            </a:schemeClr>
-          </a:lnRef>
-          <a:fillRef idx="1">
-            <a:schemeClr val="accent1"/>
-          </a:fillRef>
-          <a:effectRef idx="0">
-            <a:schemeClr val="accent1"/>
-          </a:effectRef>
-          <a:fontRef idx="minor">
-            <a:schemeClr val="lt1"/>
-          </a:fontRef>
-        </p:style>
-        <p:txBody>
-          <a:bodyPr rtlCol="0" anchor="ctr"/>
-          <a:lstStyle>
-            <a:defPPr/>
-          </a:lstStyle>
-          <a:p>
-            <a:endParaRPr lang="en-US"/>
-          </a:p>
-        </p:txBody>
-      </p:sp>
-      <p:sp>
-        <p:nvSpPr>
-          <p:cNvPr id="5" name="New shape"/>
-          <p:cNvSpPr/>
-          <p:nvPr/>
-        </p:nvSpPr>
-        <p:spPr>
-          <a:xfrm>
-            <a:off x="2240280" y="2155825"/>
-            <a:ext cx="701040" cy="579120"/>
-          </a:xfrm>
-          <a:prstGeom prst="rect">
-            <a:avLst/>
-          </a:prstGeom>
-          <a:solidFill>
-            <a:srgbClr val="FF0000"/>
-          </a:solidFill>
-          <a:ln w="0">
-            <a:noFill/>
-          </a:ln>
-        </p:spPr>
-        <p:style>
-          <a:lnRef idx="2">
-            <a:schemeClr val="accent1">
-              <a:shade val="50000"/>
-            </a:schemeClr>
-          </a:lnRef>
-          <a:fillRef idx="1">
-            <a:schemeClr val="accent1"/>
-          </a:fillRef>
-          <a:effectRef idx="0">
-            <a:schemeClr val="accent1"/>
-          </a:effectRef>
-          <a:fontRef idx="minor">
-            <a:schemeClr val="lt1"/>
-          </a:fontRef>
-        </p:style>
-        <p:txBody>
-          <a:bodyPr rtlCol="0" anchor="ctr"/>
-          <a:lstStyle>
-            <a:defPPr/>
-          </a:lstStyle>
-          <a:p>
-            <a:endParaRPr lang="en-US"/>
-          </a:p>
-        </p:txBody>
-      </p:sp>
-      <p:sp>
-        <p:nvSpPr>
-          <p:cNvPr id="6" name="New shape"/>
-          <p:cNvSpPr/>
-          <p:nvPr/>
-        </p:nvSpPr>
-        <p:spPr>
-          <a:xfrm>
-            <a:off x="2941320" y="2155825"/>
-            <a:ext cx="701040" cy="579120"/>
-          </a:xfrm>
-          <a:prstGeom prst="rect">
-            <a:avLst/>
-          </a:prstGeom>
-          <a:solidFill>
-            <a:srgbClr val="FF0000"/>
-          </a:solidFill>
-          <a:ln w="0">
-            <a:noFill/>
-          </a:ln>
-        </p:spPr>
-        <p:style>
-          <a:lnRef idx="2">
-            <a:schemeClr val="accent1">
-              <a:shade val="50000"/>
-            </a:schemeClr>
-          </a:lnRef>
-          <a:fillRef idx="1">
-            <a:schemeClr val="accent1"/>
-          </a:fillRef>
-          <a:effectRef idx="0">
-            <a:schemeClr val="accent1"/>
-          </a:effectRef>
-          <a:fontRef idx="minor">
-            <a:schemeClr val="lt1"/>
-          </a:fontRef>
-        </p:style>
-        <p:txBody>
-          <a:bodyPr rtlCol="0" anchor="ctr"/>
-          <a:lstStyle>
-            <a:defPPr/>
-          </a:lstStyle>
-          <a:p>
-            <a:endParaRPr lang="en-US"/>
-          </a:p>
-        </p:txBody>
-      </p:sp>
-      <p:sp>
-        <p:nvSpPr>
-          <p:cNvPr id="7" name="New shape"/>
-          <p:cNvSpPr/>
-          <p:nvPr/>
-        </p:nvSpPr>
-        <p:spPr>
-          <a:xfrm>
-            <a:off x="3642360" y="2155825"/>
-            <a:ext cx="701040" cy="579120"/>
-          </a:xfrm>
-          <a:prstGeom prst="rect">
-            <a:avLst/>
-          </a:prstGeom>
-          <a:solidFill>
-            <a:srgbClr val="FF0000"/>
-          </a:solidFill>
-          <a:ln w="0">
-            <a:noFill/>
-          </a:ln>
-        </p:spPr>
-        <p:style>
-          <a:lnRef idx="2">
-            <a:schemeClr val="accent1">
-              <a:shade val="50000"/>
-            </a:schemeClr>
-          </a:lnRef>
-          <a:fillRef idx="1">
-            <a:schemeClr val="accent1"/>
-          </a:fillRef>
-          <a:effectRef idx="0">
-            <a:schemeClr val="accent1"/>
-          </a:effectRef>
-          <a:fontRef idx="minor">
-            <a:schemeClr val="lt1"/>
-          </a:fontRef>
-        </p:style>
-        <p:txBody>
-          <a:bodyPr rtlCol="0" anchor="ctr"/>
-          <a:lstStyle>
-            <a:defPPr/>
-          </a:lstStyle>
-          <a:p>
-            <a:endParaRPr lang="en-US"/>
-          </a:p>
-        </p:txBody>
-      </p:sp>
-      <p:sp>
-        <p:nvSpPr>
-          <p:cNvPr id="8" name="New shape"/>
-          <p:cNvSpPr/>
-          <p:nvPr/>
-        </p:nvSpPr>
-        <p:spPr>
-          <a:xfrm>
-            <a:off x="4343400" y="2155825"/>
-            <a:ext cx="701040" cy="579120"/>
-          </a:xfrm>
-          <a:prstGeom prst="rect">
-            <a:avLst/>
-          </a:prstGeom>
-          <a:solidFill>
-            <a:srgbClr val="FF0000"/>
-          </a:solidFill>
-          <a:ln w="0">
-            <a:noFill/>
-          </a:ln>
-        </p:spPr>
-        <p:style>
-          <a:lnRef idx="2">
-            <a:schemeClr val="accent1">
-              <a:shade val="50000"/>
-            </a:schemeClr>
-          </a:lnRef>
-          <a:fillRef idx="1">
-            <a:schemeClr val="accent1"/>
-          </a:fillRef>
-          <a:effectRef idx="0">
-            <a:schemeClr val="accent1"/>
-          </a:effectRef>
-          <a:fontRef idx="minor">
-            <a:schemeClr val="lt1"/>
-          </a:fontRef>
-        </p:style>
-        <p:txBody>
-          <a:bodyPr rtlCol="0" anchor="ctr"/>
-          <a:lstStyle>
-            <a:defPPr/>
-          </a:lstStyle>
-          <a:p>
-            <a:endParaRPr lang="en-US"/>
-          </a:p>
-        </p:txBody>
-      </p:sp>
-      <p:sp>
-        <p:nvSpPr>
-          <p:cNvPr id="9" name="New shape"/>
-          <p:cNvSpPr/>
-          <p:nvPr/>
-        </p:nvSpPr>
-        <p:spPr>
-          <a:xfrm>
-            <a:off x="5044440" y="2155825"/>
-            <a:ext cx="701040" cy="579120"/>
-          </a:xfrm>
-          <a:prstGeom prst="rect">
-            <a:avLst/>
-          </a:prstGeom>
-          <a:solidFill>
-            <a:srgbClr val="FF0000"/>
-          </a:solidFill>
-          <a:ln w="0">
-            <a:noFill/>
-          </a:ln>
-        </p:spPr>
-        <p:style>
-          <a:lnRef idx="2">
-            <a:schemeClr val="accent1">
-              <a:shade val="50000"/>
-            </a:schemeClr>
-          </a:lnRef>
-          <a:fillRef idx="1">
-            <a:schemeClr val="accent1"/>
-          </a:fillRef>
-          <a:effectRef idx="0">
-            <a:schemeClr val="accent1"/>
-          </a:effectRef>
-          <a:fontRef idx="minor">
-            <a:schemeClr val="lt1"/>
-          </a:fontRef>
-        </p:style>
-        <p:txBody>
-          <a:bodyPr rtlCol="0" anchor="ctr"/>
-          <a:lstStyle>
-            <a:defPPr/>
-          </a:lstStyle>
-          <a:p>
-            <a:endParaRPr lang="en-US"/>
-          </a:p>
-        </p:txBody>
-      </p:sp>
-      <p:sp>
-        <p:nvSpPr>
-          <p:cNvPr id="10" name="New shape"/>
-          <p:cNvSpPr/>
-          <p:nvPr/>
-        </p:nvSpPr>
-        <p:spPr>
-          <a:xfrm>
-            <a:off x="5745480" y="2155825"/>
-            <a:ext cx="701040" cy="579120"/>
-          </a:xfrm>
-          <a:prstGeom prst="rect">
-            <a:avLst/>
-          </a:prstGeom>
-          <a:solidFill>
-            <a:srgbClr val="FF0000"/>
-          </a:solidFill>
-          <a:ln w="0">
-            <a:noFill/>
-          </a:ln>
-        </p:spPr>
-        <p:style>
-          <a:lnRef idx="2">
-            <a:schemeClr val="accent1">
-              <a:shade val="50000"/>
-            </a:schemeClr>
-          </a:lnRef>
-          <a:fillRef idx="1">
-            <a:schemeClr val="accent1"/>
-          </a:fillRef>
-          <a:effectRef idx="0">
-            <a:schemeClr val="accent1"/>
-          </a:effectRef>
-          <a:fontRef idx="minor">
-            <a:schemeClr val="lt1"/>
-          </a:fontRef>
-        </p:style>
-        <p:txBody>
-          <a:bodyPr rtlCol="0" anchor="ctr"/>
-          <a:lstStyle>
-            <a:defPPr/>
-          </a:lstStyle>
-          <a:p>
-            <a:endParaRPr lang="en-US"/>
-          </a:p>
-        </p:txBody>
-      </p:sp>
-      <p:sp>
-        <p:nvSpPr>
-          <p:cNvPr id="11" name="New shape"/>
-          <p:cNvSpPr/>
-          <p:nvPr/>
-        </p:nvSpPr>
-        <p:spPr>
-          <a:xfrm>
-            <a:off x="6446520" y="2155825"/>
-            <a:ext cx="701040" cy="579120"/>
-          </a:xfrm>
-          <a:prstGeom prst="rect">
-            <a:avLst/>
-          </a:prstGeom>
-          <a:solidFill>
-            <a:srgbClr val="FF0000"/>
-          </a:solidFill>
-          <a:ln w="0">
-            <a:noFill/>
-          </a:ln>
-        </p:spPr>
-        <p:style>
-          <a:lnRef idx="2">
-            <a:schemeClr val="accent1">
-              <a:shade val="50000"/>
-            </a:schemeClr>
-          </a:lnRef>
-          <a:fillRef idx="1">
-            <a:schemeClr val="accent1"/>
-          </a:fillRef>
-          <a:effectRef idx="0">
-            <a:schemeClr val="accent1"/>
-          </a:effectRef>
-          <a:fontRef idx="minor">
-            <a:schemeClr val="lt1"/>
-          </a:fontRef>
-        </p:style>
-        <p:txBody>
-          <a:bodyPr rtlCol="0" anchor="ctr"/>
-          <a:lstStyle>
-            <a:defPPr/>
-          </a:lstStyle>
-          <a:p>
-            <a:endParaRPr lang="en-US"/>
-          </a:p>
-        </p:txBody>
-      </p:sp>
-      <p:sp>
-        <p:nvSpPr>
-          <p:cNvPr id="12" name="New shape"/>
-          <p:cNvSpPr/>
-          <p:nvPr/>
-        </p:nvSpPr>
-        <p:spPr>
-          <a:xfrm>
-            <a:off x="7147561" y="2155825"/>
-            <a:ext cx="701040" cy="579120"/>
-          </a:xfrm>
-          <a:prstGeom prst="rect">
-            <a:avLst/>
-          </a:prstGeom>
-          <a:solidFill>
-            <a:srgbClr val="FF0000"/>
-          </a:solidFill>
-          <a:ln w="0">
-            <a:noFill/>
-          </a:ln>
-        </p:spPr>
-        <p:style>
-          <a:lnRef idx="2">
-            <a:schemeClr val="accent1">
-              <a:shade val="50000"/>
-            </a:schemeClr>
-          </a:lnRef>
-          <a:fillRef idx="1">
-            <a:schemeClr val="accent1"/>
-          </a:fillRef>
-          <a:effectRef idx="0">
-            <a:schemeClr val="accent1"/>
-          </a:effectRef>
-          <a:fontRef idx="minor">
-            <a:schemeClr val="lt1"/>
-          </a:fontRef>
-        </p:style>
-        <p:txBody>
-          <a:bodyPr rtlCol="0" anchor="ctr"/>
-          <a:lstStyle>
-            <a:defPPr/>
-          </a:lstStyle>
-          <a:p>
-            <a:endParaRPr lang="en-US"/>
-          </a:p>
-        </p:txBody>
-      </p:sp>
-      <p:sp>
-        <p:nvSpPr>
-          <p:cNvPr id="13" name="New shape"/>
-          <p:cNvSpPr/>
-          <p:nvPr/>
-        </p:nvSpPr>
-        <p:spPr>
-          <a:xfrm>
-            <a:off x="7848600" y="2155825"/>
-            <a:ext cx="701040" cy="579120"/>
-          </a:xfrm>
-          <a:prstGeom prst="rect">
-            <a:avLst/>
-          </a:prstGeom>
-          <a:solidFill>
-            <a:srgbClr val="FF0000"/>
-          </a:solidFill>
-          <a:ln w="0">
-            <a:noFill/>
-          </a:ln>
-        </p:spPr>
-        <p:style>
-          <a:lnRef idx="2">
-            <a:schemeClr val="accent1">
-              <a:shade val="50000"/>
-            </a:schemeClr>
-          </a:lnRef>
-          <a:fillRef idx="1">
-            <a:schemeClr val="accent1"/>
-          </a:fillRef>
-          <a:effectRef idx="0">
-            <a:schemeClr val="accent1"/>
-          </a:effectRef>
-          <a:fontRef idx="minor">
-            <a:schemeClr val="lt1"/>
-          </a:fontRef>
-        </p:style>
-        <p:txBody>
-          <a:bodyPr rtlCol="0" anchor="ctr"/>
-          <a:lstStyle>
-            <a:defPPr/>
-          </a:lstStyle>
-          <a:p>
-            <a:endParaRPr lang="en-US"/>
-          </a:p>
-        </p:txBody>
-      </p:sp>
-      <p:sp>
-        <p:nvSpPr>
-          <p:cNvPr id="14" name="New shape"/>
-          <p:cNvSpPr/>
-          <p:nvPr/>
-        </p:nvSpPr>
-        <p:spPr>
-          <a:xfrm>
-            <a:off x="8549641" y="2155825"/>
-            <a:ext cx="701040" cy="579120"/>
-          </a:xfrm>
-          <a:prstGeom prst="rect">
-            <a:avLst/>
-          </a:prstGeom>
-          <a:solidFill>
-            <a:srgbClr val="FF0000"/>
-          </a:solidFill>
-          <a:ln w="0">
-            <a:noFill/>
-          </a:ln>
-        </p:spPr>
-        <p:style>
-          <a:lnRef idx="2">
-            <a:schemeClr val="accent1">
-              <a:shade val="50000"/>
-            </a:schemeClr>
-          </a:lnRef>
-          <a:fillRef idx="1">
-            <a:schemeClr val="accent1"/>
-          </a:fillRef>
-          <a:effectRef idx="0">
-            <a:schemeClr val="accent1"/>
-          </a:effectRef>
-          <a:fontRef idx="minor">
-            <a:schemeClr val="lt1"/>
-          </a:fontRef>
-        </p:style>
-        <p:txBody>
-          <a:bodyPr rtlCol="0" anchor="ctr"/>
-          <a:lstStyle>
-            <a:defPPr/>
-          </a:lstStyle>
-          <a:p>
-            <a:endParaRPr lang="en-US"/>
-          </a:p>
-        </p:txBody>
-      </p:sp>
-      <p:sp>
-        <p:nvSpPr>
-          <p:cNvPr id="15" name="New shape"/>
-          <p:cNvSpPr/>
-          <p:nvPr/>
-        </p:nvSpPr>
-        <p:spPr>
-          <a:xfrm>
-            <a:off x="9250680" y="2155825"/>
-            <a:ext cx="701040" cy="579120"/>
-          </a:xfrm>
-          <a:prstGeom prst="rect">
-            <a:avLst/>
-          </a:prstGeom>
-          <a:solidFill>
-            <a:srgbClr val="FF0000"/>
-          </a:solidFill>
-          <a:ln w="0">
-            <a:noFill/>
-          </a:ln>
-        </p:spPr>
-        <p:style>
-          <a:lnRef idx="2">
-            <a:schemeClr val="accent1">
-              <a:shade val="50000"/>
-            </a:schemeClr>
-          </a:lnRef>
-          <a:fillRef idx="1">
-            <a:schemeClr val="accent1"/>
-          </a:fillRef>
-          <a:effectRef idx="0">
-            <a:schemeClr val="accent1"/>
-          </a:effectRef>
-          <a:fontRef idx="minor">
-            <a:schemeClr val="lt1"/>
-          </a:fontRef>
-        </p:style>
-        <p:txBody>
-          <a:bodyPr rtlCol="0" anchor="ctr"/>
-          <a:lstStyle>
-            <a:defPPr/>
-          </a:lstStyle>
-          <a:p>
-            <a:endParaRPr lang="en-US"/>
-          </a:p>
-        </p:txBody>
-      </p:sp>
-      <p:sp>
-        <p:nvSpPr>
-          <p:cNvPr id="16" name="New shape"/>
-          <p:cNvSpPr/>
-          <p:nvPr/>
-        </p:nvSpPr>
-        <p:spPr>
-          <a:xfrm>
-            <a:off x="9951720" y="2155825"/>
-            <a:ext cx="701040" cy="579120"/>
-          </a:xfrm>
-          <a:prstGeom prst="rect">
-            <a:avLst/>
-          </a:prstGeom>
-          <a:solidFill>
-            <a:srgbClr val="FF0000"/>
-          </a:solidFill>
-          <a:ln w="0">
-            <a:noFill/>
-          </a:ln>
-        </p:spPr>
-        <p:style>
-          <a:lnRef idx="2">
-            <a:schemeClr val="accent1">
-              <a:shade val="50000"/>
-            </a:schemeClr>
-          </a:lnRef>
-          <a:fillRef idx="1">
-            <a:schemeClr val="accent1"/>
-          </a:fillRef>
-          <a:effectRef idx="0">
-            <a:schemeClr val="accent1"/>
-          </a:effectRef>
-          <a:fontRef idx="minor">
-            <a:schemeClr val="lt1"/>
-          </a:fontRef>
-        </p:style>
-        <p:txBody>
-          <a:bodyPr rtlCol="0" anchor="ctr"/>
-          <a:lstStyle>
-            <a:defPPr/>
-          </a:lstStyle>
-          <a:p>
-            <a:endParaRPr lang="en-US"/>
-          </a:p>
-        </p:txBody>
-      </p:sp>
-      <p:sp>
-        <p:nvSpPr>
-          <p:cNvPr id="17" name="New shape"/>
-          <p:cNvSpPr/>
-          <p:nvPr/>
-        </p:nvSpPr>
-        <p:spPr>
-          <a:xfrm>
-            <a:off x="10652761" y="2155825"/>
-            <a:ext cx="701040" cy="579120"/>
-          </a:xfrm>
-          <a:prstGeom prst="rect">
-            <a:avLst/>
-          </a:prstGeom>
-          <a:solidFill>
-            <a:srgbClr val="FF0000"/>
-          </a:solidFill>
-          <a:ln w="0">
-            <a:noFill/>
-          </a:ln>
-        </p:spPr>
-        <p:style>
-          <a:lnRef idx="2">
-            <a:schemeClr val="accent1">
-              <a:shade val="50000"/>
-            </a:schemeClr>
-          </a:lnRef>
-          <a:fillRef idx="1">
-            <a:schemeClr val="accent1"/>
-          </a:fillRef>
-          <a:effectRef idx="0">
-            <a:schemeClr val="accent1"/>
-          </a:effectRef>
-          <a:fontRef idx="minor">
-            <a:schemeClr val="lt1"/>
-          </a:fontRef>
-        </p:style>
-        <p:txBody>
-          <a:bodyPr rtlCol="0" anchor="ctr"/>
-          <a:lstStyle>
-            <a:defPPr/>
-          </a:lstStyle>
-          <a:p>
-            <a:endParaRPr lang="en-US"/>
-          </a:p>
-        </p:txBody>
-      </p:sp>
-      <p:sp>
-        <p:nvSpPr>
-          <p:cNvPr id="18" name="New shape"/>
-          <p:cNvSpPr/>
-          <p:nvPr/>
-        </p:nvSpPr>
-        <p:spPr>
-          <a:xfrm>
-            <a:off x="838200" y="2734945"/>
+          <p:cNvPr id="19" name="New shape"/>
+          <p:cNvSpPr/>
+          <p:nvPr/>
+        </p:nvSpPr>
+        <p:spPr>
+          <a:xfrm>
+            <a:off x="1539240" y="2734945"/>
             <a:ext cx="701040" cy="370840"/>
           </a:xfrm>
           <a:prstGeom prst="rect">
@@ -18163,13 +17995,13 @@
       </p:sp>
       <p:sp>
         <p:nvSpPr>
-          <p:cNvPr id="19" name="New shape"/>
-          <p:cNvSpPr/>
-          <p:nvPr/>
-        </p:nvSpPr>
-        <p:spPr>
-          <a:xfrm>
-            <a:off x="1539240" y="2734945"/>
+          <p:cNvPr id="20" name="New shape"/>
+          <p:cNvSpPr/>
+          <p:nvPr/>
+        </p:nvSpPr>
+        <p:spPr>
+          <a:xfrm>
+            <a:off x="2240280" y="2734945"/>
             <a:ext cx="701040" cy="370840"/>
           </a:xfrm>
           <a:prstGeom prst="rect">
@@ -18210,13 +18042,13 @@
       </p:sp>
       <p:sp>
         <p:nvSpPr>
-          <p:cNvPr id="20" name="New shape"/>
-          <p:cNvSpPr/>
-          <p:nvPr/>
-        </p:nvSpPr>
-        <p:spPr>
-          <a:xfrm>
-            <a:off x="2240280" y="2734945"/>
+          <p:cNvPr id="21" name="New shape"/>
+          <p:cNvSpPr/>
+          <p:nvPr/>
+        </p:nvSpPr>
+        <p:spPr>
+          <a:xfrm>
+            <a:off x="2941320" y="2734945"/>
             <a:ext cx="701040" cy="370840"/>
           </a:xfrm>
           <a:prstGeom prst="rect">
@@ -18257,13 +18089,13 @@
       </p:sp>
       <p:sp>
         <p:nvSpPr>
-          <p:cNvPr id="21" name="New shape"/>
-          <p:cNvSpPr/>
-          <p:nvPr/>
-        </p:nvSpPr>
-        <p:spPr>
-          <a:xfrm>
-            <a:off x="2941320" y="2734945"/>
+          <p:cNvPr id="22" name="New shape"/>
+          <p:cNvSpPr/>
+          <p:nvPr/>
+        </p:nvSpPr>
+        <p:spPr>
+          <a:xfrm>
+            <a:off x="3642360" y="2734945"/>
             <a:ext cx="701040" cy="370840"/>
           </a:xfrm>
           <a:prstGeom prst="rect">
@@ -18304,13 +18136,13 @@
       </p:sp>
       <p:sp>
         <p:nvSpPr>
-          <p:cNvPr id="22" name="New shape"/>
-          <p:cNvSpPr/>
-          <p:nvPr/>
-        </p:nvSpPr>
-        <p:spPr>
-          <a:xfrm>
-            <a:off x="3642360" y="2734945"/>
+          <p:cNvPr id="23" name="New shape"/>
+          <p:cNvSpPr/>
+          <p:nvPr/>
+        </p:nvSpPr>
+        <p:spPr>
+          <a:xfrm>
+            <a:off x="4343400" y="2734945"/>
             <a:ext cx="701040" cy="370840"/>
           </a:xfrm>
           <a:prstGeom prst="rect">
@@ -18351,13 +18183,13 @@
       </p:sp>
       <p:sp>
         <p:nvSpPr>
-          <p:cNvPr id="23" name="New shape"/>
-          <p:cNvSpPr/>
-          <p:nvPr/>
-        </p:nvSpPr>
-        <p:spPr>
-          <a:xfrm>
-            <a:off x="4343400" y="2734945"/>
+          <p:cNvPr id="24" name="New shape"/>
+          <p:cNvSpPr/>
+          <p:nvPr/>
+        </p:nvSpPr>
+        <p:spPr>
+          <a:xfrm>
+            <a:off x="5044440" y="2734945"/>
             <a:ext cx="701040" cy="370840"/>
           </a:xfrm>
           <a:prstGeom prst="rect">
@@ -18398,13 +18230,13 @@
       </p:sp>
       <p:sp>
         <p:nvSpPr>
-          <p:cNvPr id="24" name="New shape"/>
-          <p:cNvSpPr/>
-          <p:nvPr/>
-        </p:nvSpPr>
-        <p:spPr>
-          <a:xfrm>
-            <a:off x="5044440" y="2734945"/>
+          <p:cNvPr id="25" name="New shape"/>
+          <p:cNvSpPr/>
+          <p:nvPr/>
+        </p:nvSpPr>
+        <p:spPr>
+          <a:xfrm>
+            <a:off x="5745480" y="2734945"/>
             <a:ext cx="701040" cy="370840"/>
           </a:xfrm>
           <a:prstGeom prst="rect">
@@ -18445,13 +18277,13 @@
       </p:sp>
       <p:sp>
         <p:nvSpPr>
-          <p:cNvPr id="25" name="New shape"/>
-          <p:cNvSpPr/>
-          <p:nvPr/>
-        </p:nvSpPr>
-        <p:spPr>
-          <a:xfrm>
-            <a:off x="5745480" y="2734945"/>
+          <p:cNvPr id="26" name="New shape"/>
+          <p:cNvSpPr/>
+          <p:nvPr/>
+        </p:nvSpPr>
+        <p:spPr>
+          <a:xfrm>
+            <a:off x="6446520" y="2734945"/>
             <a:ext cx="701040" cy="370840"/>
           </a:xfrm>
           <a:prstGeom prst="rect">
@@ -18492,13 +18324,13 @@
       </p:sp>
       <p:sp>
         <p:nvSpPr>
-          <p:cNvPr id="26" name="New shape"/>
-          <p:cNvSpPr/>
-          <p:nvPr/>
-        </p:nvSpPr>
-        <p:spPr>
-          <a:xfrm>
-            <a:off x="6446520" y="2734945"/>
+          <p:cNvPr id="27" name="New shape"/>
+          <p:cNvSpPr/>
+          <p:nvPr/>
+        </p:nvSpPr>
+        <p:spPr>
+          <a:xfrm>
+            <a:off x="7147561" y="2734945"/>
             <a:ext cx="701040" cy="370840"/>
           </a:xfrm>
           <a:prstGeom prst="rect">
@@ -18539,13 +18371,13 @@
       </p:sp>
       <p:sp>
         <p:nvSpPr>
-          <p:cNvPr id="27" name="New shape"/>
-          <p:cNvSpPr/>
-          <p:nvPr/>
-        </p:nvSpPr>
-        <p:spPr>
-          <a:xfrm>
-            <a:off x="7147561" y="2734945"/>
+          <p:cNvPr id="28" name="New shape"/>
+          <p:cNvSpPr/>
+          <p:nvPr/>
+        </p:nvSpPr>
+        <p:spPr>
+          <a:xfrm>
+            <a:off x="7848600" y="2734945"/>
             <a:ext cx="701040" cy="370840"/>
           </a:xfrm>
           <a:prstGeom prst="rect">
@@ -18586,13 +18418,13 @@
       </p:sp>
       <p:sp>
         <p:nvSpPr>
-          <p:cNvPr id="28" name="New shape"/>
-          <p:cNvSpPr/>
-          <p:nvPr/>
-        </p:nvSpPr>
-        <p:spPr>
-          <a:xfrm>
-            <a:off x="7848600" y="2734945"/>
+          <p:cNvPr id="29" name="New shape"/>
+          <p:cNvSpPr/>
+          <p:nvPr/>
+        </p:nvSpPr>
+        <p:spPr>
+          <a:xfrm>
+            <a:off x="8549641" y="2734945"/>
             <a:ext cx="701040" cy="370840"/>
           </a:xfrm>
           <a:prstGeom prst="rect">
@@ -18633,13 +18465,13 @@
       </p:sp>
       <p:sp>
         <p:nvSpPr>
-          <p:cNvPr id="29" name="New shape"/>
-          <p:cNvSpPr/>
-          <p:nvPr/>
-        </p:nvSpPr>
-        <p:spPr>
-          <a:xfrm>
-            <a:off x="8549641" y="2734945"/>
+          <p:cNvPr id="30" name="New shape"/>
+          <p:cNvSpPr/>
+          <p:nvPr/>
+        </p:nvSpPr>
+        <p:spPr>
+          <a:xfrm>
+            <a:off x="9250680" y="2734945"/>
             <a:ext cx="701040" cy="370840"/>
           </a:xfrm>
           <a:prstGeom prst="rect">
@@ -18680,13 +18512,13 @@
       </p:sp>
       <p:sp>
         <p:nvSpPr>
-          <p:cNvPr id="30" name="New shape"/>
-          <p:cNvSpPr/>
-          <p:nvPr/>
-        </p:nvSpPr>
-        <p:spPr>
-          <a:xfrm>
-            <a:off x="9250680" y="2734945"/>
+          <p:cNvPr id="31" name="New shape"/>
+          <p:cNvSpPr/>
+          <p:nvPr/>
+        </p:nvSpPr>
+        <p:spPr>
+          <a:xfrm>
+            <a:off x="9951720" y="2734945"/>
             <a:ext cx="701040" cy="370840"/>
           </a:xfrm>
           <a:prstGeom prst="rect">
@@ -18727,13 +18559,13 @@
       </p:sp>
       <p:sp>
         <p:nvSpPr>
-          <p:cNvPr id="31" name="New shape"/>
-          <p:cNvSpPr/>
-          <p:nvPr/>
-        </p:nvSpPr>
-        <p:spPr>
-          <a:xfrm>
-            <a:off x="9951720" y="2734945"/>
+          <p:cNvPr id="32" name="New shape"/>
+          <p:cNvSpPr/>
+          <p:nvPr/>
+        </p:nvSpPr>
+        <p:spPr>
+          <a:xfrm>
+            <a:off x="10652761" y="2734945"/>
             <a:ext cx="701040" cy="370840"/>
           </a:xfrm>
           <a:prstGeom prst="rect">
@@ -18774,53 +18606,6 @@
       </p:sp>
       <p:sp>
         <p:nvSpPr>
-          <p:cNvPr id="32" name="New shape"/>
-          <p:cNvSpPr/>
-          <p:nvPr/>
-        </p:nvSpPr>
-        <p:spPr>
-          <a:xfrm>
-            <a:off x="10652761" y="2734945"/>
-            <a:ext cx="701040" cy="370840"/>
-          </a:xfrm>
-          <a:prstGeom prst="rect">
-            <a:avLst/>
-          </a:prstGeom>
-          <a:solidFill>
-            <a:srgbClr val="FFFFFF"/>
-          </a:solidFill>
-          <a:ln w="0">
-            <a:noFill/>
-          </a:ln>
-        </p:spPr>
-        <p:style>
-          <a:lnRef idx="2">
-            <a:schemeClr val="accent1">
-              <a:shade val="50000"/>
-            </a:schemeClr>
-          </a:lnRef>
-          <a:fillRef idx="1">
-            <a:schemeClr val="accent1"/>
-          </a:fillRef>
-          <a:effectRef idx="0">
-            <a:schemeClr val="accent1"/>
-          </a:effectRef>
-          <a:fontRef idx="minor">
-            <a:schemeClr val="lt1"/>
-          </a:fontRef>
-        </p:style>
-        <p:txBody>
-          <a:bodyPr rtlCol="0" anchor="ctr"/>
-          <a:lstStyle>
-            <a:defPPr/>
-          </a:lstStyle>
-          <a:p>
-            <a:endParaRPr lang="en-US"/>
-          </a:p>
-        </p:txBody>
-      </p:sp>
-      <p:sp>
-        <p:nvSpPr>
           <p:cNvPr id="33" name="New shape"/>
           <p:cNvSpPr/>
           <p:nvPr/>
@@ -19690,734 +19475,6 @@
           </a:effectRef>
           <a:fontRef idx="minor">
             <a:schemeClr val="lt1"/>
-          </a:fontRef>
-        </p:style>
-        <p:txBody>
-          <a:bodyPr rtlCol="0" anchor="ctr"/>
-          <a:lstStyle>
-            <a:defPPr/>
-          </a:lstStyle>
-          <a:p>
-            <a:endParaRPr lang="en-US"/>
-          </a:p>
-        </p:txBody>
-      </p:sp>
-      <p:sp>
-        <p:nvSpPr>
-          <p:cNvPr id="53" name="New shape"/>
-          <p:cNvSpPr/>
-          <p:nvPr/>
-        </p:nvSpPr>
-        <p:spPr>
-          <a:xfrm>
-            <a:off x="7034276" y="861822"/>
-            <a:ext cx="1079881" cy="457200"/>
-          </a:xfrm>
-          <a:prstGeom prst="rect">
-            <a:avLst/>
-          </a:prstGeom>
-          <a:solidFill>
-            <a:srgbClr val="5B9BD4"/>
-          </a:solidFill>
-          <a:ln w="0">
-            <a:noFill/>
-          </a:ln>
-        </p:spPr>
-        <p:style>
-          <a:lnRef idx="2">
-            <a:schemeClr val="accent1">
-              <a:shade val="50000"/>
-            </a:schemeClr>
-          </a:lnRef>
-          <a:fillRef idx="1">
-            <a:schemeClr val="accent1"/>
-          </a:fillRef>
-          <a:effectRef idx="0">
-            <a:schemeClr val="accent1"/>
-          </a:effectRef>
-          <a:fontRef idx="minor">
-            <a:schemeClr val="lt1"/>
-          </a:fontRef>
-        </p:style>
-        <p:txBody>
-          <a:bodyPr rtlCol="0" anchor="ctr"/>
-          <a:lstStyle>
-            <a:defPPr/>
-          </a:lstStyle>
-          <a:p>
-            <a:endParaRPr lang="en-US"/>
-          </a:p>
-        </p:txBody>
-      </p:sp>
-      <p:sp>
-        <p:nvSpPr>
-          <p:cNvPr id="54" name="New shape"/>
-          <p:cNvSpPr/>
-          <p:nvPr/>
-        </p:nvSpPr>
-        <p:spPr>
-          <a:xfrm>
-            <a:off x="8114156" y="861822"/>
-            <a:ext cx="1079881" cy="457200"/>
-          </a:xfrm>
-          <a:prstGeom prst="rect">
-            <a:avLst/>
-          </a:prstGeom>
-          <a:solidFill>
-            <a:srgbClr val="5B9BD4"/>
-          </a:solidFill>
-          <a:ln w="0">
-            <a:noFill/>
-          </a:ln>
-        </p:spPr>
-        <p:style>
-          <a:lnRef idx="2">
-            <a:schemeClr val="accent1">
-              <a:shade val="50000"/>
-            </a:schemeClr>
-          </a:lnRef>
-          <a:fillRef idx="1">
-            <a:schemeClr val="accent1"/>
-          </a:fillRef>
-          <a:effectRef idx="0">
-            <a:schemeClr val="accent1"/>
-          </a:effectRef>
-          <a:fontRef idx="minor">
-            <a:schemeClr val="lt1"/>
-          </a:fontRef>
-        </p:style>
-        <p:txBody>
-          <a:bodyPr rtlCol="0" anchor="ctr"/>
-          <a:lstStyle>
-            <a:defPPr/>
-          </a:lstStyle>
-          <a:p>
-            <a:endParaRPr lang="en-US"/>
-          </a:p>
-        </p:txBody>
-      </p:sp>
-      <p:sp>
-        <p:nvSpPr>
-          <p:cNvPr id="55" name="New shape"/>
-          <p:cNvSpPr/>
-          <p:nvPr/>
-        </p:nvSpPr>
-        <p:spPr>
-          <a:xfrm>
-            <a:off x="9194037" y="861822"/>
-            <a:ext cx="1079881" cy="457200"/>
-          </a:xfrm>
-          <a:prstGeom prst="rect">
-            <a:avLst/>
-          </a:prstGeom>
-          <a:solidFill>
-            <a:srgbClr val="5B9BD4"/>
-          </a:solidFill>
-          <a:ln w="0">
-            <a:noFill/>
-          </a:ln>
-        </p:spPr>
-        <p:style>
-          <a:lnRef idx="2">
-            <a:schemeClr val="accent1">
-              <a:shade val="50000"/>
-            </a:schemeClr>
-          </a:lnRef>
-          <a:fillRef idx="1">
-            <a:schemeClr val="accent1"/>
-          </a:fillRef>
-          <a:effectRef idx="0">
-            <a:schemeClr val="accent1"/>
-          </a:effectRef>
-          <a:fontRef idx="minor">
-            <a:schemeClr val="lt1"/>
-          </a:fontRef>
-        </p:style>
-        <p:txBody>
-          <a:bodyPr rtlCol="0" anchor="ctr"/>
-          <a:lstStyle>
-            <a:defPPr/>
-          </a:lstStyle>
-          <a:p>
-            <a:endParaRPr lang="en-US"/>
-          </a:p>
-        </p:txBody>
-      </p:sp>
-      <p:sp>
-        <p:nvSpPr>
-          <p:cNvPr id="56" name="New shape"/>
-          <p:cNvSpPr/>
-          <p:nvPr/>
-        </p:nvSpPr>
-        <p:spPr>
-          <a:xfrm>
-            <a:off x="10273919" y="861822"/>
-            <a:ext cx="1079881" cy="457200"/>
-          </a:xfrm>
-          <a:prstGeom prst="rect">
-            <a:avLst/>
-          </a:prstGeom>
-          <a:solidFill>
-            <a:srgbClr val="5B9BD4"/>
-          </a:solidFill>
-          <a:ln w="0">
-            <a:noFill/>
-          </a:ln>
-        </p:spPr>
-        <p:style>
-          <a:lnRef idx="2">
-            <a:schemeClr val="accent1">
-              <a:shade val="50000"/>
-            </a:schemeClr>
-          </a:lnRef>
-          <a:fillRef idx="1">
-            <a:schemeClr val="accent1"/>
-          </a:fillRef>
-          <a:effectRef idx="0">
-            <a:schemeClr val="accent1"/>
-          </a:effectRef>
-          <a:fontRef idx="minor">
-            <a:schemeClr val="lt1"/>
-          </a:fontRef>
-        </p:style>
-        <p:txBody>
-          <a:bodyPr rtlCol="0" anchor="ctr"/>
-          <a:lstStyle>
-            <a:defPPr/>
-          </a:lstStyle>
-          <a:p>
-            <a:endParaRPr lang="en-US"/>
-          </a:p>
-        </p:txBody>
-      </p:sp>
-      <p:sp>
-        <p:nvSpPr>
-          <p:cNvPr id="57" name="New shape"/>
-          <p:cNvSpPr/>
-          <p:nvPr/>
-        </p:nvSpPr>
-        <p:spPr>
-          <a:xfrm>
-            <a:off x="7034276" y="1319022"/>
-            <a:ext cx="1079881" cy="457200"/>
-          </a:xfrm>
-          <a:prstGeom prst="rect">
-            <a:avLst/>
-          </a:prstGeom>
-          <a:solidFill>
-            <a:srgbClr val="D2DEEE"/>
-          </a:solidFill>
-          <a:ln w="0">
-            <a:noFill/>
-          </a:ln>
-        </p:spPr>
-        <p:style>
-          <a:lnRef idx="2">
-            <a:schemeClr val="accent1">
-              <a:shade val="50000"/>
-            </a:schemeClr>
-          </a:lnRef>
-          <a:fillRef idx="1">
-            <a:schemeClr val="accent1"/>
-          </a:fillRef>
-          <a:effectRef idx="0">
-            <a:schemeClr val="accent1"/>
-          </a:effectRef>
-          <a:fontRef idx="minor">
-            <a:schemeClr val="lt1"/>
-          </a:fontRef>
-        </p:style>
-        <p:txBody>
-          <a:bodyPr rtlCol="0" anchor="ctr"/>
-          <a:lstStyle>
-            <a:defPPr/>
-          </a:lstStyle>
-          <a:p>
-            <a:endParaRPr lang="en-US"/>
-          </a:p>
-        </p:txBody>
-      </p:sp>
-      <p:sp>
-        <p:nvSpPr>
-          <p:cNvPr id="58" name="New shape"/>
-          <p:cNvSpPr/>
-          <p:nvPr/>
-        </p:nvSpPr>
-        <p:spPr>
-          <a:xfrm>
-            <a:off x="8114156" y="1319022"/>
-            <a:ext cx="1079881" cy="457200"/>
-          </a:xfrm>
-          <a:prstGeom prst="rect">
-            <a:avLst/>
-          </a:prstGeom>
-          <a:solidFill>
-            <a:srgbClr val="D2DEEE"/>
-          </a:solidFill>
-          <a:ln w="0">
-            <a:noFill/>
-          </a:ln>
-        </p:spPr>
-        <p:style>
-          <a:lnRef idx="2">
-            <a:schemeClr val="accent1">
-              <a:shade val="50000"/>
-            </a:schemeClr>
-          </a:lnRef>
-          <a:fillRef idx="1">
-            <a:schemeClr val="accent1"/>
-          </a:fillRef>
-          <a:effectRef idx="0">
-            <a:schemeClr val="accent1"/>
-          </a:effectRef>
-          <a:fontRef idx="minor">
-            <a:schemeClr val="lt1"/>
-          </a:fontRef>
-        </p:style>
-        <p:txBody>
-          <a:bodyPr rtlCol="0" anchor="ctr"/>
-          <a:lstStyle>
-            <a:defPPr/>
-          </a:lstStyle>
-          <a:p>
-            <a:endParaRPr lang="en-US"/>
-          </a:p>
-        </p:txBody>
-      </p:sp>
-      <p:sp>
-        <p:nvSpPr>
-          <p:cNvPr id="59" name="New shape"/>
-          <p:cNvSpPr/>
-          <p:nvPr/>
-        </p:nvSpPr>
-        <p:spPr>
-          <a:xfrm>
-            <a:off x="9194037" y="1319022"/>
-            <a:ext cx="1079881" cy="457200"/>
-          </a:xfrm>
-          <a:prstGeom prst="rect">
-            <a:avLst/>
-          </a:prstGeom>
-          <a:solidFill>
-            <a:srgbClr val="D2DEEE"/>
-          </a:solidFill>
-          <a:ln w="0">
-            <a:noFill/>
-          </a:ln>
-        </p:spPr>
-        <p:style>
-          <a:lnRef idx="2">
-            <a:schemeClr val="accent1">
-              <a:shade val="50000"/>
-            </a:schemeClr>
-          </a:lnRef>
-          <a:fillRef idx="1">
-            <a:schemeClr val="accent1"/>
-          </a:fillRef>
-          <a:effectRef idx="0">
-            <a:schemeClr val="accent1"/>
-          </a:effectRef>
-          <a:fontRef idx="minor">
-            <a:schemeClr val="lt1"/>
-          </a:fontRef>
-        </p:style>
-        <p:txBody>
-          <a:bodyPr rtlCol="0" anchor="ctr"/>
-          <a:lstStyle>
-            <a:defPPr/>
-          </a:lstStyle>
-          <a:p>
-            <a:endParaRPr lang="en-US"/>
-          </a:p>
-        </p:txBody>
-      </p:sp>
-      <p:sp>
-        <p:nvSpPr>
-          <p:cNvPr id="60" name="New shape"/>
-          <p:cNvSpPr/>
-          <p:nvPr/>
-        </p:nvSpPr>
-        <p:spPr>
-          <a:xfrm>
-            <a:off x="10273919" y="1319022"/>
-            <a:ext cx="1079881" cy="457200"/>
-          </a:xfrm>
-          <a:prstGeom prst="rect">
-            <a:avLst/>
-          </a:prstGeom>
-          <a:solidFill>
-            <a:srgbClr val="D2DEEE"/>
-          </a:solidFill>
-          <a:ln w="0">
-            <a:noFill/>
-          </a:ln>
-        </p:spPr>
-        <p:style>
-          <a:lnRef idx="2">
-            <a:schemeClr val="accent1">
-              <a:shade val="50000"/>
-            </a:schemeClr>
-          </a:lnRef>
-          <a:fillRef idx="1">
-            <a:schemeClr val="accent1"/>
-          </a:fillRef>
-          <a:effectRef idx="0">
-            <a:schemeClr val="accent1"/>
-          </a:effectRef>
-          <a:fontRef idx="minor">
-            <a:schemeClr val="lt1"/>
-          </a:fontRef>
-        </p:style>
-        <p:txBody>
-          <a:bodyPr rtlCol="0" anchor="ctr"/>
-          <a:lstStyle>
-            <a:defPPr/>
-          </a:lstStyle>
-          <a:p>
-            <a:endParaRPr lang="en-US"/>
-          </a:p>
-        </p:txBody>
-      </p:sp>
-      <p:sp>
-        <p:nvSpPr>
-          <p:cNvPr id="61" name="New shape"/>
-          <p:cNvSpPr/>
-          <p:nvPr/>
-        </p:nvSpPr>
-        <p:spPr>
-          <a:xfrm>
-            <a:off x="8114157" y="855472"/>
-            <a:ext cx="0" cy="927100"/>
-          </a:xfrm>
-          <a:prstGeom prst="line">
-            <a:avLst/>
-          </a:prstGeom>
-          <a:ln w="12700">
-            <a:solidFill>
-              <a:srgbClr val="FFFFFF"/>
-            </a:solidFill>
-          </a:ln>
-        </p:spPr>
-        <p:style>
-          <a:lnRef idx="1">
-            <a:schemeClr val="accent1"/>
-          </a:lnRef>
-          <a:fillRef idx="0">
-            <a:schemeClr val="accent1"/>
-          </a:fillRef>
-          <a:effectRef idx="0">
-            <a:schemeClr val="accent1"/>
-          </a:effectRef>
-          <a:fontRef idx="minor">
-            <a:schemeClr val="tx1"/>
-          </a:fontRef>
-        </p:style>
-        <p:txBody>
-          <a:bodyPr rtlCol="0" anchor="ctr"/>
-          <a:lstStyle>
-            <a:defPPr/>
-          </a:lstStyle>
-          <a:p>
-            <a:endParaRPr lang="en-US"/>
-          </a:p>
-        </p:txBody>
-      </p:sp>
-      <p:sp>
-        <p:nvSpPr>
-          <p:cNvPr id="62" name="New shape"/>
-          <p:cNvSpPr/>
-          <p:nvPr/>
-        </p:nvSpPr>
-        <p:spPr>
-          <a:xfrm>
-            <a:off x="9194038" y="855472"/>
-            <a:ext cx="0" cy="927100"/>
-          </a:xfrm>
-          <a:prstGeom prst="line">
-            <a:avLst/>
-          </a:prstGeom>
-          <a:ln w="12700">
-            <a:solidFill>
-              <a:srgbClr val="FFFFFF"/>
-            </a:solidFill>
-          </a:ln>
-        </p:spPr>
-        <p:style>
-          <a:lnRef idx="1">
-            <a:schemeClr val="accent1"/>
-          </a:lnRef>
-          <a:fillRef idx="0">
-            <a:schemeClr val="accent1"/>
-          </a:fillRef>
-          <a:effectRef idx="0">
-            <a:schemeClr val="accent1"/>
-          </a:effectRef>
-          <a:fontRef idx="minor">
-            <a:schemeClr val="tx1"/>
-          </a:fontRef>
-        </p:style>
-        <p:txBody>
-          <a:bodyPr rtlCol="0" anchor="ctr"/>
-          <a:lstStyle>
-            <a:defPPr/>
-          </a:lstStyle>
-          <a:p>
-            <a:endParaRPr lang="en-US"/>
-          </a:p>
-        </p:txBody>
-      </p:sp>
-      <p:sp>
-        <p:nvSpPr>
-          <p:cNvPr id="63" name="New shape"/>
-          <p:cNvSpPr/>
-          <p:nvPr/>
-        </p:nvSpPr>
-        <p:spPr>
-          <a:xfrm>
-            <a:off x="10273919" y="855472"/>
-            <a:ext cx="0" cy="927100"/>
-          </a:xfrm>
-          <a:prstGeom prst="line">
-            <a:avLst/>
-          </a:prstGeom>
-          <a:ln w="12700">
-            <a:solidFill>
-              <a:srgbClr val="FFFFFF"/>
-            </a:solidFill>
-          </a:ln>
-        </p:spPr>
-        <p:style>
-          <a:lnRef idx="1">
-            <a:schemeClr val="accent1"/>
-          </a:lnRef>
-          <a:fillRef idx="0">
-            <a:schemeClr val="accent1"/>
-          </a:fillRef>
-          <a:effectRef idx="0">
-            <a:schemeClr val="accent1"/>
-          </a:effectRef>
-          <a:fontRef idx="minor">
-            <a:schemeClr val="tx1"/>
-          </a:fontRef>
-        </p:style>
-        <p:txBody>
-          <a:bodyPr rtlCol="0" anchor="ctr"/>
-          <a:lstStyle>
-            <a:defPPr/>
-          </a:lstStyle>
-          <a:p>
-            <a:endParaRPr lang="en-US"/>
-          </a:p>
-        </p:txBody>
-      </p:sp>
-      <p:sp>
-        <p:nvSpPr>
-          <p:cNvPr id="64" name="New shape"/>
-          <p:cNvSpPr/>
-          <p:nvPr/>
-        </p:nvSpPr>
-        <p:spPr>
-          <a:xfrm>
-            <a:off x="7027926" y="1319022"/>
-            <a:ext cx="4332224" cy="0"/>
-          </a:xfrm>
-          <a:prstGeom prst="line">
-            <a:avLst/>
-          </a:prstGeom>
-          <a:ln w="38100">
-            <a:solidFill>
-              <a:srgbClr val="FFFFFF"/>
-            </a:solidFill>
-          </a:ln>
-        </p:spPr>
-        <p:style>
-          <a:lnRef idx="1">
-            <a:schemeClr val="accent1"/>
-          </a:lnRef>
-          <a:fillRef idx="0">
-            <a:schemeClr val="accent1"/>
-          </a:fillRef>
-          <a:effectRef idx="0">
-            <a:schemeClr val="accent1"/>
-          </a:effectRef>
-          <a:fontRef idx="minor">
-            <a:schemeClr val="tx1"/>
-          </a:fontRef>
-        </p:style>
-        <p:txBody>
-          <a:bodyPr rtlCol="0" anchor="ctr"/>
-          <a:lstStyle>
-            <a:defPPr/>
-          </a:lstStyle>
-          <a:p>
-            <a:endParaRPr lang="en-US"/>
-          </a:p>
-        </p:txBody>
-      </p:sp>
-      <p:sp>
-        <p:nvSpPr>
-          <p:cNvPr id="65" name="New shape"/>
-          <p:cNvSpPr/>
-          <p:nvPr/>
-        </p:nvSpPr>
-        <p:spPr>
-          <a:xfrm>
-            <a:off x="7034276" y="855472"/>
-            <a:ext cx="0" cy="927100"/>
-          </a:xfrm>
-          <a:prstGeom prst="line">
-            <a:avLst/>
-          </a:prstGeom>
-          <a:ln w="12700">
-            <a:solidFill>
-              <a:srgbClr val="FFFFFF"/>
-            </a:solidFill>
-          </a:ln>
-        </p:spPr>
-        <p:style>
-          <a:lnRef idx="1">
-            <a:schemeClr val="accent1"/>
-          </a:lnRef>
-          <a:fillRef idx="0">
-            <a:schemeClr val="accent1"/>
-          </a:fillRef>
-          <a:effectRef idx="0">
-            <a:schemeClr val="accent1"/>
-          </a:effectRef>
-          <a:fontRef idx="minor">
-            <a:schemeClr val="tx1"/>
-          </a:fontRef>
-        </p:style>
-        <p:txBody>
-          <a:bodyPr rtlCol="0" anchor="ctr"/>
-          <a:lstStyle>
-            <a:defPPr/>
-          </a:lstStyle>
-          <a:p>
-            <a:endParaRPr lang="en-US"/>
-          </a:p>
-        </p:txBody>
-      </p:sp>
-      <p:sp>
-        <p:nvSpPr>
-          <p:cNvPr id="66" name="New shape"/>
-          <p:cNvSpPr/>
-          <p:nvPr/>
-        </p:nvSpPr>
-        <p:spPr>
-          <a:xfrm>
-            <a:off x="11353800" y="855472"/>
-            <a:ext cx="0" cy="927100"/>
-          </a:xfrm>
-          <a:prstGeom prst="line">
-            <a:avLst/>
-          </a:prstGeom>
-          <a:ln w="12700">
-            <a:solidFill>
-              <a:srgbClr val="FFFFFF"/>
-            </a:solidFill>
-          </a:ln>
-        </p:spPr>
-        <p:style>
-          <a:lnRef idx="1">
-            <a:schemeClr val="accent1"/>
-          </a:lnRef>
-          <a:fillRef idx="0">
-            <a:schemeClr val="accent1"/>
-          </a:fillRef>
-          <a:effectRef idx="0">
-            <a:schemeClr val="accent1"/>
-          </a:effectRef>
-          <a:fontRef idx="minor">
-            <a:schemeClr val="tx1"/>
-          </a:fontRef>
-        </p:style>
-        <p:txBody>
-          <a:bodyPr rtlCol="0" anchor="ctr"/>
-          <a:lstStyle>
-            <a:defPPr/>
-          </a:lstStyle>
-          <a:p>
-            <a:endParaRPr lang="en-US"/>
-          </a:p>
-        </p:txBody>
-      </p:sp>
-      <p:sp>
-        <p:nvSpPr>
-          <p:cNvPr id="67" name="New shape"/>
-          <p:cNvSpPr/>
-          <p:nvPr/>
-        </p:nvSpPr>
-        <p:spPr>
-          <a:xfrm>
-            <a:off x="7027926" y="861822"/>
-            <a:ext cx="4332224" cy="0"/>
-          </a:xfrm>
-          <a:prstGeom prst="line">
-            <a:avLst/>
-          </a:prstGeom>
-          <a:ln w="12700">
-            <a:solidFill>
-              <a:srgbClr val="FFFFFF"/>
-            </a:solidFill>
-          </a:ln>
-        </p:spPr>
-        <p:style>
-          <a:lnRef idx="1">
-            <a:schemeClr val="accent1"/>
-          </a:lnRef>
-          <a:fillRef idx="0">
-            <a:schemeClr val="accent1"/>
-          </a:fillRef>
-          <a:effectRef idx="0">
-            <a:schemeClr val="accent1"/>
-          </a:effectRef>
-          <a:fontRef idx="minor">
-            <a:schemeClr val="tx1"/>
-          </a:fontRef>
-        </p:style>
-        <p:txBody>
-          <a:bodyPr rtlCol="0" anchor="ctr"/>
-          <a:lstStyle>
-            <a:defPPr/>
-          </a:lstStyle>
-          <a:p>
-            <a:endParaRPr lang="en-US"/>
-          </a:p>
-        </p:txBody>
-      </p:sp>
-      <p:sp>
-        <p:nvSpPr>
-          <p:cNvPr id="68" name="New shape"/>
-          <p:cNvSpPr/>
-          <p:nvPr/>
-        </p:nvSpPr>
-        <p:spPr>
-          <a:xfrm>
-            <a:off x="7027926" y="1776222"/>
-            <a:ext cx="4332224" cy="0"/>
-          </a:xfrm>
-          <a:prstGeom prst="line">
-            <a:avLst/>
-          </a:prstGeom>
-          <a:ln w="12700">
-            <a:solidFill>
-              <a:srgbClr val="FFFFFF"/>
-            </a:solidFill>
-          </a:ln>
-        </p:spPr>
-        <p:style>
-          <a:lnRef idx="1">
-            <a:schemeClr val="accent1"/>
-          </a:lnRef>
-          <a:fillRef idx="0">
-            <a:schemeClr val="accent1"/>
-          </a:fillRef>
-          <a:effectRef idx="0">
-            <a:schemeClr val="accent1"/>
-          </a:effectRef>
-          <a:fontRef idx="minor">
-            <a:schemeClr val="tx1"/>
           </a:fontRef>
         </p:style>
         <p:txBody>
@@ -20490,8 +19547,8 @@
         </p:nvSpPr>
         <p:spPr>
           <a:xfrm>
-            <a:off x="1085393" y="2235480"/>
-            <a:ext cx="8249421" cy="496714"/>
+            <a:off x="1085393" y="2214212"/>
+            <a:ext cx="10345140" cy="539250"/>
           </a:xfrm>
           <a:prstGeom prst="rect">
             <a:avLst/>
@@ -20523,13 +19580,13 @@
           </a:lstStyle>
           <a:p>
             <a:r>
-              <a:rPr lang="en-US" sz="3204" b="1">
+              <a:rPr lang="en-US" sz="3204" b="1" dirty="0">
                 <a:solidFill>
                   <a:srgbClr val="FFFFFF"/>
                 </a:solidFill>
                 <a:latin typeface="Calibri"/>
               </a:rPr>
-              <a:t>67  8  910 11 14 15 17 19 22 23 25 28 30</a:t>
+              <a:t>6      7     8     9     10   11   14   15    17  19    22   23   25   28   30</a:t>
             </a:r>
           </a:p>
         </p:txBody>
@@ -21732,14 +20789,844 @@
       </p:sp>
       <p:sp>
         <p:nvSpPr>
-          <p:cNvPr id="94" name="New shape"/>
-          <p:cNvSpPr/>
-          <p:nvPr/>
-        </p:nvSpPr>
-        <p:spPr>
-          <a:xfrm>
-            <a:off x="7182866" y="932589"/>
-            <a:ext cx="1735782" cy="372070"/>
+          <p:cNvPr id="114" name="New shape">
+            <a:extLst>
+              <a:ext uri="{FF2B5EF4-FFF2-40B4-BE49-F238E27FC236}">
+                <a16:creationId xmlns:a16="http://schemas.microsoft.com/office/drawing/2014/main" id="{6600F8B7-49A8-C174-F547-1321D8E49ABF}"/>
+              </a:ext>
+            </a:extLst>
+          </p:cNvPr>
+          <p:cNvSpPr/>
+          <p:nvPr/>
+        </p:nvSpPr>
+        <p:spPr>
+          <a:xfrm>
+            <a:off x="7034276" y="861822"/>
+            <a:ext cx="1079881" cy="457200"/>
+          </a:xfrm>
+          <a:prstGeom prst="rect">
+            <a:avLst/>
+          </a:prstGeom>
+          <a:solidFill>
+            <a:srgbClr val="5B9BD4"/>
+          </a:solidFill>
+          <a:ln w="0">
+            <a:noFill/>
+          </a:ln>
+        </p:spPr>
+        <p:style>
+          <a:lnRef idx="2">
+            <a:schemeClr val="accent1">
+              <a:shade val="50000"/>
+            </a:schemeClr>
+          </a:lnRef>
+          <a:fillRef idx="1">
+            <a:schemeClr val="accent1"/>
+          </a:fillRef>
+          <a:effectRef idx="0">
+            <a:schemeClr val="accent1"/>
+          </a:effectRef>
+          <a:fontRef idx="minor">
+            <a:schemeClr val="lt1"/>
+          </a:fontRef>
+        </p:style>
+        <p:txBody>
+          <a:bodyPr rtlCol="0" anchor="ctr"/>
+          <a:lstStyle>
+            <a:defPPr/>
+          </a:lstStyle>
+          <a:p>
+            <a:endParaRPr lang="en-US"/>
+          </a:p>
+        </p:txBody>
+      </p:sp>
+      <p:sp>
+        <p:nvSpPr>
+          <p:cNvPr id="115" name="New shape">
+            <a:extLst>
+              <a:ext uri="{FF2B5EF4-FFF2-40B4-BE49-F238E27FC236}">
+                <a16:creationId xmlns:a16="http://schemas.microsoft.com/office/drawing/2014/main" id="{015F7BAF-643C-A3A9-29E3-736A3AF9E88D}"/>
+              </a:ext>
+            </a:extLst>
+          </p:cNvPr>
+          <p:cNvSpPr/>
+          <p:nvPr/>
+        </p:nvSpPr>
+        <p:spPr>
+          <a:xfrm>
+            <a:off x="8114156" y="861822"/>
+            <a:ext cx="1079881" cy="457200"/>
+          </a:xfrm>
+          <a:prstGeom prst="rect">
+            <a:avLst/>
+          </a:prstGeom>
+          <a:solidFill>
+            <a:srgbClr val="5B9BD4"/>
+          </a:solidFill>
+          <a:ln w="0">
+            <a:noFill/>
+          </a:ln>
+        </p:spPr>
+        <p:style>
+          <a:lnRef idx="2">
+            <a:schemeClr val="accent1">
+              <a:shade val="50000"/>
+            </a:schemeClr>
+          </a:lnRef>
+          <a:fillRef idx="1">
+            <a:schemeClr val="accent1"/>
+          </a:fillRef>
+          <a:effectRef idx="0">
+            <a:schemeClr val="accent1"/>
+          </a:effectRef>
+          <a:fontRef idx="minor">
+            <a:schemeClr val="lt1"/>
+          </a:fontRef>
+        </p:style>
+        <p:txBody>
+          <a:bodyPr rtlCol="0" anchor="ctr"/>
+          <a:lstStyle>
+            <a:defPPr/>
+          </a:lstStyle>
+          <a:p>
+            <a:endParaRPr lang="en-US"/>
+          </a:p>
+        </p:txBody>
+      </p:sp>
+      <p:sp>
+        <p:nvSpPr>
+          <p:cNvPr id="116" name="New shape">
+            <a:extLst>
+              <a:ext uri="{FF2B5EF4-FFF2-40B4-BE49-F238E27FC236}">
+                <a16:creationId xmlns:a16="http://schemas.microsoft.com/office/drawing/2014/main" id="{603D6666-4DD3-1D82-FC6C-51CBF747ED05}"/>
+              </a:ext>
+            </a:extLst>
+          </p:cNvPr>
+          <p:cNvSpPr/>
+          <p:nvPr/>
+        </p:nvSpPr>
+        <p:spPr>
+          <a:xfrm>
+            <a:off x="9194037" y="861822"/>
+            <a:ext cx="1079881" cy="457200"/>
+          </a:xfrm>
+          <a:prstGeom prst="rect">
+            <a:avLst/>
+          </a:prstGeom>
+          <a:solidFill>
+            <a:srgbClr val="5B9BD4"/>
+          </a:solidFill>
+          <a:ln w="0">
+            <a:noFill/>
+          </a:ln>
+        </p:spPr>
+        <p:style>
+          <a:lnRef idx="2">
+            <a:schemeClr val="accent1">
+              <a:shade val="50000"/>
+            </a:schemeClr>
+          </a:lnRef>
+          <a:fillRef idx="1">
+            <a:schemeClr val="accent1"/>
+          </a:fillRef>
+          <a:effectRef idx="0">
+            <a:schemeClr val="accent1"/>
+          </a:effectRef>
+          <a:fontRef idx="minor">
+            <a:schemeClr val="lt1"/>
+          </a:fontRef>
+        </p:style>
+        <p:txBody>
+          <a:bodyPr rtlCol="0" anchor="ctr"/>
+          <a:lstStyle>
+            <a:defPPr/>
+          </a:lstStyle>
+          <a:p>
+            <a:endParaRPr lang="en-US"/>
+          </a:p>
+        </p:txBody>
+      </p:sp>
+      <p:sp>
+        <p:nvSpPr>
+          <p:cNvPr id="117" name="New shape">
+            <a:extLst>
+              <a:ext uri="{FF2B5EF4-FFF2-40B4-BE49-F238E27FC236}">
+                <a16:creationId xmlns:a16="http://schemas.microsoft.com/office/drawing/2014/main" id="{88BB3964-31D8-DF29-3911-741C5ECD5000}"/>
+              </a:ext>
+            </a:extLst>
+          </p:cNvPr>
+          <p:cNvSpPr/>
+          <p:nvPr/>
+        </p:nvSpPr>
+        <p:spPr>
+          <a:xfrm>
+            <a:off x="10273919" y="861822"/>
+            <a:ext cx="1079881" cy="457200"/>
+          </a:xfrm>
+          <a:prstGeom prst="rect">
+            <a:avLst/>
+          </a:prstGeom>
+          <a:solidFill>
+            <a:srgbClr val="5B9BD4"/>
+          </a:solidFill>
+          <a:ln w="0">
+            <a:noFill/>
+          </a:ln>
+        </p:spPr>
+        <p:style>
+          <a:lnRef idx="2">
+            <a:schemeClr val="accent1">
+              <a:shade val="50000"/>
+            </a:schemeClr>
+          </a:lnRef>
+          <a:fillRef idx="1">
+            <a:schemeClr val="accent1"/>
+          </a:fillRef>
+          <a:effectRef idx="0">
+            <a:schemeClr val="accent1"/>
+          </a:effectRef>
+          <a:fontRef idx="minor">
+            <a:schemeClr val="lt1"/>
+          </a:fontRef>
+        </p:style>
+        <p:txBody>
+          <a:bodyPr rtlCol="0" anchor="ctr"/>
+          <a:lstStyle>
+            <a:defPPr/>
+          </a:lstStyle>
+          <a:p>
+            <a:endParaRPr lang="en-US"/>
+          </a:p>
+        </p:txBody>
+      </p:sp>
+      <p:sp>
+        <p:nvSpPr>
+          <p:cNvPr id="118" name="New shape">
+            <a:extLst>
+              <a:ext uri="{FF2B5EF4-FFF2-40B4-BE49-F238E27FC236}">
+                <a16:creationId xmlns:a16="http://schemas.microsoft.com/office/drawing/2014/main" id="{9FE5F409-9F24-BBC0-CFD6-CEAF0E8B373B}"/>
+              </a:ext>
+            </a:extLst>
+          </p:cNvPr>
+          <p:cNvSpPr/>
+          <p:nvPr/>
+        </p:nvSpPr>
+        <p:spPr>
+          <a:xfrm>
+            <a:off x="7034276" y="1319022"/>
+            <a:ext cx="1079881" cy="457200"/>
+          </a:xfrm>
+          <a:prstGeom prst="rect">
+            <a:avLst/>
+          </a:prstGeom>
+          <a:solidFill>
+            <a:srgbClr val="D2DEEE"/>
+          </a:solidFill>
+          <a:ln w="0">
+            <a:noFill/>
+          </a:ln>
+        </p:spPr>
+        <p:style>
+          <a:lnRef idx="2">
+            <a:schemeClr val="accent1">
+              <a:shade val="50000"/>
+            </a:schemeClr>
+          </a:lnRef>
+          <a:fillRef idx="1">
+            <a:schemeClr val="accent1"/>
+          </a:fillRef>
+          <a:effectRef idx="0">
+            <a:schemeClr val="accent1"/>
+          </a:effectRef>
+          <a:fontRef idx="minor">
+            <a:schemeClr val="lt1"/>
+          </a:fontRef>
+        </p:style>
+        <p:txBody>
+          <a:bodyPr rtlCol="0" anchor="ctr"/>
+          <a:lstStyle>
+            <a:defPPr/>
+          </a:lstStyle>
+          <a:p>
+            <a:endParaRPr lang="en-US"/>
+          </a:p>
+        </p:txBody>
+      </p:sp>
+      <p:sp>
+        <p:nvSpPr>
+          <p:cNvPr id="119" name="New shape">
+            <a:extLst>
+              <a:ext uri="{FF2B5EF4-FFF2-40B4-BE49-F238E27FC236}">
+                <a16:creationId xmlns:a16="http://schemas.microsoft.com/office/drawing/2014/main" id="{BF9C61BE-12C5-58F4-D714-CD2C8517B0E7}"/>
+              </a:ext>
+            </a:extLst>
+          </p:cNvPr>
+          <p:cNvSpPr/>
+          <p:nvPr/>
+        </p:nvSpPr>
+        <p:spPr>
+          <a:xfrm>
+            <a:off x="8114156" y="1319022"/>
+            <a:ext cx="1079881" cy="457200"/>
+          </a:xfrm>
+          <a:prstGeom prst="rect">
+            <a:avLst/>
+          </a:prstGeom>
+          <a:solidFill>
+            <a:srgbClr val="D2DEEE"/>
+          </a:solidFill>
+          <a:ln w="0">
+            <a:noFill/>
+          </a:ln>
+        </p:spPr>
+        <p:style>
+          <a:lnRef idx="2">
+            <a:schemeClr val="accent1">
+              <a:shade val="50000"/>
+            </a:schemeClr>
+          </a:lnRef>
+          <a:fillRef idx="1">
+            <a:schemeClr val="accent1"/>
+          </a:fillRef>
+          <a:effectRef idx="0">
+            <a:schemeClr val="accent1"/>
+          </a:effectRef>
+          <a:fontRef idx="minor">
+            <a:schemeClr val="lt1"/>
+          </a:fontRef>
+        </p:style>
+        <p:txBody>
+          <a:bodyPr rtlCol="0" anchor="ctr"/>
+          <a:lstStyle>
+            <a:defPPr/>
+          </a:lstStyle>
+          <a:p>
+            <a:endParaRPr lang="en-US"/>
+          </a:p>
+        </p:txBody>
+      </p:sp>
+      <p:sp>
+        <p:nvSpPr>
+          <p:cNvPr id="120" name="New shape">
+            <a:extLst>
+              <a:ext uri="{FF2B5EF4-FFF2-40B4-BE49-F238E27FC236}">
+                <a16:creationId xmlns:a16="http://schemas.microsoft.com/office/drawing/2014/main" id="{15B5C5D3-19CA-5FA9-26DB-C209BD8C668F}"/>
+              </a:ext>
+            </a:extLst>
+          </p:cNvPr>
+          <p:cNvSpPr/>
+          <p:nvPr/>
+        </p:nvSpPr>
+        <p:spPr>
+          <a:xfrm>
+            <a:off x="9194037" y="1319022"/>
+            <a:ext cx="1079881" cy="457200"/>
+          </a:xfrm>
+          <a:prstGeom prst="rect">
+            <a:avLst/>
+          </a:prstGeom>
+          <a:solidFill>
+            <a:srgbClr val="D2DEEE"/>
+          </a:solidFill>
+          <a:ln w="0">
+            <a:noFill/>
+          </a:ln>
+        </p:spPr>
+        <p:style>
+          <a:lnRef idx="2">
+            <a:schemeClr val="accent1">
+              <a:shade val="50000"/>
+            </a:schemeClr>
+          </a:lnRef>
+          <a:fillRef idx="1">
+            <a:schemeClr val="accent1"/>
+          </a:fillRef>
+          <a:effectRef idx="0">
+            <a:schemeClr val="accent1"/>
+          </a:effectRef>
+          <a:fontRef idx="minor">
+            <a:schemeClr val="lt1"/>
+          </a:fontRef>
+        </p:style>
+        <p:txBody>
+          <a:bodyPr rtlCol="0" anchor="ctr"/>
+          <a:lstStyle>
+            <a:defPPr/>
+          </a:lstStyle>
+          <a:p>
+            <a:endParaRPr lang="en-US"/>
+          </a:p>
+        </p:txBody>
+      </p:sp>
+      <p:sp>
+        <p:nvSpPr>
+          <p:cNvPr id="121" name="New shape">
+            <a:extLst>
+              <a:ext uri="{FF2B5EF4-FFF2-40B4-BE49-F238E27FC236}">
+                <a16:creationId xmlns:a16="http://schemas.microsoft.com/office/drawing/2014/main" id="{47B84421-665A-BC53-5EA7-FD0A8F58FC8F}"/>
+              </a:ext>
+            </a:extLst>
+          </p:cNvPr>
+          <p:cNvSpPr/>
+          <p:nvPr/>
+        </p:nvSpPr>
+        <p:spPr>
+          <a:xfrm>
+            <a:off x="10273919" y="1319022"/>
+            <a:ext cx="1079881" cy="457200"/>
+          </a:xfrm>
+          <a:prstGeom prst="rect">
+            <a:avLst/>
+          </a:prstGeom>
+          <a:solidFill>
+            <a:srgbClr val="D2DEEE"/>
+          </a:solidFill>
+          <a:ln w="0">
+            <a:noFill/>
+          </a:ln>
+        </p:spPr>
+        <p:style>
+          <a:lnRef idx="2">
+            <a:schemeClr val="accent1">
+              <a:shade val="50000"/>
+            </a:schemeClr>
+          </a:lnRef>
+          <a:fillRef idx="1">
+            <a:schemeClr val="accent1"/>
+          </a:fillRef>
+          <a:effectRef idx="0">
+            <a:schemeClr val="accent1"/>
+          </a:effectRef>
+          <a:fontRef idx="minor">
+            <a:schemeClr val="lt1"/>
+          </a:fontRef>
+        </p:style>
+        <p:txBody>
+          <a:bodyPr rtlCol="0" anchor="ctr"/>
+          <a:lstStyle>
+            <a:defPPr/>
+          </a:lstStyle>
+          <a:p>
+            <a:endParaRPr lang="en-US"/>
+          </a:p>
+        </p:txBody>
+      </p:sp>
+      <p:sp>
+        <p:nvSpPr>
+          <p:cNvPr id="122" name="New shape">
+            <a:extLst>
+              <a:ext uri="{FF2B5EF4-FFF2-40B4-BE49-F238E27FC236}">
+                <a16:creationId xmlns:a16="http://schemas.microsoft.com/office/drawing/2014/main" id="{FCF5A4AB-73CA-4A41-77EE-1FAAD8E4E2D8}"/>
+              </a:ext>
+            </a:extLst>
+          </p:cNvPr>
+          <p:cNvSpPr/>
+          <p:nvPr/>
+        </p:nvSpPr>
+        <p:spPr>
+          <a:xfrm>
+            <a:off x="8114157" y="855472"/>
+            <a:ext cx="0" cy="927100"/>
+          </a:xfrm>
+          <a:prstGeom prst="line">
+            <a:avLst/>
+          </a:prstGeom>
+          <a:ln w="12700">
+            <a:solidFill>
+              <a:srgbClr val="FFFFFF"/>
+            </a:solidFill>
+          </a:ln>
+        </p:spPr>
+        <p:style>
+          <a:lnRef idx="1">
+            <a:schemeClr val="accent1"/>
+          </a:lnRef>
+          <a:fillRef idx="0">
+            <a:schemeClr val="accent1"/>
+          </a:fillRef>
+          <a:effectRef idx="0">
+            <a:schemeClr val="accent1"/>
+          </a:effectRef>
+          <a:fontRef idx="minor">
+            <a:schemeClr val="tx1"/>
+          </a:fontRef>
+        </p:style>
+        <p:txBody>
+          <a:bodyPr rtlCol="0" anchor="ctr"/>
+          <a:lstStyle>
+            <a:defPPr/>
+          </a:lstStyle>
+          <a:p>
+            <a:endParaRPr lang="en-US"/>
+          </a:p>
+        </p:txBody>
+      </p:sp>
+      <p:sp>
+        <p:nvSpPr>
+          <p:cNvPr id="123" name="New shape">
+            <a:extLst>
+              <a:ext uri="{FF2B5EF4-FFF2-40B4-BE49-F238E27FC236}">
+                <a16:creationId xmlns:a16="http://schemas.microsoft.com/office/drawing/2014/main" id="{3BB8C8DA-E048-461C-110F-F431F8AFA401}"/>
+              </a:ext>
+            </a:extLst>
+          </p:cNvPr>
+          <p:cNvSpPr/>
+          <p:nvPr/>
+        </p:nvSpPr>
+        <p:spPr>
+          <a:xfrm>
+            <a:off x="9194038" y="855472"/>
+            <a:ext cx="0" cy="927100"/>
+          </a:xfrm>
+          <a:prstGeom prst="line">
+            <a:avLst/>
+          </a:prstGeom>
+          <a:ln w="12700">
+            <a:solidFill>
+              <a:srgbClr val="FFFFFF"/>
+            </a:solidFill>
+          </a:ln>
+        </p:spPr>
+        <p:style>
+          <a:lnRef idx="1">
+            <a:schemeClr val="accent1"/>
+          </a:lnRef>
+          <a:fillRef idx="0">
+            <a:schemeClr val="accent1"/>
+          </a:fillRef>
+          <a:effectRef idx="0">
+            <a:schemeClr val="accent1"/>
+          </a:effectRef>
+          <a:fontRef idx="minor">
+            <a:schemeClr val="tx1"/>
+          </a:fontRef>
+        </p:style>
+        <p:txBody>
+          <a:bodyPr rtlCol="0" anchor="ctr"/>
+          <a:lstStyle>
+            <a:defPPr/>
+          </a:lstStyle>
+          <a:p>
+            <a:endParaRPr lang="en-US"/>
+          </a:p>
+        </p:txBody>
+      </p:sp>
+      <p:sp>
+        <p:nvSpPr>
+          <p:cNvPr id="124" name="New shape">
+            <a:extLst>
+              <a:ext uri="{FF2B5EF4-FFF2-40B4-BE49-F238E27FC236}">
+                <a16:creationId xmlns:a16="http://schemas.microsoft.com/office/drawing/2014/main" id="{3AA05137-CDCE-B7B6-F95B-65D87C0D3522}"/>
+              </a:ext>
+            </a:extLst>
+          </p:cNvPr>
+          <p:cNvSpPr/>
+          <p:nvPr/>
+        </p:nvSpPr>
+        <p:spPr>
+          <a:xfrm>
+            <a:off x="10273919" y="855472"/>
+            <a:ext cx="0" cy="927100"/>
+          </a:xfrm>
+          <a:prstGeom prst="line">
+            <a:avLst/>
+          </a:prstGeom>
+          <a:ln w="12700">
+            <a:solidFill>
+              <a:srgbClr val="FFFFFF"/>
+            </a:solidFill>
+          </a:ln>
+        </p:spPr>
+        <p:style>
+          <a:lnRef idx="1">
+            <a:schemeClr val="accent1"/>
+          </a:lnRef>
+          <a:fillRef idx="0">
+            <a:schemeClr val="accent1"/>
+          </a:fillRef>
+          <a:effectRef idx="0">
+            <a:schemeClr val="accent1"/>
+          </a:effectRef>
+          <a:fontRef idx="minor">
+            <a:schemeClr val="tx1"/>
+          </a:fontRef>
+        </p:style>
+        <p:txBody>
+          <a:bodyPr rtlCol="0" anchor="ctr"/>
+          <a:lstStyle>
+            <a:defPPr/>
+          </a:lstStyle>
+          <a:p>
+            <a:endParaRPr lang="en-US"/>
+          </a:p>
+        </p:txBody>
+      </p:sp>
+      <p:sp>
+        <p:nvSpPr>
+          <p:cNvPr id="125" name="New shape">
+            <a:extLst>
+              <a:ext uri="{FF2B5EF4-FFF2-40B4-BE49-F238E27FC236}">
+                <a16:creationId xmlns:a16="http://schemas.microsoft.com/office/drawing/2014/main" id="{A1CFCB41-8F36-064D-54D4-3091987B3EA5}"/>
+              </a:ext>
+            </a:extLst>
+          </p:cNvPr>
+          <p:cNvSpPr/>
+          <p:nvPr/>
+        </p:nvSpPr>
+        <p:spPr>
+          <a:xfrm>
+            <a:off x="7027926" y="1319022"/>
+            <a:ext cx="4332224" cy="0"/>
+          </a:xfrm>
+          <a:prstGeom prst="line">
+            <a:avLst/>
+          </a:prstGeom>
+          <a:ln w="38100">
+            <a:solidFill>
+              <a:srgbClr val="FFFFFF"/>
+            </a:solidFill>
+          </a:ln>
+        </p:spPr>
+        <p:style>
+          <a:lnRef idx="1">
+            <a:schemeClr val="accent1"/>
+          </a:lnRef>
+          <a:fillRef idx="0">
+            <a:schemeClr val="accent1"/>
+          </a:fillRef>
+          <a:effectRef idx="0">
+            <a:schemeClr val="accent1"/>
+          </a:effectRef>
+          <a:fontRef idx="minor">
+            <a:schemeClr val="tx1"/>
+          </a:fontRef>
+        </p:style>
+        <p:txBody>
+          <a:bodyPr rtlCol="0" anchor="ctr"/>
+          <a:lstStyle>
+            <a:defPPr/>
+          </a:lstStyle>
+          <a:p>
+            <a:endParaRPr lang="en-US"/>
+          </a:p>
+        </p:txBody>
+      </p:sp>
+      <p:sp>
+        <p:nvSpPr>
+          <p:cNvPr id="126" name="New shape">
+            <a:extLst>
+              <a:ext uri="{FF2B5EF4-FFF2-40B4-BE49-F238E27FC236}">
+                <a16:creationId xmlns:a16="http://schemas.microsoft.com/office/drawing/2014/main" id="{E6170F71-CE99-3CA5-9BD2-03763BEEF3EC}"/>
+              </a:ext>
+            </a:extLst>
+          </p:cNvPr>
+          <p:cNvSpPr/>
+          <p:nvPr/>
+        </p:nvSpPr>
+        <p:spPr>
+          <a:xfrm>
+            <a:off x="7034276" y="855472"/>
+            <a:ext cx="0" cy="927100"/>
+          </a:xfrm>
+          <a:prstGeom prst="line">
+            <a:avLst/>
+          </a:prstGeom>
+          <a:ln w="12700">
+            <a:solidFill>
+              <a:srgbClr val="FFFFFF"/>
+            </a:solidFill>
+          </a:ln>
+        </p:spPr>
+        <p:style>
+          <a:lnRef idx="1">
+            <a:schemeClr val="accent1"/>
+          </a:lnRef>
+          <a:fillRef idx="0">
+            <a:schemeClr val="accent1"/>
+          </a:fillRef>
+          <a:effectRef idx="0">
+            <a:schemeClr val="accent1"/>
+          </a:effectRef>
+          <a:fontRef idx="minor">
+            <a:schemeClr val="tx1"/>
+          </a:fontRef>
+        </p:style>
+        <p:txBody>
+          <a:bodyPr rtlCol="0" anchor="ctr"/>
+          <a:lstStyle>
+            <a:defPPr/>
+          </a:lstStyle>
+          <a:p>
+            <a:endParaRPr lang="en-US"/>
+          </a:p>
+        </p:txBody>
+      </p:sp>
+      <p:sp>
+        <p:nvSpPr>
+          <p:cNvPr id="127" name="New shape">
+            <a:extLst>
+              <a:ext uri="{FF2B5EF4-FFF2-40B4-BE49-F238E27FC236}">
+                <a16:creationId xmlns:a16="http://schemas.microsoft.com/office/drawing/2014/main" id="{A2A5E53D-691E-16DD-49B6-DA566C08BA90}"/>
+              </a:ext>
+            </a:extLst>
+          </p:cNvPr>
+          <p:cNvSpPr/>
+          <p:nvPr/>
+        </p:nvSpPr>
+        <p:spPr>
+          <a:xfrm>
+            <a:off x="11353800" y="855472"/>
+            <a:ext cx="0" cy="927100"/>
+          </a:xfrm>
+          <a:prstGeom prst="line">
+            <a:avLst/>
+          </a:prstGeom>
+          <a:ln w="12700">
+            <a:solidFill>
+              <a:srgbClr val="FFFFFF"/>
+            </a:solidFill>
+          </a:ln>
+        </p:spPr>
+        <p:style>
+          <a:lnRef idx="1">
+            <a:schemeClr val="accent1"/>
+          </a:lnRef>
+          <a:fillRef idx="0">
+            <a:schemeClr val="accent1"/>
+          </a:fillRef>
+          <a:effectRef idx="0">
+            <a:schemeClr val="accent1"/>
+          </a:effectRef>
+          <a:fontRef idx="minor">
+            <a:schemeClr val="tx1"/>
+          </a:fontRef>
+        </p:style>
+        <p:txBody>
+          <a:bodyPr rtlCol="0" anchor="ctr"/>
+          <a:lstStyle>
+            <a:defPPr/>
+          </a:lstStyle>
+          <a:p>
+            <a:endParaRPr lang="en-US"/>
+          </a:p>
+        </p:txBody>
+      </p:sp>
+      <p:sp>
+        <p:nvSpPr>
+          <p:cNvPr id="128" name="New shape">
+            <a:extLst>
+              <a:ext uri="{FF2B5EF4-FFF2-40B4-BE49-F238E27FC236}">
+                <a16:creationId xmlns:a16="http://schemas.microsoft.com/office/drawing/2014/main" id="{6A7ED039-CCBF-7CEE-EEF1-BA32A5ECCC53}"/>
+              </a:ext>
+            </a:extLst>
+          </p:cNvPr>
+          <p:cNvSpPr/>
+          <p:nvPr/>
+        </p:nvSpPr>
+        <p:spPr>
+          <a:xfrm>
+            <a:off x="7027926" y="861822"/>
+            <a:ext cx="4332224" cy="0"/>
+          </a:xfrm>
+          <a:prstGeom prst="line">
+            <a:avLst/>
+          </a:prstGeom>
+          <a:ln w="12700">
+            <a:solidFill>
+              <a:srgbClr val="FFFFFF"/>
+            </a:solidFill>
+          </a:ln>
+        </p:spPr>
+        <p:style>
+          <a:lnRef idx="1">
+            <a:schemeClr val="accent1"/>
+          </a:lnRef>
+          <a:fillRef idx="0">
+            <a:schemeClr val="accent1"/>
+          </a:fillRef>
+          <a:effectRef idx="0">
+            <a:schemeClr val="accent1"/>
+          </a:effectRef>
+          <a:fontRef idx="minor">
+            <a:schemeClr val="tx1"/>
+          </a:fontRef>
+        </p:style>
+        <p:txBody>
+          <a:bodyPr rtlCol="0" anchor="ctr"/>
+          <a:lstStyle>
+            <a:defPPr/>
+          </a:lstStyle>
+          <a:p>
+            <a:endParaRPr lang="en-US"/>
+          </a:p>
+        </p:txBody>
+      </p:sp>
+      <p:sp>
+        <p:nvSpPr>
+          <p:cNvPr id="129" name="New shape">
+            <a:extLst>
+              <a:ext uri="{FF2B5EF4-FFF2-40B4-BE49-F238E27FC236}">
+                <a16:creationId xmlns:a16="http://schemas.microsoft.com/office/drawing/2014/main" id="{A16C4846-281B-C58C-03B8-672FBEF936F9}"/>
+              </a:ext>
+            </a:extLst>
+          </p:cNvPr>
+          <p:cNvSpPr/>
+          <p:nvPr/>
+        </p:nvSpPr>
+        <p:spPr>
+          <a:xfrm>
+            <a:off x="7027926" y="1776222"/>
+            <a:ext cx="4332224" cy="0"/>
+          </a:xfrm>
+          <a:prstGeom prst="line">
+            <a:avLst/>
+          </a:prstGeom>
+          <a:ln w="12700">
+            <a:solidFill>
+              <a:srgbClr val="FFFFFF"/>
+            </a:solidFill>
+          </a:ln>
+        </p:spPr>
+        <p:style>
+          <a:lnRef idx="1">
+            <a:schemeClr val="accent1"/>
+          </a:lnRef>
+          <a:fillRef idx="0">
+            <a:schemeClr val="accent1"/>
+          </a:fillRef>
+          <a:effectRef idx="0">
+            <a:schemeClr val="accent1"/>
+          </a:effectRef>
+          <a:fontRef idx="minor">
+            <a:schemeClr val="tx1"/>
+          </a:fontRef>
+        </p:style>
+        <p:txBody>
+          <a:bodyPr rtlCol="0" anchor="ctr"/>
+          <a:lstStyle>
+            <a:defPPr/>
+          </a:lstStyle>
+          <a:p>
+            <a:endParaRPr lang="en-US"/>
+          </a:p>
+        </p:txBody>
+      </p:sp>
+      <p:sp>
+        <p:nvSpPr>
+          <p:cNvPr id="130" name="New shape">
+            <a:extLst>
+              <a:ext uri="{FF2B5EF4-FFF2-40B4-BE49-F238E27FC236}">
+                <a16:creationId xmlns:a16="http://schemas.microsoft.com/office/drawing/2014/main" id="{E817E1C5-2E3E-DA76-8DDE-CFC01C70354D}"/>
+              </a:ext>
+            </a:extLst>
+          </p:cNvPr>
+          <p:cNvSpPr/>
+          <p:nvPr/>
+        </p:nvSpPr>
+        <p:spPr>
+          <a:xfrm>
+            <a:off x="7182866" y="910875"/>
+            <a:ext cx="1914883" cy="415498"/>
           </a:xfrm>
           <a:prstGeom prst="rect">
             <a:avLst/>
@@ -21771,27 +21658,33 @@
           </a:lstStyle>
           <a:p>
             <a:r>
-              <a:rPr lang="en-US" sz="2400" b="1">
+              <a:rPr lang="en-US" sz="2400" b="1" dirty="0">
                 <a:solidFill>
                   <a:srgbClr val="FFFFFF"/>
                 </a:solidFill>
                 <a:latin typeface="Calibri"/>
               </a:rPr>
-              <a:t>Target  Start</a:t>
+              <a:t>Target      Start</a:t>
             </a:r>
           </a:p>
         </p:txBody>
       </p:sp>
       <p:sp>
         <p:nvSpPr>
-          <p:cNvPr id="95" name="New shape"/>
-          <p:cNvSpPr/>
-          <p:nvPr/>
-        </p:nvSpPr>
-        <p:spPr>
-          <a:xfrm>
-            <a:off x="9496933" y="932589"/>
-            <a:ext cx="1835646" cy="372070"/>
+          <p:cNvPr id="131" name="New shape">
+            <a:extLst>
+              <a:ext uri="{FF2B5EF4-FFF2-40B4-BE49-F238E27FC236}">
+                <a16:creationId xmlns:a16="http://schemas.microsoft.com/office/drawing/2014/main" id="{0DF43D6D-95A2-2D0E-A24E-1892F7A81DC9}"/>
+              </a:ext>
+            </a:extLst>
+          </p:cNvPr>
+          <p:cNvSpPr/>
+          <p:nvPr/>
+        </p:nvSpPr>
+        <p:spPr>
+          <a:xfrm>
+            <a:off x="9496933" y="910875"/>
+            <a:ext cx="1892506" cy="415498"/>
           </a:xfrm>
           <a:prstGeom prst="rect">
             <a:avLst/>
@@ -21823,13 +21716,13 @@
           </a:lstStyle>
           <a:p>
             <a:r>
-              <a:rPr lang="en-US" sz="2400" b="1">
+              <a:rPr lang="en-US" sz="2400" b="1" dirty="0">
                 <a:solidFill>
                   <a:srgbClr val="FFFFFF"/>
                 </a:solidFill>
                 <a:latin typeface="Calibri"/>
               </a:rPr>
-              <a:t>End   Middle</a:t>
+              <a:t>End      Middle</a:t>
             </a:r>
           </a:p>
         </p:txBody>
@@ -21861,53 +21754,6 @@
       </p:grpSpPr>
       <p:sp>
         <p:nvSpPr>
-          <p:cNvPr id="2" name="New shape"/>
-          <p:cNvSpPr/>
-          <p:nvPr/>
-        </p:nvSpPr>
-        <p:spPr>
-          <a:xfrm>
-            <a:off x="0" y="-1"/>
-            <a:ext cx="12192000" cy="6857999"/>
-          </a:xfrm>
-          <a:prstGeom prst="rect">
-            <a:avLst/>
-          </a:prstGeom>
-          <a:solidFill>
-            <a:srgbClr val="FFFFFF"/>
-          </a:solidFill>
-          <a:ln w="0">
-            <a:noFill/>
-          </a:ln>
-        </p:spPr>
-        <p:style>
-          <a:lnRef idx="2">
-            <a:schemeClr val="accent1">
-              <a:shade val="50000"/>
-            </a:schemeClr>
-          </a:lnRef>
-          <a:fillRef idx="1">
-            <a:schemeClr val="accent1"/>
-          </a:fillRef>
-          <a:effectRef idx="0">
-            <a:schemeClr val="accent1"/>
-          </a:effectRef>
-          <a:fontRef idx="minor">
-            <a:schemeClr val="lt1"/>
-          </a:fontRef>
-        </p:style>
-        <p:txBody>
-          <a:bodyPr rtlCol="0" anchor="ctr"/>
-          <a:lstStyle>
-            <a:defPPr/>
-          </a:lstStyle>
-          <a:p>
-            <a:endParaRPr lang="en-US"/>
-          </a:p>
-        </p:txBody>
-      </p:sp>
-      <p:sp>
-        <p:nvSpPr>
           <p:cNvPr id="3" name="New shape"/>
           <p:cNvSpPr/>
           <p:nvPr/>
@@ -24981,58 +24827,6 @@
       </p:sp>
       <p:sp>
         <p:nvSpPr>
-          <p:cNvPr id="70" name="New shape"/>
-          <p:cNvSpPr/>
-          <p:nvPr/>
-        </p:nvSpPr>
-        <p:spPr>
-          <a:xfrm>
-            <a:off x="1085393" y="2235480"/>
-            <a:ext cx="8249421" cy="496714"/>
-          </a:xfrm>
-          <a:prstGeom prst="rect">
-            <a:avLst/>
-          </a:prstGeom>
-          <a:noFill/>
-        </p:spPr>
-        <p:style>
-          <a:lnRef idx="2">
-            <a:srgbClr val="000000">
-              <a:alpha val="0"/>
-            </a:srgbClr>
-          </a:lnRef>
-          <a:fillRef idx="1">
-            <a:schemeClr val="accent1"/>
-          </a:fillRef>
-          <a:effectRef idx="0">
-            <a:schemeClr val="accent1"/>
-          </a:effectRef>
-          <a:fontRef idx="minor">
-            <a:schemeClr val="lt1"/>
-          </a:fontRef>
-        </p:style>
-        <p:txBody>
-          <a:bodyPr wrap="none" lIns="0" tIns="0" rtlCol="0" anchor="ctr">
-            <a:spAutoFit/>
-          </a:bodyPr>
-          <a:lstStyle>
-            <a:defPPr/>
-          </a:lstStyle>
-          <a:p>
-            <a:r>
-              <a:rPr lang="en-US" sz="3204" b="1">
-                <a:solidFill>
-                  <a:srgbClr val="FFFFFF"/>
-                </a:solidFill>
-                <a:latin typeface="Calibri"/>
-              </a:rPr>
-              <a:t>67  8  910 11 14 15 17 19 22 23 25 28 30</a:t>
-            </a:r>
-          </a:p>
-        </p:txBody>
-      </p:sp>
-      <p:sp>
-        <p:nvSpPr>
           <p:cNvPr id="71" name="New shape"/>
           <p:cNvSpPr/>
           <p:nvPr/>
@@ -26235,8 +26029,8 @@
         </p:nvSpPr>
         <p:spPr>
           <a:xfrm>
-            <a:off x="7182866" y="932589"/>
-            <a:ext cx="1735782" cy="372070"/>
+            <a:off x="7182866" y="910875"/>
+            <a:ext cx="1914883" cy="415498"/>
           </a:xfrm>
           <a:prstGeom prst="rect">
             <a:avLst/>
@@ -26268,13 +26062,13 @@
           </a:lstStyle>
           <a:p>
             <a:r>
-              <a:rPr lang="en-US" sz="2400" b="1">
+              <a:rPr lang="en-US" sz="2400" b="1" dirty="0">
                 <a:solidFill>
                   <a:srgbClr val="FFFFFF"/>
                 </a:solidFill>
                 <a:latin typeface="Calibri"/>
               </a:rPr>
-              <a:t>Target  Start</a:t>
+              <a:t>Target      Start</a:t>
             </a:r>
           </a:p>
         </p:txBody>
@@ -26287,8 +26081,8 @@
         </p:nvSpPr>
         <p:spPr>
           <a:xfrm>
-            <a:off x="9496933" y="932589"/>
-            <a:ext cx="1835646" cy="372070"/>
+            <a:off x="9496933" y="910875"/>
+            <a:ext cx="1892506" cy="415498"/>
           </a:xfrm>
           <a:prstGeom prst="rect">
             <a:avLst/>
@@ -26320,13 +26114,13 @@
           </a:lstStyle>
           <a:p>
             <a:r>
-              <a:rPr lang="en-US" sz="2400" b="1">
+              <a:rPr lang="en-US" sz="2400" b="1" dirty="0">
                 <a:solidFill>
                   <a:srgbClr val="FFFFFF"/>
                 </a:solidFill>
                 <a:latin typeface="Calibri"/>
               </a:rPr>
-              <a:t>End   Middle</a:t>
+              <a:t>End      Middle</a:t>
             </a:r>
           </a:p>
         </p:txBody>
@@ -26483,6 +26277,64 @@
                 <a:latin typeface="Calibri"/>
               </a:rPr>
               <a:t>14</a:t>
+            </a:r>
+          </a:p>
+        </p:txBody>
+      </p:sp>
+      <p:sp>
+        <p:nvSpPr>
+          <p:cNvPr id="118" name="New shape">
+            <a:extLst>
+              <a:ext uri="{FF2B5EF4-FFF2-40B4-BE49-F238E27FC236}">
+                <a16:creationId xmlns:a16="http://schemas.microsoft.com/office/drawing/2014/main" id="{5B943636-CA35-AADF-0219-E08094A104D3}"/>
+              </a:ext>
+            </a:extLst>
+          </p:cNvPr>
+          <p:cNvSpPr/>
+          <p:nvPr/>
+        </p:nvSpPr>
+        <p:spPr>
+          <a:xfrm>
+            <a:off x="1085393" y="2214212"/>
+            <a:ext cx="10345140" cy="539250"/>
+          </a:xfrm>
+          <a:prstGeom prst="rect">
+            <a:avLst/>
+          </a:prstGeom>
+          <a:noFill/>
+        </p:spPr>
+        <p:style>
+          <a:lnRef idx="2">
+            <a:srgbClr val="000000">
+              <a:alpha val="0"/>
+            </a:srgbClr>
+          </a:lnRef>
+          <a:fillRef idx="1">
+            <a:schemeClr val="accent1"/>
+          </a:fillRef>
+          <a:effectRef idx="0">
+            <a:schemeClr val="accent1"/>
+          </a:effectRef>
+          <a:fontRef idx="minor">
+            <a:schemeClr val="lt1"/>
+          </a:fontRef>
+        </p:style>
+        <p:txBody>
+          <a:bodyPr wrap="none" lIns="0" tIns="0" rtlCol="0" anchor="ctr">
+            <a:spAutoFit/>
+          </a:bodyPr>
+          <a:lstStyle>
+            <a:defPPr/>
+          </a:lstStyle>
+          <a:p>
+            <a:r>
+              <a:rPr lang="en-US" sz="3204" b="1" dirty="0">
+                <a:solidFill>
+                  <a:srgbClr val="FFFFFF"/>
+                </a:solidFill>
+                <a:latin typeface="Calibri"/>
+              </a:rPr>
+              <a:t>6      7     8     9     10   11   14   15    17  19    22   23   25   28   30</a:t>
             </a:r>
           </a:p>
         </p:txBody>
@@ -26514,53 +26366,6 @@
       </p:grpSpPr>
       <p:sp>
         <p:nvSpPr>
-          <p:cNvPr id="2" name="New shape"/>
-          <p:cNvSpPr/>
-          <p:nvPr/>
-        </p:nvSpPr>
-        <p:spPr>
-          <a:xfrm>
-            <a:off x="0" y="-1"/>
-            <a:ext cx="12192000" cy="6857999"/>
-          </a:xfrm>
-          <a:prstGeom prst="rect">
-            <a:avLst/>
-          </a:prstGeom>
-          <a:solidFill>
-            <a:srgbClr val="FFFFFF"/>
-          </a:solidFill>
-          <a:ln w="0">
-            <a:noFill/>
-          </a:ln>
-        </p:spPr>
-        <p:style>
-          <a:lnRef idx="2">
-            <a:schemeClr val="accent1">
-              <a:shade val="50000"/>
-            </a:schemeClr>
-          </a:lnRef>
-          <a:fillRef idx="1">
-            <a:schemeClr val="accent1"/>
-          </a:fillRef>
-          <a:effectRef idx="0">
-            <a:schemeClr val="accent1"/>
-          </a:effectRef>
-          <a:fontRef idx="minor">
-            <a:schemeClr val="lt1"/>
-          </a:fontRef>
-        </p:style>
-        <p:txBody>
-          <a:bodyPr rtlCol="0" anchor="ctr"/>
-          <a:lstStyle>
-            <a:defPPr/>
-          </a:lstStyle>
-          <a:p>
-            <a:endParaRPr lang="en-US"/>
-          </a:p>
-        </p:txBody>
-      </p:sp>
-      <p:sp>
-        <p:nvSpPr>
           <p:cNvPr id="3" name="New shape"/>
           <p:cNvSpPr/>
           <p:nvPr/>
@@ -29634,58 +29439,6 @@
       </p:sp>
       <p:sp>
         <p:nvSpPr>
-          <p:cNvPr id="70" name="New shape"/>
-          <p:cNvSpPr/>
-          <p:nvPr/>
-        </p:nvSpPr>
-        <p:spPr>
-          <a:xfrm>
-            <a:off x="1085393" y="2235480"/>
-            <a:ext cx="8249421" cy="496714"/>
-          </a:xfrm>
-          <a:prstGeom prst="rect">
-            <a:avLst/>
-          </a:prstGeom>
-          <a:noFill/>
-        </p:spPr>
-        <p:style>
-          <a:lnRef idx="2">
-            <a:srgbClr val="000000">
-              <a:alpha val="0"/>
-            </a:srgbClr>
-          </a:lnRef>
-          <a:fillRef idx="1">
-            <a:schemeClr val="accent1"/>
-          </a:fillRef>
-          <a:effectRef idx="0">
-            <a:schemeClr val="accent1"/>
-          </a:effectRef>
-          <a:fontRef idx="minor">
-            <a:schemeClr val="lt1"/>
-          </a:fontRef>
-        </p:style>
-        <p:txBody>
-          <a:bodyPr wrap="none" lIns="0" tIns="0" rtlCol="0" anchor="ctr">
-            <a:spAutoFit/>
-          </a:bodyPr>
-          <a:lstStyle>
-            <a:defPPr/>
-          </a:lstStyle>
-          <a:p>
-            <a:r>
-              <a:rPr lang="en-US" sz="3204" b="1">
-                <a:solidFill>
-                  <a:srgbClr val="FFFFFF"/>
-                </a:solidFill>
-                <a:latin typeface="Calibri"/>
-              </a:rPr>
-              <a:t>67  8  910 11 14 15 17 19 22 23 25 28 30</a:t>
-            </a:r>
-          </a:p>
-        </p:txBody>
-      </p:sp>
-      <p:sp>
-        <p:nvSpPr>
           <p:cNvPr id="71" name="New shape"/>
           <p:cNvSpPr/>
           <p:nvPr/>
@@ -30888,8 +30641,8 @@
         </p:nvSpPr>
         <p:spPr>
           <a:xfrm>
-            <a:off x="7182866" y="932589"/>
-            <a:ext cx="1735782" cy="372070"/>
+            <a:off x="7182866" y="910875"/>
+            <a:ext cx="1914883" cy="415498"/>
           </a:xfrm>
           <a:prstGeom prst="rect">
             <a:avLst/>
@@ -30921,13 +30674,13 @@
           </a:lstStyle>
           <a:p>
             <a:r>
-              <a:rPr lang="en-US" sz="2400" b="1">
+              <a:rPr lang="en-US" sz="2400" b="1" dirty="0">
                 <a:solidFill>
                   <a:srgbClr val="FFFFFF"/>
                 </a:solidFill>
                 <a:latin typeface="Calibri"/>
               </a:rPr>
-              <a:t>Target  Start</a:t>
+              <a:t>Target      Start</a:t>
             </a:r>
           </a:p>
         </p:txBody>
@@ -30940,8 +30693,8 @@
         </p:nvSpPr>
         <p:spPr>
           <a:xfrm>
-            <a:off x="9496933" y="932589"/>
-            <a:ext cx="1835646" cy="372070"/>
+            <a:off x="9496933" y="910875"/>
+            <a:ext cx="1892506" cy="415498"/>
           </a:xfrm>
           <a:prstGeom prst="rect">
             <a:avLst/>
@@ -30973,13 +30726,13 @@
           </a:lstStyle>
           <a:p>
             <a:r>
-              <a:rPr lang="en-US" sz="2400" b="1">
+              <a:rPr lang="en-US" sz="2400" b="1" dirty="0">
                 <a:solidFill>
                   <a:srgbClr val="FFFFFF"/>
                 </a:solidFill>
                 <a:latin typeface="Calibri"/>
               </a:rPr>
-              <a:t>End   Middle</a:t>
+              <a:t>End      Middle</a:t>
             </a:r>
           </a:p>
         </p:txBody>
@@ -31188,6 +30941,64 @@
                 <a:latin typeface="Calibri"/>
               </a:rPr>
               <a:t>7</a:t>
+            </a:r>
+          </a:p>
+        </p:txBody>
+      </p:sp>
+      <p:sp>
+        <p:nvSpPr>
+          <p:cNvPr id="100" name="New shape">
+            <a:extLst>
+              <a:ext uri="{FF2B5EF4-FFF2-40B4-BE49-F238E27FC236}">
+                <a16:creationId xmlns:a16="http://schemas.microsoft.com/office/drawing/2014/main" id="{270D670E-D65A-1192-0776-7351CC5EBE13}"/>
+              </a:ext>
+            </a:extLst>
+          </p:cNvPr>
+          <p:cNvSpPr/>
+          <p:nvPr/>
+        </p:nvSpPr>
+        <p:spPr>
+          <a:xfrm>
+            <a:off x="1085393" y="2214212"/>
+            <a:ext cx="10345140" cy="539250"/>
+          </a:xfrm>
+          <a:prstGeom prst="rect">
+            <a:avLst/>
+          </a:prstGeom>
+          <a:noFill/>
+        </p:spPr>
+        <p:style>
+          <a:lnRef idx="2">
+            <a:srgbClr val="000000">
+              <a:alpha val="0"/>
+            </a:srgbClr>
+          </a:lnRef>
+          <a:fillRef idx="1">
+            <a:schemeClr val="accent1"/>
+          </a:fillRef>
+          <a:effectRef idx="0">
+            <a:schemeClr val="accent1"/>
+          </a:effectRef>
+          <a:fontRef idx="minor">
+            <a:schemeClr val="lt1"/>
+          </a:fontRef>
+        </p:style>
+        <p:txBody>
+          <a:bodyPr wrap="none" lIns="0" tIns="0" rtlCol="0" anchor="ctr">
+            <a:spAutoFit/>
+          </a:bodyPr>
+          <a:lstStyle>
+            <a:defPPr/>
+          </a:lstStyle>
+          <a:p>
+            <a:r>
+              <a:rPr lang="en-US" sz="3204" b="1" dirty="0">
+                <a:solidFill>
+                  <a:srgbClr val="FFFFFF"/>
+                </a:solidFill>
+                <a:latin typeface="Calibri"/>
+              </a:rPr>
+              <a:t>6      7     8     9     10   11   14   15    17  19    22   23   25   28   30</a:t>
             </a:r>
           </a:p>
         </p:txBody>
@@ -31219,53 +31030,6 @@
       </p:grpSpPr>
       <p:sp>
         <p:nvSpPr>
-          <p:cNvPr id="2" name="New shape"/>
-          <p:cNvSpPr/>
-          <p:nvPr/>
-        </p:nvSpPr>
-        <p:spPr>
-          <a:xfrm>
-            <a:off x="0" y="-1"/>
-            <a:ext cx="12192000" cy="6857999"/>
-          </a:xfrm>
-          <a:prstGeom prst="rect">
-            <a:avLst/>
-          </a:prstGeom>
-          <a:solidFill>
-            <a:srgbClr val="FFFFFF"/>
-          </a:solidFill>
-          <a:ln w="0">
-            <a:noFill/>
-          </a:ln>
-        </p:spPr>
-        <p:style>
-          <a:lnRef idx="2">
-            <a:schemeClr val="accent1">
-              <a:shade val="50000"/>
-            </a:schemeClr>
-          </a:lnRef>
-          <a:fillRef idx="1">
-            <a:schemeClr val="accent1"/>
-          </a:fillRef>
-          <a:effectRef idx="0">
-            <a:schemeClr val="accent1"/>
-          </a:effectRef>
-          <a:fontRef idx="minor">
-            <a:schemeClr val="lt1"/>
-          </a:fontRef>
-        </p:style>
-        <p:txBody>
-          <a:bodyPr rtlCol="0" anchor="ctr"/>
-          <a:lstStyle>
-            <a:defPPr/>
-          </a:lstStyle>
-          <a:p>
-            <a:endParaRPr lang="en-US"/>
-          </a:p>
-        </p:txBody>
-      </p:sp>
-      <p:sp>
-        <p:nvSpPr>
           <p:cNvPr id="3" name="New shape"/>
           <p:cNvSpPr/>
           <p:nvPr/>
@@ -34339,58 +34103,6 @@
       </p:sp>
       <p:sp>
         <p:nvSpPr>
-          <p:cNvPr id="70" name="New shape"/>
-          <p:cNvSpPr/>
-          <p:nvPr/>
-        </p:nvSpPr>
-        <p:spPr>
-          <a:xfrm>
-            <a:off x="1085393" y="2235480"/>
-            <a:ext cx="8249421" cy="496714"/>
-          </a:xfrm>
-          <a:prstGeom prst="rect">
-            <a:avLst/>
-          </a:prstGeom>
-          <a:noFill/>
-        </p:spPr>
-        <p:style>
-          <a:lnRef idx="2">
-            <a:srgbClr val="000000">
-              <a:alpha val="0"/>
-            </a:srgbClr>
-          </a:lnRef>
-          <a:fillRef idx="1">
-            <a:schemeClr val="accent1"/>
-          </a:fillRef>
-          <a:effectRef idx="0">
-            <a:schemeClr val="accent1"/>
-          </a:effectRef>
-          <a:fontRef idx="minor">
-            <a:schemeClr val="lt1"/>
-          </a:fontRef>
-        </p:style>
-        <p:txBody>
-          <a:bodyPr wrap="none" lIns="0" tIns="0" rtlCol="0" anchor="ctr">
-            <a:spAutoFit/>
-          </a:bodyPr>
-          <a:lstStyle>
-            <a:defPPr/>
-          </a:lstStyle>
-          <a:p>
-            <a:r>
-              <a:rPr lang="en-US" sz="3204" b="1">
-                <a:solidFill>
-                  <a:srgbClr val="FFFFFF"/>
-                </a:solidFill>
-                <a:latin typeface="Calibri"/>
-              </a:rPr>
-              <a:t>67  8  910 11 14 15 17 19 22 23 25 28 30</a:t>
-            </a:r>
-          </a:p>
-        </p:txBody>
-      </p:sp>
-      <p:sp>
-        <p:nvSpPr>
           <p:cNvPr id="71" name="New shape"/>
           <p:cNvSpPr/>
           <p:nvPr/>
@@ -35593,8 +35305,8 @@
         </p:nvSpPr>
         <p:spPr>
           <a:xfrm>
-            <a:off x="7182866" y="932589"/>
-            <a:ext cx="1735782" cy="372070"/>
+            <a:off x="7182866" y="910875"/>
+            <a:ext cx="1914883" cy="415498"/>
           </a:xfrm>
           <a:prstGeom prst="rect">
             <a:avLst/>
@@ -35626,13 +35338,13 @@
           </a:lstStyle>
           <a:p>
             <a:r>
-              <a:rPr lang="en-US" sz="2400" b="1">
+              <a:rPr lang="en-US" sz="2400" b="1" dirty="0">
                 <a:solidFill>
                   <a:srgbClr val="FFFFFF"/>
                 </a:solidFill>
                 <a:latin typeface="Calibri"/>
               </a:rPr>
-              <a:t>Target  Start</a:t>
+              <a:t>Target      Start</a:t>
             </a:r>
           </a:p>
         </p:txBody>
@@ -35645,8 +35357,8 @@
         </p:nvSpPr>
         <p:spPr>
           <a:xfrm>
-            <a:off x="9496933" y="932589"/>
-            <a:ext cx="1835646" cy="372070"/>
+            <a:off x="9496933" y="910875"/>
+            <a:ext cx="1892506" cy="415498"/>
           </a:xfrm>
           <a:prstGeom prst="rect">
             <a:avLst/>
@@ -35678,13 +35390,13 @@
           </a:lstStyle>
           <a:p>
             <a:r>
-              <a:rPr lang="en-US" sz="2400" b="1">
+              <a:rPr lang="en-US" sz="2400" b="1" dirty="0">
                 <a:solidFill>
                   <a:srgbClr val="FFFFFF"/>
                 </a:solidFill>
                 <a:latin typeface="Calibri"/>
               </a:rPr>
-              <a:t>End   Middle</a:t>
+              <a:t>End      Middle</a:t>
             </a:r>
           </a:p>
         </p:txBody>
@@ -35893,6 +35605,64 @@
                 <a:latin typeface="Calibri"/>
               </a:rPr>
               <a:t>7</a:t>
+            </a:r>
+          </a:p>
+        </p:txBody>
+      </p:sp>
+      <p:sp>
+        <p:nvSpPr>
+          <p:cNvPr id="100" name="New shape">
+            <a:extLst>
+              <a:ext uri="{FF2B5EF4-FFF2-40B4-BE49-F238E27FC236}">
+                <a16:creationId xmlns:a16="http://schemas.microsoft.com/office/drawing/2014/main" id="{11B97A1B-24B7-C43A-5FF4-1C6A140EC178}"/>
+              </a:ext>
+            </a:extLst>
+          </p:cNvPr>
+          <p:cNvSpPr/>
+          <p:nvPr/>
+        </p:nvSpPr>
+        <p:spPr>
+          <a:xfrm>
+            <a:off x="1085393" y="2214212"/>
+            <a:ext cx="10345140" cy="539250"/>
+          </a:xfrm>
+          <a:prstGeom prst="rect">
+            <a:avLst/>
+          </a:prstGeom>
+          <a:noFill/>
+        </p:spPr>
+        <p:style>
+          <a:lnRef idx="2">
+            <a:srgbClr val="000000">
+              <a:alpha val="0"/>
+            </a:srgbClr>
+          </a:lnRef>
+          <a:fillRef idx="1">
+            <a:schemeClr val="accent1"/>
+          </a:fillRef>
+          <a:effectRef idx="0">
+            <a:schemeClr val="accent1"/>
+          </a:effectRef>
+          <a:fontRef idx="minor">
+            <a:schemeClr val="lt1"/>
+          </a:fontRef>
+        </p:style>
+        <p:txBody>
+          <a:bodyPr wrap="none" lIns="0" tIns="0" rtlCol="0" anchor="ctr">
+            <a:spAutoFit/>
+          </a:bodyPr>
+          <a:lstStyle>
+            <a:defPPr/>
+          </a:lstStyle>
+          <a:p>
+            <a:r>
+              <a:rPr lang="en-US" sz="3204" b="1" dirty="0">
+                <a:solidFill>
+                  <a:srgbClr val="FFFFFF"/>
+                </a:solidFill>
+                <a:latin typeface="Calibri"/>
+              </a:rPr>
+              <a:t>6      7     8     9     10   11   14   15    17  19    22   23   25   28   30</a:t>
             </a:r>
           </a:p>
         </p:txBody>
